--- a/Lesson Material/LSN 1 -  Introduction to GIT and GitHub/Agentic_AI_for_Engineering.pptx
+++ b/Lesson Material/LSN 1 -  Introduction to GIT and GitHub/Agentic_AI_for_Engineering.pptx
@@ -1054,8 +1054,7 @@
           <a:lstStyle/>
           <a:p>
             <a:r>
-              <a:rPr lang="en-US" dirty="0"/>
-              <a:t>Three small files make a repo usable by people and agents. README tells anyone how to run it. .gitignore keeps generated files, data, and secrets out of commits. AGENTS.md is the instruction file Codex reads at the start of every task; Claude Code uses CLAUDE.md for the same purpose. We'll write a real one in Lesson 2.</a:t>
+              <a:t>Three small files make a repo usable by people and agents. README tells anyone how to run it. .gitignore keeps generated files, data, and secrets out of commits. AGENTS.md is the instruction file Codex reads at the start of every task. We'll improve it in Lesson 2.</a:t>
             </a:r>
           </a:p>
         </p:txBody>

--- a/Lesson Material/LSN 1 -  Introduction to GIT and GitHub/Agentic_AI_for_Engineering.pptx
+++ b/Lesson Material/LSN 1 -  Introduction to GIT and GitHub/Agentic_AI_for_Engineering.pptx
@@ -18,7 +18,6 @@
     <p:sldId id="263" r:id="rIdS8"/>
     <p:sldId id="264" r:id="rIdS9"/>
     <p:sldId id="265" r:id="rIdS10"/>
-    <p:sldId id="266" r:id="rIdS11"/>
     <p:sldId id="267" r:id="rIdS12"/>
     <p:sldId id="268" r:id="rIdS13"/>
     <p:sldId id="269" r:id="rIdS14"/>
@@ -27,6 +26,7 @@
     <p:sldId id="272" r:id="rIdS17"/>
     <p:sldId id="273" r:id="rIdS18"/>
     <p:sldId id="274" r:id="rIdS19"/>
+    <p:sldId id="266" r:id="rIdS11"/>
     <p:sldId id="275" r:id="rIdS20"/>
     <p:sldId id="276" r:id="rIdS21"/>
     <p:sldId id="277" r:id="rIdS22"/>
@@ -582,8 +582,7 @@
           <a:lstStyle/>
           <a:p>
             <a:r>
-              <a:rPr lang="en-US" dirty="0"/>
-              <a:t>Using the template gives each participant their own copy with full write access, which a plain clone of the instructor repo would not. Recommend keeping repos out of OneDrive-synced folders; OneDrive and Git can fight over the same files.</a:t>
+              <a:t>The course lead shares a link to a GitHub template repository (beam-calc). Use this template makes each participant a separate copy that they own, with full write access; a plain clone of the course lead’s repo would not let them push. They then clone their own copy, not the template. Recommend keeping repos out of OneDrive-synced folders; OneDrive and Git can fight over the same files.</a:t>
             </a:r>
           </a:p>
         </p:txBody>
@@ -641,8 +640,7 @@
           <a:lstStyle/>
           <a:p>
             <a:r>
-              <a:rPr lang="en-US" dirty="0"/>
-              <a:t>Reference slide; participants don't do this in class. This is how they'll put their own existing course code on GitHub before Lesson 2. Emphasize the private checkbox on Publish.</a:t>
+              <a:t>Homework, not an in-class exercise. Participants do this after class with one of their own projects (scripts, models, course code) before Lesson 2. It sits just before the Agent-Ready Checklist so they see the steps that get them to its first item. Emphasize the private checkbox on Publish.</a:t>
             </a:r>
           </a:p>
         </p:txBody>
@@ -1230,8 +1228,7 @@
           <a:lstStyle/>
           <a:p>
             <a:r>
-              <a:rPr lang="en-US" dirty="0"/>
-              <a:t>Homework before Lesson 2: pick one of your own projects and bring it to this state. Lesson 2 starts from a repo that meets this checklist.</a:t>
+              <a:t>Homework before Lesson 2: pick one of your own projects and bring it to this state. The previous slide has the steps for getting it onto GitHub. Lesson 2 starts from a repo that meets this checklist.</a:t>
             </a:r>
           </a:p>
         </p:txBody>
@@ -1466,8 +1463,7 @@
           <a:lstStyle/>
           <a:p>
             <a:r>
-              <a:rPr lang="en-US" dirty="0"/>
-              <a:t>Ideally participants complete this before class. Government or managed laptops may block installs, so coordinate with IT ahead of time. Use whatever account type your organization directs; the lesson works the same either way.</a:t>
+              <a:t>Ideally participants complete this before class. Government or managed laptops may block installs, so coordinate with IT ahead of time. Use whatever account type your organization directs; the lesson works the same either way. Course lead: before class, publish the beam-calc template repository (see practice/README.md in the course repo) and send its link with these prerequisites.</a:t>
             </a:r>
           </a:p>
         </p:txBody>
@@ -3907,6 +3903,10 @@
           </a:solidFill>
           <a:ln/>
         </p:spPr>
+        <p:txBody>
+          <a:bodyPr/>
+          <a:p/>
+        </p:txBody>
       </p:sp>
       <p:sp xmlns:p="http://schemas.openxmlformats.org/presentationml/2006/main" xmlns:a="http://schemas.openxmlformats.org/drawingml/2006/main" xmlns:r="http://schemas.openxmlformats.org/officeDocument/2006/relationships">
         <p:nvSpPr>
@@ -4072,7 +4072,7 @@
                 <a:ea typeface="+mn-ea"/>
                 <a:cs typeface="+mn-cs"/>
               </a:rPr>
-              <a:t>Open the beam-calc link from your instructor.</a:t>
+              <a:t>Open the course lead’s beam-calc link.</a:t>
             </a:r>
             <a:endParaRPr lang="en-US" sz="2025" dirty="0"/>
           </a:p>
@@ -4685,7 +4685,7 @@
           <a:p>
             <a:r>
               <a:rPr lang="en-US" dirty="0"/>
-              <a:t>Your Own Code: Create &amp; Publish</a:t>
+              <a:t>After Class: Your Own Repo</a:t>
             </a:r>
             <a:endParaRPr lang="en-US" dirty="0"/>
           </a:p>
@@ -4712,6 +4712,10 @@
           </a:solidFill>
           <a:ln/>
         </p:spPr>
+        <p:txBody>
+          <a:bodyPr/>
+          <a:p/>
+        </p:txBody>
       </p:sp>
       <p:sp xmlns:p="http://schemas.openxmlformats.org/presentationml/2006/main" xmlns:a="http://schemas.openxmlformats.org/drawingml/2006/main" xmlns:r="http://schemas.openxmlformats.org/officeDocument/2006/relationships">
         <p:nvSpPr>
@@ -4748,7 +4752,7 @@
                 <a:ea typeface="+mn-ea"/>
                 <a:cs typeface="+mn-cs"/>
               </a:rPr>
-              <a:t>REFERENCE · DO BEFORE LESSON 2</a:t>
+              <a:t>AFTER CLASS · BEFORE LESSON 2</a:t>
             </a:r>
             <a:endParaRPr lang="en-US" sz="1800" dirty="0"/>
           </a:p>
@@ -4792,7 +4796,7 @@
                 <a:ea typeface="+mn-ea"/>
                 <a:cs typeface="+mn-cs"/>
               </a:rPr>
-              <a:t>To put an existing project folder (scripts, models, course code) under version control:</a:t>
+              <a:t>Not a beam-calc exercise. After class, put one of your own projects on GitHub:</a:t>
             </a:r>
             <a:endParaRPr lang="en-US" sz="2100" dirty="0"/>
           </a:p>
@@ -5400,6 +5404,10 @@
           </a:solidFill>
           <a:ln/>
         </p:spPr>
+        <p:txBody>
+          <a:bodyPr/>
+          <a:p/>
+        </p:txBody>
       </p:sp>
       <p:sp xmlns:p="http://schemas.openxmlformats.org/presentationml/2006/main" xmlns:a="http://schemas.openxmlformats.org/drawingml/2006/main" xmlns:r="http://schemas.openxmlformats.org/officeDocument/2006/relationships">
         <p:nvSpPr>
@@ -5475,7 +5483,7 @@
         </p:nvSpPr>
         <p:spPr>
           <a:xfrm>
-            <a:off x="133350" y="3524250"/>
+            <a:off x="133350" y="5810250"/>
             <a:ext cx="1442184" cy="381000"/>
           </a:xfrm>
           <a:prstGeom prst="rect">
@@ -5502,7 +5510,7 @@
                   <a:schemeClr val="accent2"/>
                 </a:solidFill>
               </a:rPr>
-              <a:t>Clone</a:t>
+              <a:t>Agent-Ready</a:t>
             </a:r>
             <a:endParaRPr lang="en-US" sz="1800" b="1" dirty="0"/>
           </a:p>
@@ -15259,6 +15267,10 @@
           </a:solidFill>
           <a:ln/>
         </p:spPr>
+        <p:txBody>
+          <a:bodyPr/>
+          <a:p/>
+        </p:txBody>
       </p:sp>
       <p:sp xmlns:p="http://schemas.openxmlformats.org/presentationml/2006/main" xmlns:a="http://schemas.openxmlformats.org/drawingml/2006/main" xmlns:r="http://schemas.openxmlformats.org/officeDocument/2006/relationships">
         <p:nvSpPr>
@@ -15279,6 +15291,10 @@
           </a:solidFill>
           <a:ln/>
         </p:spPr>
+        <p:txBody>
+          <a:bodyPr/>
+          <a:p/>
+        </p:txBody>
       </p:sp>
       <p:sp xmlns:p="http://schemas.openxmlformats.org/presentationml/2006/main" xmlns:a="http://schemas.openxmlformats.org/drawingml/2006/main" xmlns:r="http://schemas.openxmlformats.org/officeDocument/2006/relationships">
         <p:nvSpPr>
@@ -15301,6 +15317,10 @@
             <a:prstDash val="solid"/>
           </a:ln>
         </p:spPr>
+        <p:txBody>
+          <a:bodyPr/>
+          <a:p/>
+        </p:txBody>
       </p:sp>
       <p:sp xmlns:p="http://schemas.openxmlformats.org/presentationml/2006/main" xmlns:a="http://schemas.openxmlformats.org/drawingml/2006/main" xmlns:r="http://schemas.openxmlformats.org/officeDocument/2006/relationships">
         <p:nvSpPr>
@@ -15311,7 +15331,7 @@
         <p:spPr>
           <a:xfrm>
             <a:off x="2355850" y="2403475"/>
-            <a:ext cx="3831928" cy="381000"/>
+            <a:ext cx="9000000" cy="381000"/>
           </a:xfrm>
           <a:prstGeom prst="rect">
             <a:avLst/>
@@ -15349,6 +15369,17 @@
                 <a:cs typeface="+mn-cs"/>
               </a:rPr>
               <a:t>private</a:t>
+            </a:r>
+            <a:r>
+              <a:rPr lang="en-US" sz="2025" dirty="0">
+                <a:solidFill>
+                  <a:srgbClr val="000000"/>
+                </a:solidFill>
+                <a:latin typeface="+mn-lt"/>
+                <a:ea typeface="+mn-ea"/>
+                <a:cs typeface="+mn-cs"/>
+              </a:rPr>
+              <a:t> (steps on the previous slide)</a:t>
             </a:r>
             <a:endParaRPr lang="en-US" sz="2025" dirty="0"/>
           </a:p>
@@ -15373,6 +15404,10 @@
           </a:solidFill>
           <a:ln/>
         </p:spPr>
+        <p:txBody>
+          <a:bodyPr/>
+          <a:p/>
+        </p:txBody>
       </p:sp>
       <p:sp xmlns:p="http://schemas.openxmlformats.org/presentationml/2006/main" xmlns:a="http://schemas.openxmlformats.org/drawingml/2006/main" xmlns:r="http://schemas.openxmlformats.org/officeDocument/2006/relationships">
         <p:nvSpPr>
@@ -15395,6 +15430,10 @@
             <a:prstDash val="solid"/>
           </a:ln>
         </p:spPr>
+        <p:txBody>
+          <a:bodyPr/>
+          <a:p/>
+        </p:txBody>
       </p:sp>
       <p:sp xmlns:p="http://schemas.openxmlformats.org/presentationml/2006/main" xmlns:a="http://schemas.openxmlformats.org/drawingml/2006/main" xmlns:r="http://schemas.openxmlformats.org/officeDocument/2006/relationships">
         <p:nvSpPr>
@@ -15456,6 +15495,10 @@
           </a:solidFill>
           <a:ln/>
         </p:spPr>
+        <p:txBody>
+          <a:bodyPr/>
+          <a:p/>
+        </p:txBody>
       </p:sp>
       <p:sp xmlns:p="http://schemas.openxmlformats.org/presentationml/2006/main" xmlns:a="http://schemas.openxmlformats.org/drawingml/2006/main" xmlns:r="http://schemas.openxmlformats.org/officeDocument/2006/relationships">
         <p:nvSpPr>
@@ -15478,6 +15521,10 @@
             <a:prstDash val="solid"/>
           </a:ln>
         </p:spPr>
+        <p:txBody>
+          <a:bodyPr/>
+          <a:p/>
+        </p:txBody>
       </p:sp>
       <p:sp xmlns:p="http://schemas.openxmlformats.org/presentationml/2006/main" xmlns:a="http://schemas.openxmlformats.org/drawingml/2006/main" xmlns:r="http://schemas.openxmlformats.org/officeDocument/2006/relationships">
         <p:nvSpPr>
@@ -15539,6 +15586,10 @@
           </a:solidFill>
           <a:ln/>
         </p:spPr>
+        <p:txBody>
+          <a:bodyPr/>
+          <a:p/>
+        </p:txBody>
       </p:sp>
       <p:sp xmlns:p="http://schemas.openxmlformats.org/presentationml/2006/main" xmlns:a="http://schemas.openxmlformats.org/drawingml/2006/main" xmlns:r="http://schemas.openxmlformats.org/officeDocument/2006/relationships">
         <p:nvSpPr>
@@ -15561,6 +15612,10 @@
             <a:prstDash val="solid"/>
           </a:ln>
         </p:spPr>
+        <p:txBody>
+          <a:bodyPr/>
+          <a:p/>
+        </p:txBody>
       </p:sp>
       <p:sp xmlns:p="http://schemas.openxmlformats.org/presentationml/2006/main" xmlns:a="http://schemas.openxmlformats.org/drawingml/2006/main" xmlns:r="http://schemas.openxmlformats.org/officeDocument/2006/relationships">
         <p:nvSpPr>
@@ -15622,6 +15677,10 @@
           </a:solidFill>
           <a:ln/>
         </p:spPr>
+        <p:txBody>
+          <a:bodyPr/>
+          <a:p/>
+        </p:txBody>
       </p:sp>
       <p:sp xmlns:p="http://schemas.openxmlformats.org/presentationml/2006/main" xmlns:a="http://schemas.openxmlformats.org/drawingml/2006/main" xmlns:r="http://schemas.openxmlformats.org/officeDocument/2006/relationships">
         <p:nvSpPr>
@@ -15644,6 +15703,10 @@
             <a:prstDash val="solid"/>
           </a:ln>
         </p:spPr>
+        <p:txBody>
+          <a:bodyPr/>
+          <a:p/>
+        </p:txBody>
       </p:sp>
       <p:sp xmlns:p="http://schemas.openxmlformats.org/presentationml/2006/main" xmlns:a="http://schemas.openxmlformats.org/drawingml/2006/main" xmlns:r="http://schemas.openxmlformats.org/officeDocument/2006/relationships">
         <p:nvSpPr>
@@ -15705,6 +15768,10 @@
           </a:solidFill>
           <a:ln/>
         </p:spPr>
+        <p:txBody>
+          <a:bodyPr/>
+          <a:p/>
+        </p:txBody>
       </p:sp>
       <p:sp xmlns:p="http://schemas.openxmlformats.org/presentationml/2006/main" xmlns:a="http://schemas.openxmlformats.org/drawingml/2006/main" xmlns:r="http://schemas.openxmlformats.org/officeDocument/2006/relationships">
         <p:nvSpPr>
@@ -15727,6 +15794,10 @@
             <a:prstDash val="solid"/>
           </a:ln>
         </p:spPr>
+        <p:txBody>
+          <a:bodyPr/>
+          <a:p/>
+        </p:txBody>
       </p:sp>
       <p:sp xmlns:p="http://schemas.openxmlformats.org/presentationml/2006/main" xmlns:a="http://schemas.openxmlformats.org/drawingml/2006/main" xmlns:r="http://schemas.openxmlformats.org/officeDocument/2006/relationships">
         <p:nvSpPr>
@@ -15788,6 +15859,10 @@
           </a:solidFill>
           <a:ln/>
         </p:spPr>
+        <p:txBody>
+          <a:bodyPr/>
+          <a:p/>
+        </p:txBody>
       </p:sp>
       <p:sp xmlns:p="http://schemas.openxmlformats.org/presentationml/2006/main" xmlns:a="http://schemas.openxmlformats.org/drawingml/2006/main" xmlns:r="http://schemas.openxmlformats.org/officeDocument/2006/relationships">
         <p:nvSpPr>
@@ -15810,6 +15885,10 @@
             <a:prstDash val="solid"/>
           </a:ln>
         </p:spPr>
+        <p:txBody>
+          <a:bodyPr/>
+          <a:p/>
+        </p:txBody>
       </p:sp>
       <p:sp xmlns:p="http://schemas.openxmlformats.org/presentationml/2006/main" xmlns:a="http://schemas.openxmlformats.org/drawingml/2006/main" xmlns:r="http://schemas.openxmlformats.org/officeDocument/2006/relationships">
         <p:nvSpPr>
@@ -15871,6 +15950,10 @@
           </a:solidFill>
           <a:ln/>
         </p:spPr>
+        <p:txBody>
+          <a:bodyPr/>
+          <a:p/>
+        </p:txBody>
       </p:sp>
       <p:sp xmlns:p="http://schemas.openxmlformats.org/presentationml/2006/main" xmlns:a="http://schemas.openxmlformats.org/drawingml/2006/main" xmlns:r="http://schemas.openxmlformats.org/officeDocument/2006/relationships">
         <p:nvSpPr>
@@ -19734,6 +19817,10 @@
           </a:solidFill>
           <a:ln/>
         </p:spPr>
+        <p:txBody>
+          <a:bodyPr/>
+          <a:p/>
+        </p:txBody>
       </p:sp>
       <p:sp xmlns:p="http://schemas.openxmlformats.org/presentationml/2006/main" xmlns:a="http://schemas.openxmlformats.org/drawingml/2006/main" xmlns:r="http://schemas.openxmlformats.org/officeDocument/2006/relationships">
         <p:nvSpPr>
@@ -19754,6 +19841,10 @@
           </a:solidFill>
           <a:ln/>
         </p:spPr>
+        <p:txBody>
+          <a:bodyPr/>
+          <a:p/>
+        </p:txBody>
       </p:sp>
       <p:sp xmlns:p="http://schemas.openxmlformats.org/presentationml/2006/main" xmlns:a="http://schemas.openxmlformats.org/drawingml/2006/main" xmlns:r="http://schemas.openxmlformats.org/officeDocument/2006/relationships">
         <p:nvSpPr>
@@ -19818,6 +19909,10 @@
           </a:solidFill>
           <a:ln/>
         </p:spPr>
+        <p:txBody>
+          <a:bodyPr/>
+          <a:p/>
+        </p:txBody>
       </p:sp>
       <p:sp xmlns:p="http://schemas.openxmlformats.org/presentationml/2006/main" xmlns:a="http://schemas.openxmlformats.org/drawingml/2006/main" xmlns:r="http://schemas.openxmlformats.org/officeDocument/2006/relationships">
         <p:nvSpPr>
@@ -19882,6 +19977,10 @@
           </a:solidFill>
           <a:ln/>
         </p:spPr>
+        <p:txBody>
+          <a:bodyPr/>
+          <a:p/>
+        </p:txBody>
       </p:sp>
       <p:sp xmlns:p="http://schemas.openxmlformats.org/presentationml/2006/main" xmlns:a="http://schemas.openxmlformats.org/drawingml/2006/main" xmlns:r="http://schemas.openxmlformats.org/officeDocument/2006/relationships">
         <p:nvSpPr>
@@ -19946,6 +20045,10 @@
           </a:solidFill>
           <a:ln/>
         </p:spPr>
+        <p:txBody>
+          <a:bodyPr/>
+          <a:p/>
+        </p:txBody>
       </p:sp>
       <p:sp xmlns:p="http://schemas.openxmlformats.org/presentationml/2006/main" xmlns:a="http://schemas.openxmlformats.org/drawingml/2006/main" xmlns:r="http://schemas.openxmlformats.org/officeDocument/2006/relationships">
         <p:nvSpPr>
@@ -20010,6 +20113,10 @@
           </a:solidFill>
           <a:ln/>
         </p:spPr>
+        <p:txBody>
+          <a:bodyPr/>
+          <a:p/>
+        </p:txBody>
       </p:sp>
       <p:sp xmlns:p="http://schemas.openxmlformats.org/presentationml/2006/main" xmlns:a="http://schemas.openxmlformats.org/drawingml/2006/main" xmlns:r="http://schemas.openxmlformats.org/officeDocument/2006/relationships">
         <p:nvSpPr>
@@ -20074,6 +20181,10 @@
           </a:solidFill>
           <a:ln/>
         </p:spPr>
+        <p:txBody>
+          <a:bodyPr/>
+          <a:p/>
+        </p:txBody>
       </p:sp>
       <p:sp xmlns:p="http://schemas.openxmlformats.org/presentationml/2006/main" xmlns:a="http://schemas.openxmlformats.org/drawingml/2006/main" xmlns:r="http://schemas.openxmlformats.org/officeDocument/2006/relationships">
         <p:nvSpPr>
@@ -20138,6 +20249,10 @@
           </a:solidFill>
           <a:ln/>
         </p:spPr>
+        <p:txBody>
+          <a:bodyPr/>
+          <a:p/>
+        </p:txBody>
       </p:sp>
       <p:sp xmlns:p="http://schemas.openxmlformats.org/presentationml/2006/main" xmlns:a="http://schemas.openxmlformats.org/drawingml/2006/main" xmlns:r="http://schemas.openxmlformats.org/officeDocument/2006/relationships">
         <p:nvSpPr>
@@ -20202,6 +20317,10 @@
           </a:solidFill>
           <a:ln/>
         </p:spPr>
+        <p:txBody>
+          <a:bodyPr/>
+          <a:p/>
+        </p:txBody>
       </p:sp>
       <p:sp xmlns:p="http://schemas.openxmlformats.org/presentationml/2006/main" xmlns:a="http://schemas.openxmlformats.org/drawingml/2006/main" xmlns:r="http://schemas.openxmlformats.org/officeDocument/2006/relationships">
         <p:nvSpPr>
@@ -20266,6 +20385,10 @@
           </a:solidFill>
           <a:ln/>
         </p:spPr>
+        <p:txBody>
+          <a:bodyPr/>
+          <a:p/>
+        </p:txBody>
       </p:sp>
       <p:sp xmlns:p="http://schemas.openxmlformats.org/presentationml/2006/main" xmlns:a="http://schemas.openxmlformats.org/drawingml/2006/main" xmlns:r="http://schemas.openxmlformats.org/officeDocument/2006/relationships">
         <p:nvSpPr>
@@ -20330,6 +20453,10 @@
           </a:solidFill>
           <a:ln/>
         </p:spPr>
+        <p:txBody>
+          <a:bodyPr/>
+          <a:p/>
+        </p:txBody>
       </p:sp>
       <p:sp xmlns:p="http://schemas.openxmlformats.org/presentationml/2006/main" xmlns:a="http://schemas.openxmlformats.org/drawingml/2006/main" xmlns:r="http://schemas.openxmlformats.org/officeDocument/2006/relationships">
         <p:nvSpPr>
@@ -20369,7 +20496,7 @@
                 <a:ea typeface="+mn-ea"/>
                 <a:cs typeface="+mn-cs"/>
               </a:rPr>
-              <a:t>Provided by the instructor: the </a:t>
+              <a:t>From the course lead: a link to the </a:t>
             </a:r>
             <a:r>
               <a:rPr lang="en-US" sz="1800" dirty="0">
@@ -20380,7 +20507,7 @@
                 <a:ea typeface="Consolas" pitchFamily="34" charset="-122"/>
                 <a:cs typeface="Consolas" pitchFamily="34" charset="-120"/>
               </a:rPr>
-              <a:t>beam-calc </a:t>
+              <a:t>beam-calc</a:t>
             </a:r>
             <a:r>
               <a:rPr lang="en-US" sz="1950" dirty="0">
@@ -20391,7 +20518,7 @@
                 <a:ea typeface="+mn-ea"/>
                 <a:cs typeface="+mn-cs"/>
               </a:rPr>
-              <a:t>template repository.</a:t>
+              <a:t> template repo.</a:t>
             </a:r>
             <a:endParaRPr lang="en-US" sz="1950" dirty="0"/>
           </a:p>

--- a/Lesson Material/LSN 1 -  Introduction to GIT and GitHub/Agentic_AI_for_Engineering.pptx
+++ b/Lesson Material/LSN 1 -  Introduction to GIT and GitHub/Agentic_AI_for_Engineering.pptx
@@ -659,6 +659,11 @@
               <a:t>The core loop: edit, review the diff, commit, push. Make them read the diff before committing; that is the same habit they'll need when reviewing agent output. A commit only saves locally; nothing reaches GitHub until Push. If you commit by mistake, Desktop shows an Undo button right after the commit.</a:t>
             </a:r>
           </a:p>
+          <a:p>
+            <a:r>
+              <a:t>Screenshot to add: GitHub Desktop Changes tab: the beam.m diff (P = 500.0 → 750.0), the Summary box, and Commit to main (Replace the gray placeholder: right-click › Change Picture › From a File.)</a:t>
+            </a:r>
+          </a:p>
         </p:txBody>
       </p:sp>
     </p:spTree>
@@ -723,6 +728,11 @@
               <a:t>Editing on github.com simulates a collaborator or an agent pushing a commit. Fetch only checks; it never changes your files. Pull brings the commits down. Habit: pull before you start working, push when you finish.</a:t>
             </a:r>
           </a:p>
+          <a:p>
+            <a:r>
+              <a:t>Screenshot to add: GitHub Desktop toolbar after Fetch origin, showing the Pull origin ↓1 button (Replace the gray placeholder: right-click › Change Picture › From a File.)</a:t>
+            </a:r>
+          </a:p>
         </p:txBody>
       </p:sp>
     </p:spTree>
@@ -851,6 +861,11 @@
               <a:t>The Files changed tab is where review happens. In Lesson 2 the agent opens this pull request for you; your job is everything from step 3 on. After merging, the local copy of main is behind GitHub until you pull.</a:t>
             </a:r>
           </a:p>
+          <a:p>
+            <a:r>
+              <a:t>Screenshot to add: GitHub pull request page for feature/aluminum: Files changed tab and the Merge pull request button (Replace the gray placeholder: right-click › Change Picture › From a File.)</a:t>
+            </a:r>
+          </a:p>
         </p:txBody>
       </p:sp>
     </p:spTree>
@@ -915,6 +930,11 @@
               <a:t>Conflicts are normal and not an error. Git refuses to guess when two commits changed the same lines. In VS Code, the Accept Current / Accept Incoming buttons above the markers make this a click. The file must have no markers left before Desktop lets you continue the merge.</a:t>
             </a:r>
           </a:p>
+          <a:p>
+            <a:r>
+              <a:t>Screenshot to add: VS Code showing the beam.m conflict, with Accept Current Change / Accept Incoming Change above the markers (Replace the gray placeholder: right-click › Change Picture › From a File.)</a:t>
+            </a:r>
+          </a:p>
         </p:txBody>
       </p:sp>
     </p:spTree>
@@ -974,6 +994,11 @@
               <a:t>Three levels of undo. Discard is for changes you haven't committed. Undo removes the last commit but only if it hasn't been pushed. Revert is the safe choice for anything already on GitHub: it adds a new commit that reverses the old one, so history stays intact. This is how you back out a bad agent commit.</a:t>
             </a:r>
           </a:p>
+          <a:p>
+            <a:r>
+              <a:t>Screenshot to add: GitHub Desktop History tab: right-click a commit to show Revert changes in commit (Replace the gray placeholder: right-click › Change Picture › From a File.)</a:t>
+            </a:r>
+          </a:p>
         </p:txBody>
       </p:sp>
     </p:spTree>
@@ -1160,6 +1185,11 @@
               <a:t>Homework, not an in-class exercise. Participants do this after class with one of their own projects (scripts, models, course code) before Lesson 2. It sits just before the Agent-Ready Checklist so they see the steps that get them to its first item. Emphasize the private checkbox on Publish.</a:t>
             </a:r>
           </a:p>
+          <a:p>
+            <a:r>
+              <a:t>Screenshot to add: GitHub Desktop Publish repository dialog with Keep this code private checked (Replace the gray placeholder: right-click › Change Picture › From a File.)</a:t>
+            </a:r>
+          </a:p>
         </p:txBody>
       </p:sp>
     </p:spTree>
@@ -1867,6 +1897,11 @@
               <a:t>Exercises start here. Walk the room and confirm everyone is signed in. The name and email under Options › Git are stamped on every commit, so use your real name. On a Mac, Options is under GitHub Desktop › Settings.</a:t>
             </a:r>
           </a:p>
+          <a:p>
+            <a:r>
+              <a:t>Screenshot to add: GitHub Desktop, File › Options › Accounts, signed in to GitHub.com (Replace the gray placeholder: right-click › Change Picture › From a File.)</a:t>
+            </a:r>
+          </a:p>
         </p:txBody>
       </p:sp>
     </p:spTree>
@@ -1931,6 +1966,11 @@
               <a:t>The practice project is deliberately tiny: one script that computes the tip deflection of a cantilever beam. The engineering is trivial so attention stays on Git. Point out README, .gitignore, and AGENTS.md; we'll come back to them at the end.</a:t>
             </a:r>
           </a:p>
+          <a:p>
+            <a:r>
+              <a:t>The intro line and the file-list caption tell participants where this project comes from (Exercise 2) and which files matter today.</a:t>
+            </a:r>
+          </a:p>
         </p:txBody>
       </p:sp>
     </p:spTree>
@@ -2659,7 +2699,7 @@
               <a:buSzPct val="110000"/>
               <a:buFont typeface="+mj-lt"/>
               <a:buAutoNum type="arabicPlain"/>
-              <a:defRPr sz="2025"/>
+              <a:defRPr sz="2000"/>
             </a:lvl1pPr>
           </a:lstStyle>
           <a:p>
@@ -2842,7 +2882,7 @@
               <a:buSzPct val="110000"/>
               <a:buFont typeface="+mj-lt"/>
               <a:buAutoNum type="arabicPlain"/>
-              <a:defRPr sz="2025"/>
+              <a:defRPr sz="2000"/>
             </a:lvl1pPr>
           </a:lstStyle>
           <a:p>
@@ -2893,7 +2933,7 @@
                 <a:spcPts val="0"/>
               </a:spcAft>
               <a:buNone/>
-              <a:defRPr sz="1650">
+              <a:defRPr sz="1600">
                 <a:solidFill>
                   <a:srgbClr val="D4D4D4"/>
                 </a:solidFill>
@@ -3335,7 +3375,7 @@
         <p:spPr>
           <a:xfrm>
             <a:off x="133350" y="2381250"/>
-            <a:ext cx="1442184" cy="4191000"/>
+            <a:ext cx="1409700" cy="4191000"/>
           </a:xfrm>
           <a:prstGeom prst="rect">
             <a:avLst/>
@@ -3532,7 +3572,7 @@
         </a:buClr>
         <a:buFont typeface="Arial"/>
         <a:buChar char="•"/>
-        <a:defRPr sz="1950" kern="1200">
+        <a:defRPr sz="1900" kern="1200">
           <a:solidFill>
             <a:schemeClr val="tx1"/>
           </a:solidFill>
@@ -4081,7 +4121,7 @@
               <a:buNone/>
             </a:pPr>
             <a:r>
-              <a:rPr lang="en-US" sz="1950" b="1" dirty="0">
+              <a:rPr lang="en-US" sz="1900" b="1" dirty="0">
                 <a:solidFill>
                   <a:srgbClr val="152A47"/>
                 </a:solidFill>
@@ -4091,7 +4131,7 @@
               </a:rPr>
               <a:t>On GitHub (browser)</a:t>
             </a:r>
-            <a:endParaRPr lang="en-US" sz="1950" dirty="0"/>
+            <a:endParaRPr lang="en-US" sz="1900" dirty="0"/>
           </a:p>
         </p:txBody>
       </p:sp>
@@ -4125,7 +4165,7 @@
               <a:buNone/>
             </a:pPr>
             <a:r>
-              <a:rPr lang="en-US" sz="2250" b="1" dirty="0">
+              <a:rPr lang="en-US" sz="2200" b="1" dirty="0">
                 <a:solidFill>
                   <a:srgbClr val="1F6FB2"/>
                 </a:solidFill>
@@ -4135,7 +4175,7 @@
               </a:rPr>
               <a:t>1</a:t>
             </a:r>
-            <a:endParaRPr lang="en-US" sz="2250" dirty="0"/>
+            <a:endParaRPr lang="en-US" sz="2200" dirty="0"/>
           </a:p>
         </p:txBody>
       </p:sp>
@@ -4163,7 +4203,7 @@
           <a:lstStyle/>
           <a:p>
             <a:r>
-              <a:rPr lang="en-US" sz="2025" dirty="0">
+              <a:rPr lang="en-US" sz="2000" dirty="0">
                 <a:solidFill>
                   <a:srgbClr val="000000"/>
                 </a:solidFill>
@@ -4174,13 +4214,13 @@
               <a:t>Open the course lead’s beam-calc link: </a:t>
             </a:r>
             <a:r>
-              <a:rPr lang="en-US" sz="2030" dirty="0">
+              <a:rPr lang="en-US" sz="2000" dirty="0">
                 <a:hlinkClick r:id="rId3"/>
               </a:rPr>
               <a:t>https://github.com/usafa-dfas/beam-calc</a:t>
             </a:r>
             <a:r>
-              <a:rPr lang="en-US" sz="2030" dirty="0"/>
+              <a:rPr lang="en-US" sz="2000" dirty="0"/>
               <a:t> </a:t>
             </a:r>
           </a:p>
@@ -4216,7 +4256,7 @@
               <a:buNone/>
             </a:pPr>
             <a:r>
-              <a:rPr lang="en-US" sz="2250" b="1" dirty="0">
+              <a:rPr lang="en-US" sz="2200" b="1" dirty="0">
                 <a:solidFill>
                   <a:srgbClr val="1F6FB2"/>
                 </a:solidFill>
@@ -4226,7 +4266,7 @@
               </a:rPr>
               <a:t>2</a:t>
             </a:r>
-            <a:endParaRPr lang="en-US" sz="2250" dirty="0"/>
+            <a:endParaRPr lang="en-US" sz="2200" dirty="0"/>
           </a:p>
         </p:txBody>
       </p:sp>
@@ -4260,7 +4300,7 @@
               <a:buNone/>
             </a:pPr>
             <a:r>
-              <a:rPr lang="en-US" sz="2025" b="1" dirty="0">
+              <a:rPr lang="en-US" sz="2000" b="1" dirty="0">
                 <a:solidFill>
                   <a:srgbClr val="000000"/>
                 </a:solidFill>
@@ -4271,7 +4311,7 @@
               <a:t>Use this template </a:t>
             </a:r>
             <a:r>
-              <a:rPr lang="en-US" sz="2025" dirty="0">
+              <a:rPr lang="en-US" sz="2000" dirty="0">
                 <a:solidFill>
                   <a:srgbClr val="000000"/>
                 </a:solidFill>
@@ -4282,7 +4322,7 @@
               <a:t>› Create a new repository. Owner: you. Visibility: </a:t>
             </a:r>
             <a:r>
-              <a:rPr lang="en-US" sz="2025" b="1" dirty="0">
+              <a:rPr lang="en-US" sz="2000" b="1" dirty="0">
                 <a:solidFill>
                   <a:srgbClr val="000000"/>
                 </a:solidFill>
@@ -4293,7 +4333,7 @@
               <a:t>Private</a:t>
             </a:r>
             <a:r>
-              <a:rPr lang="en-US" sz="2025" dirty="0">
+              <a:rPr lang="en-US" sz="2000" dirty="0">
                 <a:solidFill>
                   <a:srgbClr val="000000"/>
                 </a:solidFill>
@@ -4303,7 +4343,7 @@
               </a:rPr>
               <a:t>.</a:t>
             </a:r>
-            <a:endParaRPr lang="en-US" sz="2025" dirty="0"/>
+            <a:endParaRPr lang="en-US" sz="2000" dirty="0"/>
           </a:p>
         </p:txBody>
       </p:sp>
@@ -4334,7 +4374,7 @@
               <a:buNone/>
             </a:pPr>
             <a:r>
-              <a:rPr lang="en-US" sz="1950" b="1" dirty="0">
+              <a:rPr lang="en-US" sz="1900" b="1" dirty="0">
                 <a:solidFill>
                   <a:srgbClr val="152A47"/>
                 </a:solidFill>
@@ -4344,7 +4384,7 @@
               </a:rPr>
               <a:t>In GitHub Desktop</a:t>
             </a:r>
-            <a:endParaRPr lang="en-US" sz="1950" dirty="0"/>
+            <a:endParaRPr lang="en-US" sz="1900" dirty="0"/>
           </a:p>
         </p:txBody>
       </p:sp>
@@ -4378,7 +4418,7 @@
               <a:buNone/>
             </a:pPr>
             <a:r>
-              <a:rPr lang="en-US" sz="2250" b="1" dirty="0">
+              <a:rPr lang="en-US" sz="2200" b="1" dirty="0">
                 <a:solidFill>
                   <a:srgbClr val="1F6FB2"/>
                 </a:solidFill>
@@ -4388,7 +4428,7 @@
               </a:rPr>
               <a:t>3</a:t>
             </a:r>
-            <a:endParaRPr lang="en-US" sz="2250" dirty="0"/>
+            <a:endParaRPr lang="en-US" sz="2200" dirty="0"/>
           </a:p>
         </p:txBody>
       </p:sp>
@@ -4422,7 +4462,7 @@
               <a:buNone/>
             </a:pPr>
             <a:r>
-              <a:rPr lang="en-US" sz="2025" dirty="0">
+              <a:rPr lang="en-US" sz="2000" dirty="0">
                 <a:solidFill>
                   <a:srgbClr val="000000"/>
                 </a:solidFill>
@@ -4433,7 +4473,7 @@
               <a:t>File › </a:t>
             </a:r>
             <a:r>
-              <a:rPr lang="en-US" sz="2025" b="1" dirty="0">
+              <a:rPr lang="en-US" sz="2000" b="1" dirty="0">
                 <a:solidFill>
                   <a:srgbClr val="000000"/>
                 </a:solidFill>
@@ -4444,7 +4484,7 @@
               <a:t>Clone repository </a:t>
             </a:r>
             <a:r>
-              <a:rPr lang="en-US" sz="2025" dirty="0">
+              <a:rPr lang="en-US" sz="2000" dirty="0">
                 <a:solidFill>
                   <a:srgbClr val="000000"/>
                 </a:solidFill>
@@ -4454,7 +4494,7 @@
               </a:rPr>
               <a:t>› pick your new beam-calc.</a:t>
             </a:r>
-            <a:endParaRPr lang="en-US" sz="2025" dirty="0"/>
+            <a:endParaRPr lang="en-US" sz="2000" dirty="0"/>
           </a:p>
         </p:txBody>
       </p:sp>
@@ -4488,7 +4528,7 @@
               <a:buNone/>
             </a:pPr>
             <a:r>
-              <a:rPr lang="en-US" sz="2250" b="1" dirty="0">
+              <a:rPr lang="en-US" sz="2200" b="1" dirty="0">
                 <a:solidFill>
                   <a:srgbClr val="1F6FB2"/>
                 </a:solidFill>
@@ -4498,7 +4538,7 @@
               </a:rPr>
               <a:t>4</a:t>
             </a:r>
-            <a:endParaRPr lang="en-US" sz="2250" dirty="0"/>
+            <a:endParaRPr lang="en-US" sz="2200" dirty="0"/>
           </a:p>
         </p:txBody>
       </p:sp>
@@ -4532,7 +4572,7 @@
               <a:buNone/>
             </a:pPr>
             <a:r>
-              <a:rPr lang="en-US" sz="2025" dirty="0">
+              <a:rPr lang="en-US" sz="2000" dirty="0">
                 <a:solidFill>
                   <a:srgbClr val="000000"/>
                 </a:solidFill>
@@ -4543,7 +4583,7 @@
               <a:t>Choose a local path outside OneDrive. Click </a:t>
             </a:r>
             <a:r>
-              <a:rPr lang="en-US" sz="2025" b="1" dirty="0">
+              <a:rPr lang="en-US" sz="2000" b="1" dirty="0">
                 <a:solidFill>
                   <a:srgbClr val="000000"/>
                 </a:solidFill>
@@ -4554,7 +4594,7 @@
               <a:t>Clone</a:t>
             </a:r>
             <a:r>
-              <a:rPr lang="en-US" sz="2025" dirty="0">
+              <a:rPr lang="en-US" sz="2000" dirty="0">
                 <a:solidFill>
                   <a:srgbClr val="000000"/>
                 </a:solidFill>
@@ -4564,7 +4604,7 @@
               </a:rPr>
               <a:t>.</a:t>
             </a:r>
-            <a:endParaRPr lang="en-US" sz="2025" dirty="0"/>
+            <a:endParaRPr lang="en-US" sz="2000" dirty="0"/>
           </a:p>
         </p:txBody>
       </p:sp>
@@ -4598,7 +4638,7 @@
               <a:buNone/>
             </a:pPr>
             <a:r>
-              <a:rPr lang="en-US" sz="2250" b="1" dirty="0">
+              <a:rPr lang="en-US" sz="2200" b="1" dirty="0">
                 <a:solidFill>
                   <a:srgbClr val="1F6FB2"/>
                 </a:solidFill>
@@ -4608,7 +4648,7 @@
               </a:rPr>
               <a:t>5</a:t>
             </a:r>
-            <a:endParaRPr lang="en-US" sz="2250" dirty="0"/>
+            <a:endParaRPr lang="en-US" sz="2200" dirty="0"/>
           </a:p>
         </p:txBody>
       </p:sp>
@@ -4642,7 +4682,7 @@
               <a:buNone/>
             </a:pPr>
             <a:r>
-              <a:rPr lang="en-US" sz="2025" dirty="0">
+              <a:rPr lang="en-US" sz="2000" dirty="0">
                 <a:solidFill>
                   <a:srgbClr val="000000"/>
                 </a:solidFill>
@@ -4652,7 +4692,7 @@
               </a:rPr>
               <a:t>Repository › Show in Explorer. Confirm the files are there.</a:t>
             </a:r>
-            <a:endParaRPr lang="en-US" sz="2025" dirty="0"/>
+            <a:endParaRPr lang="en-US" sz="2000" dirty="0"/>
           </a:p>
         </p:txBody>
       </p:sp>
@@ -4665,7 +4705,7 @@
         <p:spPr>
           <a:xfrm>
             <a:off x="133350" y="3524250"/>
-            <a:ext cx="1442184" cy="381000"/>
+            <a:ext cx="1409700" cy="381000"/>
           </a:xfrm>
           <a:prstGeom prst="rect">
             <a:avLst/>
@@ -4999,7 +5039,7 @@
               <a:buNone/>
             </a:pPr>
             <a:r>
-              <a:rPr lang="en-US" sz="2250" b="1" dirty="0">
+              <a:rPr lang="en-US" sz="2200" b="1" dirty="0">
                 <a:solidFill>
                   <a:srgbClr val="1F6FB2"/>
                 </a:solidFill>
@@ -5009,7 +5049,7 @@
               </a:rPr>
               <a:t>1</a:t>
             </a:r>
-            <a:endParaRPr lang="en-US" sz="2250" dirty="0"/>
+            <a:endParaRPr lang="en-US" sz="2200" dirty="0"/>
           </a:p>
         </p:txBody>
       </p:sp>
@@ -5042,7 +5082,7 @@
               </a:lnSpc>
             </a:pPr>
             <a:r>
-              <a:rPr lang="en-US" sz="2025" dirty="0">
+              <a:rPr lang="en-US" sz="2000" dirty="0">
                 <a:solidFill>
                   <a:srgbClr val="000000"/>
                 </a:solidFill>
@@ -5050,7 +5090,7 @@
               <a:t>Open </a:t>
             </a:r>
             <a:r>
-              <a:rPr lang="en-US" sz="2025" dirty="0" err="1">
+              <a:rPr lang="en-US" sz="2000" dirty="0" err="1">
                 <a:solidFill>
                   <a:srgbClr val="000000"/>
                 </a:solidFill>
@@ -5058,7 +5098,7 @@
               <a:t>beam.m</a:t>
             </a:r>
             <a:r>
-              <a:rPr lang="en-US" sz="2025" dirty="0">
+              <a:rPr lang="en-US" sz="2000" dirty="0">
                 <a:solidFill>
                   <a:srgbClr val="000000"/>
                 </a:solidFill>
@@ -5066,7 +5106,7 @@
               <a:t> in MATLAB, (or for faster editing: right-click Current </a:t>
             </a:r>
             <a:r>
-              <a:rPr lang="en-US" sz="2025" dirty="0">
+              <a:rPr lang="en-US" sz="2000" dirty="0">
                 <a:solidFill>
                   <a:srgbClr val="000000"/>
                 </a:solidFill>
@@ -5077,7 +5117,7 @@
               <a:t>Repository › </a:t>
             </a:r>
             <a:r>
-              <a:rPr lang="en-US" sz="2025" b="1" dirty="0">
+              <a:rPr lang="en-US" sz="2000" b="1" dirty="0">
                 <a:solidFill>
                   <a:srgbClr val="000000"/>
                 </a:solidFill>
@@ -5088,14 +5128,14 @@
               <a:t>Open in Visual Studio Code</a:t>
             </a:r>
             <a:r>
-              <a:rPr lang="en-US" sz="2025" b="1" dirty="0">
+              <a:rPr lang="en-US" sz="2000" b="1" dirty="0">
                 <a:solidFill>
                   <a:srgbClr val="000000"/>
                 </a:solidFill>
               </a:rPr>
               <a:t>)</a:t>
             </a:r>
-            <a:endParaRPr lang="en-US" sz="2025" dirty="0"/>
+            <a:endParaRPr lang="en-US" sz="2000" dirty="0"/>
           </a:p>
         </p:txBody>
       </p:sp>
@@ -5129,7 +5169,7 @@
               <a:buNone/>
             </a:pPr>
             <a:r>
-              <a:rPr lang="en-US" sz="2250" b="1" dirty="0">
+              <a:rPr lang="en-US" sz="2200" b="1" dirty="0">
                 <a:solidFill>
                   <a:srgbClr val="1F6FB2"/>
                 </a:solidFill>
@@ -5139,7 +5179,7 @@
               </a:rPr>
               <a:t>2</a:t>
             </a:r>
-            <a:endParaRPr lang="en-US" sz="2250" dirty="0"/>
+            <a:endParaRPr lang="en-US" sz="2200" dirty="0"/>
           </a:p>
         </p:txBody>
       </p:sp>
@@ -5173,7 +5213,7 @@
               <a:buNone/>
             </a:pPr>
             <a:r>
-              <a:rPr lang="en-US" sz="2025" dirty="0">
+              <a:rPr lang="en-US" sz="2000" dirty="0">
                 <a:solidFill>
                   <a:srgbClr val="000000"/>
                 </a:solidFill>
@@ -5195,7 +5235,7 @@
               <a:t>P = 750.0; </a:t>
             </a:r>
             <a:r>
-              <a:rPr lang="en-US" sz="2025" dirty="0">
+              <a:rPr lang="en-US" sz="2000" dirty="0">
                 <a:solidFill>
                   <a:srgbClr val="000000"/>
                 </a:solidFill>
@@ -5205,7 +5245,7 @@
               </a:rPr>
               <a:t>Save.</a:t>
             </a:r>
-            <a:endParaRPr lang="en-US" sz="2025" dirty="0"/>
+            <a:endParaRPr lang="en-US" sz="2000" dirty="0"/>
           </a:p>
         </p:txBody>
       </p:sp>
@@ -5239,7 +5279,7 @@
               <a:buNone/>
             </a:pPr>
             <a:r>
-              <a:rPr lang="en-US" sz="2250" b="1" dirty="0">
+              <a:rPr lang="en-US" sz="2200" b="1" dirty="0">
                 <a:solidFill>
                   <a:srgbClr val="1F6FB2"/>
                 </a:solidFill>
@@ -5249,7 +5289,7 @@
               </a:rPr>
               <a:t>3</a:t>
             </a:r>
-            <a:endParaRPr lang="en-US" sz="2250" dirty="0"/>
+            <a:endParaRPr lang="en-US" sz="2200" dirty="0"/>
           </a:p>
         </p:txBody>
       </p:sp>
@@ -5283,7 +5323,7 @@
               <a:buNone/>
             </a:pPr>
             <a:r>
-              <a:rPr lang="en-US" sz="2025" dirty="0">
+              <a:rPr lang="en-US" sz="2000" dirty="0">
                 <a:solidFill>
                   <a:srgbClr val="000000"/>
                 </a:solidFill>
@@ -5294,7 +5334,7 @@
               <a:t>Back in Desktop, open the </a:t>
             </a:r>
             <a:r>
-              <a:rPr lang="en-US" sz="2025" b="1" dirty="0">
+              <a:rPr lang="en-US" sz="2000" b="1" dirty="0">
                 <a:solidFill>
                   <a:srgbClr val="000000"/>
                 </a:solidFill>
@@ -5305,7 +5345,7 @@
               <a:t>Changes </a:t>
             </a:r>
             <a:r>
-              <a:rPr lang="en-US" sz="2025" dirty="0">
+              <a:rPr lang="en-US" sz="2000" dirty="0">
                 <a:solidFill>
                   <a:srgbClr val="000000"/>
                 </a:solidFill>
@@ -5315,7 +5355,7 @@
               </a:rPr>
               <a:t>tab and read the diff.</a:t>
             </a:r>
-            <a:endParaRPr lang="en-US" sz="2025" dirty="0"/>
+            <a:endParaRPr lang="en-US" sz="2000" dirty="0"/>
           </a:p>
         </p:txBody>
       </p:sp>
@@ -5349,7 +5389,7 @@
               <a:buNone/>
             </a:pPr>
             <a:r>
-              <a:rPr lang="en-US" sz="2250" b="1" dirty="0">
+              <a:rPr lang="en-US" sz="2200" b="1" dirty="0">
                 <a:solidFill>
                   <a:srgbClr val="1F6FB2"/>
                 </a:solidFill>
@@ -5359,7 +5399,7 @@
               </a:rPr>
               <a:t>4</a:t>
             </a:r>
-            <a:endParaRPr lang="en-US" sz="2250" dirty="0"/>
+            <a:endParaRPr lang="en-US" sz="2200" dirty="0"/>
           </a:p>
         </p:txBody>
       </p:sp>
@@ -5393,7 +5433,7 @@
               <a:buNone/>
             </a:pPr>
             <a:r>
-              <a:rPr lang="en-US" sz="2025" dirty="0">
+              <a:rPr lang="en-US" sz="2000" dirty="0">
                 <a:solidFill>
                   <a:srgbClr val="000000"/>
                 </a:solidFill>
@@ -5404,7 +5444,7 @@
               <a:t>Summary: </a:t>
             </a:r>
             <a:r>
-              <a:rPr lang="en-US" sz="2025" i="1" dirty="0">
+              <a:rPr lang="en-US" sz="2000" i="1" dirty="0">
                 <a:solidFill>
                   <a:srgbClr val="000000"/>
                 </a:solidFill>
@@ -5415,7 +5455,7 @@
               <a:t>Increase tip load to 750 N</a:t>
             </a:r>
             <a:r>
-              <a:rPr lang="en-US" sz="2025" dirty="0">
+              <a:rPr lang="en-US" sz="2000" dirty="0">
                 <a:solidFill>
                   <a:srgbClr val="000000"/>
                 </a:solidFill>
@@ -5426,7 +5466,7 @@
               <a:t>. Click </a:t>
             </a:r>
             <a:r>
-              <a:rPr lang="en-US" sz="2025" b="1" dirty="0">
+              <a:rPr lang="en-US" sz="2000" b="1" dirty="0">
                 <a:solidFill>
                   <a:srgbClr val="000000"/>
                 </a:solidFill>
@@ -5437,7 +5477,7 @@
               <a:t>Commit to main</a:t>
             </a:r>
             <a:r>
-              <a:rPr lang="en-US" sz="2025" dirty="0">
+              <a:rPr lang="en-US" sz="2000" dirty="0">
                 <a:solidFill>
                   <a:srgbClr val="000000"/>
                 </a:solidFill>
@@ -5447,7 +5487,7 @@
               </a:rPr>
               <a:t>.</a:t>
             </a:r>
-            <a:endParaRPr lang="en-US" sz="2025" dirty="0"/>
+            <a:endParaRPr lang="en-US" sz="2000" dirty="0"/>
           </a:p>
         </p:txBody>
       </p:sp>
@@ -5481,7 +5521,7 @@
               <a:buNone/>
             </a:pPr>
             <a:r>
-              <a:rPr lang="en-US" sz="2250" b="1" dirty="0">
+              <a:rPr lang="en-US" sz="2200" b="1" dirty="0">
                 <a:solidFill>
                   <a:srgbClr val="1F6FB2"/>
                 </a:solidFill>
@@ -5491,7 +5531,7 @@
               </a:rPr>
               <a:t>5</a:t>
             </a:r>
-            <a:endParaRPr lang="en-US" sz="2250" dirty="0"/>
+            <a:endParaRPr lang="en-US" sz="2200" dirty="0"/>
           </a:p>
         </p:txBody>
       </p:sp>
@@ -5525,7 +5565,7 @@
               <a:buNone/>
             </a:pPr>
             <a:r>
-              <a:rPr lang="en-US" sz="2025" dirty="0">
+              <a:rPr lang="en-US" sz="2000" dirty="0">
                 <a:solidFill>
                   <a:srgbClr val="000000"/>
                 </a:solidFill>
@@ -5536,7 +5576,7 @@
               <a:t>Click </a:t>
             </a:r>
             <a:r>
-              <a:rPr lang="en-US" sz="2025" b="1" dirty="0">
+              <a:rPr lang="en-US" sz="2000" b="1" dirty="0">
                 <a:solidFill>
                   <a:srgbClr val="000000"/>
                 </a:solidFill>
@@ -5547,7 +5587,7 @@
               <a:t>Push origin</a:t>
             </a:r>
             <a:r>
-              <a:rPr lang="en-US" sz="2025" dirty="0">
+              <a:rPr lang="en-US" sz="2000" dirty="0">
                 <a:solidFill>
                   <a:srgbClr val="000000"/>
                 </a:solidFill>
@@ -5557,7 +5597,7 @@
               </a:rPr>
               <a:t>. Refresh GitHub to see it.</a:t>
             </a:r>
-            <a:endParaRPr lang="en-US" sz="2025" dirty="0"/>
+            <a:endParaRPr lang="en-US" sz="2000" dirty="0"/>
           </a:p>
         </p:txBody>
       </p:sp>
@@ -5620,7 +5660,7 @@
               <a:buNone/>
             </a:pPr>
             <a:r>
-              <a:rPr lang="en-US" sz="1725" dirty="0">
+              <a:rPr lang="en-US" sz="1700" dirty="0">
                 <a:solidFill>
                   <a:srgbClr val="8C8C8C"/>
                 </a:solidFill>
@@ -5630,7 +5670,7 @@
               </a:rPr>
               <a:t>beam.m</a:t>
             </a:r>
-            <a:endParaRPr lang="en-US" sz="1725" dirty="0"/>
+            <a:endParaRPr lang="en-US" sz="1700" dirty="0"/>
           </a:p>
         </p:txBody>
       </p:sp>
@@ -5664,7 +5704,7 @@
               <a:buNone/>
             </a:pPr>
             <a:r>
-              <a:rPr lang="en-US" sz="1725" dirty="0">
+              <a:rPr lang="en-US" sz="1700" dirty="0">
                 <a:solidFill>
                   <a:srgbClr val="F48771"/>
                 </a:solidFill>
@@ -5674,7 +5714,7 @@
               </a:rPr>
               <a:t>− P = 500.0;   % N, tip load</a:t>
             </a:r>
-            <a:endParaRPr lang="en-US" sz="1725" dirty="0"/>
+            <a:endParaRPr lang="en-US" sz="1700" dirty="0"/>
           </a:p>
         </p:txBody>
       </p:sp>
@@ -5708,7 +5748,7 @@
               <a:buNone/>
             </a:pPr>
             <a:r>
-              <a:rPr lang="en-US" sz="1725" dirty="0">
+              <a:rPr lang="en-US" sz="1700" dirty="0">
                 <a:solidFill>
                   <a:srgbClr val="89D185"/>
                 </a:solidFill>
@@ -5718,7 +5758,7 @@
               </a:rPr>
               <a:t>+ P = 750.0;   % N, tip load</a:t>
             </a:r>
-            <a:endParaRPr lang="en-US" sz="1725" dirty="0"/>
+            <a:endParaRPr lang="en-US" sz="1700" dirty="0"/>
           </a:p>
         </p:txBody>
       </p:sp>
@@ -5775,7 +5815,7 @@
         <p:spPr>
           <a:xfrm>
             <a:off x="133350" y="3905250"/>
-            <a:ext cx="1442184" cy="381000"/>
+            <a:ext cx="1409700" cy="381000"/>
           </a:xfrm>
           <a:prstGeom prst="rect">
             <a:avLst/>
@@ -5861,6 +5901,30 @@
           </a:p>
         </p:txBody>
       </p:sp>
+      <p:pic>
+        <p:nvPicPr>
+          <p:cNvPr id="23" name="Screenshot placeholder" descr="Screenshot to add: GitHub Desktop Changes tab: the beam.m diff (P = 500.0 → 750.0), the Summary box, and Commit to main"/>
+          <p:cNvPicPr>
+            <a:picLocks noChangeAspect="1"/>
+          </p:cNvPicPr>
+          <p:nvPr/>
+        </p:nvPicPr>
+        <p:blipFill>
+          <a:blip r:embed="rId3"/>
+          <a:stretch>
+            <a:fillRect/>
+          </a:stretch>
+        </p:blipFill>
+        <p:spPr>
+          <a:xfrm>
+            <a:off x="8138160" y="2743200"/>
+            <a:ext cx="5349240" cy="3474720"/>
+          </a:xfrm>
+          <a:prstGeom prst="rect">
+            <a:avLst/>
+          </a:prstGeom>
+        </p:spPr>
+      </p:pic>
     </p:spTree>
   </p:cSld>
   <p:clrMapOvr>
@@ -5962,7 +6026,7 @@
               <a:buNone/>
             </a:pPr>
             <a:r>
-              <a:rPr lang="en-US" sz="1950" b="1" dirty="0">
+              <a:rPr lang="en-US" sz="1900" b="1" dirty="0">
                 <a:solidFill>
                   <a:srgbClr val="152A47"/>
                 </a:solidFill>
@@ -5972,7 +6036,7 @@
               </a:rPr>
               <a:t>Push origin</a:t>
             </a:r>
-            <a:endParaRPr lang="en-US" sz="1950" dirty="0"/>
+            <a:endParaRPr lang="en-US" sz="1900" dirty="0"/>
           </a:p>
         </p:txBody>
       </p:sp>
@@ -6006,7 +6070,7 @@
               <a:buNone/>
             </a:pPr>
             <a:r>
-              <a:rPr lang="en-US" sz="1875" dirty="0">
+              <a:rPr lang="en-US" sz="1900" dirty="0">
                 <a:solidFill>
                   <a:srgbClr val="000000"/>
                 </a:solidFill>
@@ -6016,7 +6080,7 @@
               </a:rPr>
               <a:t>Upload your commits to GitHub</a:t>
             </a:r>
-            <a:endParaRPr lang="en-US" sz="1875" dirty="0"/>
+            <a:endParaRPr lang="en-US" sz="1900" dirty="0"/>
           </a:p>
         </p:txBody>
       </p:sp>
@@ -6074,7 +6138,7 @@
               <a:buNone/>
             </a:pPr>
             <a:r>
-              <a:rPr lang="en-US" sz="1950" b="1" dirty="0">
+              <a:rPr lang="en-US" sz="1900" b="1" dirty="0">
                 <a:solidFill>
                   <a:srgbClr val="152A47"/>
                 </a:solidFill>
@@ -6084,7 +6148,7 @@
               </a:rPr>
               <a:t>Fetch origin</a:t>
             </a:r>
-            <a:endParaRPr lang="en-US" sz="1950" dirty="0"/>
+            <a:endParaRPr lang="en-US" sz="1900" dirty="0"/>
           </a:p>
         </p:txBody>
       </p:sp>
@@ -6118,7 +6182,7 @@
               <a:buNone/>
             </a:pPr>
             <a:r>
-              <a:rPr lang="en-US" sz="1875" dirty="0">
+              <a:rPr lang="en-US" sz="1900" dirty="0">
                 <a:solidFill>
                   <a:srgbClr val="000000"/>
                 </a:solidFill>
@@ -6128,7 +6192,7 @@
               </a:rPr>
               <a:t>Check GitHub for new commits. Files don’t change.</a:t>
             </a:r>
-            <a:endParaRPr lang="en-US" sz="1875" dirty="0"/>
+            <a:endParaRPr lang="en-US" sz="1900" dirty="0"/>
           </a:p>
         </p:txBody>
       </p:sp>
@@ -6168,7 +6232,7 @@
         <p:spPr>
           <a:xfrm>
             <a:off x="9906000" y="1733550"/>
-            <a:ext cx="3709035" cy="323850"/>
+            <a:ext cx="3672840" cy="323850"/>
           </a:xfrm>
           <a:prstGeom prst="rect">
             <a:avLst/>
@@ -6186,7 +6250,7 @@
               <a:buNone/>
             </a:pPr>
             <a:r>
-              <a:rPr lang="en-US" sz="1950" b="1" dirty="0">
+              <a:rPr lang="en-US" sz="1900" b="1" dirty="0">
                 <a:solidFill>
                   <a:srgbClr val="152A47"/>
                 </a:solidFill>
@@ -6196,7 +6260,7 @@
               </a:rPr>
               <a:t>Pull origin</a:t>
             </a:r>
-            <a:endParaRPr lang="en-US" sz="1950" dirty="0"/>
+            <a:endParaRPr lang="en-US" sz="1900" dirty="0"/>
           </a:p>
         </p:txBody>
       </p:sp>
@@ -6230,7 +6294,7 @@
               <a:buNone/>
             </a:pPr>
             <a:r>
-              <a:rPr lang="en-US" sz="1875" dirty="0">
+              <a:rPr lang="en-US" sz="1900" dirty="0">
                 <a:solidFill>
                   <a:srgbClr val="000000"/>
                 </a:solidFill>
@@ -6240,7 +6304,7 @@
               </a:rPr>
               <a:t>Download new commits into your files</a:t>
             </a:r>
-            <a:endParaRPr lang="en-US" sz="1875" dirty="0"/>
+            <a:endParaRPr lang="en-US" sz="1900" dirty="0"/>
           </a:p>
         </p:txBody>
       </p:sp>
@@ -6323,25 +6387,25 @@
         <p:spPr>
           <a:xfrm>
             <a:off x="1809750" y="3900488"/>
-            <a:ext cx="12845415" cy="381000"/>
-          </a:xfrm>
-          <a:prstGeom prst="rect">
-            <a:avLst/>
-          </a:prstGeom>
-          <a:noFill/>
-          <a:ln/>
-        </p:spPr>
-        <p:txBody>
-          <a:bodyPr wrap="square" lIns="25400" tIns="25400" rIns="25400" bIns="25400" rtlCol="0" anchor="t">
-            <a:normAutofit/>
-          </a:bodyPr>
-          <a:lstStyle/>
-          <a:p>
-            <a:pPr marL="0" indent="0" algn="l">
-              <a:buNone/>
-            </a:pPr>
-            <a:r>
-              <a:rPr lang="en-US" sz="2025" dirty="0">
+            <a:ext cx="11769090" cy="381000"/>
+          </a:xfrm>
+          <a:prstGeom prst="rect">
+            <a:avLst/>
+          </a:prstGeom>
+          <a:noFill/>
+          <a:ln/>
+        </p:spPr>
+        <p:txBody>
+          <a:bodyPr wrap="square" lIns="25400" tIns="25400" rIns="25400" bIns="25400" rtlCol="0" anchor="t">
+            <a:normAutofit/>
+          </a:bodyPr>
+          <a:lstStyle/>
+          <a:p>
+            <a:pPr marL="0" indent="0" algn="l">
+              <a:buNone/>
+            </a:pPr>
+            <a:r>
+              <a:rPr lang="en-US" sz="2000" dirty="0">
                 <a:solidFill>
                   <a:srgbClr val="000000"/>
                 </a:solidFill>
@@ -6351,7 +6415,7 @@
               </a:rPr>
               <a:t>Simulate a teammate (or an agent) changing the repo:</a:t>
             </a:r>
-            <a:endParaRPr lang="en-US" sz="2025" dirty="0"/>
+            <a:endParaRPr lang="en-US" sz="2000" dirty="0"/>
           </a:p>
         </p:txBody>
       </p:sp>
@@ -6385,7 +6449,7 @@
               <a:buNone/>
             </a:pPr>
             <a:r>
-              <a:rPr lang="en-US" sz="2250" b="1" dirty="0">
+              <a:rPr lang="en-US" sz="2200" b="1" dirty="0">
                 <a:solidFill>
                   <a:srgbClr val="1F6FB2"/>
                 </a:solidFill>
@@ -6395,7 +6459,7 @@
               </a:rPr>
               <a:t>1</a:t>
             </a:r>
-            <a:endParaRPr lang="en-US" sz="2250" dirty="0"/>
+            <a:endParaRPr lang="en-US" sz="2200" dirty="0"/>
           </a:p>
         </p:txBody>
       </p:sp>
@@ -6408,7 +6472,7 @@
         <p:spPr>
           <a:xfrm>
             <a:off x="2343150" y="4491038"/>
-            <a:ext cx="12258675" cy="423863"/>
+            <a:ext cx="11235690" cy="423863"/>
           </a:xfrm>
           <a:prstGeom prst="rect">
             <a:avLst/>
@@ -6429,7 +6493,7 @@
               <a:buNone/>
             </a:pPr>
             <a:r>
-              <a:rPr lang="en-US" sz="2025" dirty="0">
+              <a:rPr lang="en-US" sz="2000" dirty="0">
                 <a:solidFill>
                   <a:srgbClr val="000000"/>
                 </a:solidFill>
@@ -6440,7 +6504,7 @@
               <a:t>On GitHub, open README.md › pencil icon. Add a line: </a:t>
             </a:r>
             <a:r>
-              <a:rPr lang="en-US" sz="2025" i="1" dirty="0">
+              <a:rPr lang="en-US" sz="2000" i="1" dirty="0">
                 <a:solidFill>
                   <a:srgbClr val="000000"/>
                 </a:solidFill>
@@ -6450,7 +6514,7 @@
               </a:rPr>
               <a:t>Units: SI throughout.</a:t>
             </a:r>
-            <a:endParaRPr lang="en-US" sz="2025" dirty="0"/>
+            <a:endParaRPr lang="en-US" sz="2000" dirty="0"/>
           </a:p>
         </p:txBody>
       </p:sp>
@@ -6484,7 +6548,7 @@
               <a:buNone/>
             </a:pPr>
             <a:r>
-              <a:rPr lang="en-US" sz="2250" b="1" dirty="0">
+              <a:rPr lang="en-US" sz="2200" b="1" dirty="0">
                 <a:solidFill>
                   <a:srgbClr val="1F6FB2"/>
                 </a:solidFill>
@@ -6494,7 +6558,7 @@
               </a:rPr>
               <a:t>2</a:t>
             </a:r>
-            <a:endParaRPr lang="en-US" sz="2250" dirty="0"/>
+            <a:endParaRPr lang="en-US" sz="2200" dirty="0"/>
           </a:p>
         </p:txBody>
       </p:sp>
@@ -6507,7 +6571,7 @@
         <p:spPr>
           <a:xfrm>
             <a:off x="2343150" y="5067300"/>
-            <a:ext cx="12258675" cy="423863"/>
+            <a:ext cx="11235690" cy="423863"/>
           </a:xfrm>
           <a:prstGeom prst="rect">
             <a:avLst/>
@@ -6528,7 +6592,7 @@
               <a:buNone/>
             </a:pPr>
             <a:r>
-              <a:rPr lang="en-US" sz="2025" b="1" dirty="0">
+              <a:rPr lang="en-US" sz="2000" b="1" dirty="0">
                 <a:solidFill>
                   <a:srgbClr val="000000"/>
                 </a:solidFill>
@@ -6539,7 +6603,7 @@
               <a:t>Commit changes </a:t>
             </a:r>
             <a:r>
-              <a:rPr lang="en-US" sz="2025" dirty="0">
+              <a:rPr lang="en-US" sz="2000" dirty="0">
                 <a:solidFill>
                   <a:srgbClr val="000000"/>
                 </a:solidFill>
@@ -6549,7 +6613,7 @@
               </a:rPr>
               <a:t>directly to main.</a:t>
             </a:r>
-            <a:endParaRPr lang="en-US" sz="2025" dirty="0"/>
+            <a:endParaRPr lang="en-US" sz="2000" dirty="0"/>
           </a:p>
         </p:txBody>
       </p:sp>
@@ -6583,7 +6647,7 @@
               <a:buNone/>
             </a:pPr>
             <a:r>
-              <a:rPr lang="en-US" sz="2250" b="1" dirty="0">
+              <a:rPr lang="en-US" sz="2200" b="1" dirty="0">
                 <a:solidFill>
                   <a:srgbClr val="1F6FB2"/>
                 </a:solidFill>
@@ -6593,7 +6657,7 @@
               </a:rPr>
               <a:t>3</a:t>
             </a:r>
-            <a:endParaRPr lang="en-US" sz="2250" dirty="0"/>
+            <a:endParaRPr lang="en-US" sz="2200" dirty="0"/>
           </a:p>
         </p:txBody>
       </p:sp>
@@ -6606,7 +6670,7 @@
         <p:spPr>
           <a:xfrm>
             <a:off x="2343150" y="5643563"/>
-            <a:ext cx="12258675" cy="423863"/>
+            <a:ext cx="11235690" cy="423863"/>
           </a:xfrm>
           <a:prstGeom prst="rect">
             <a:avLst/>
@@ -6627,7 +6691,7 @@
               <a:buNone/>
             </a:pPr>
             <a:r>
-              <a:rPr lang="en-US" sz="2025" dirty="0">
+              <a:rPr lang="en-US" sz="2000" dirty="0">
                 <a:solidFill>
                   <a:srgbClr val="000000"/>
                 </a:solidFill>
@@ -6638,7 +6702,7 @@
               <a:t>In Desktop: </a:t>
             </a:r>
             <a:r>
-              <a:rPr lang="en-US" sz="2025" b="1" dirty="0">
+              <a:rPr lang="en-US" sz="2000" b="1" dirty="0">
                 <a:solidFill>
                   <a:srgbClr val="000000"/>
                 </a:solidFill>
@@ -6649,7 +6713,7 @@
               <a:t>Fetch origin</a:t>
             </a:r>
             <a:r>
-              <a:rPr lang="en-US" sz="2025" dirty="0">
+              <a:rPr lang="en-US" sz="2000" dirty="0">
                 <a:solidFill>
                   <a:srgbClr val="000000"/>
                 </a:solidFill>
@@ -6660,7 +6724,7 @@
               <a:t>. The button changes to </a:t>
             </a:r>
             <a:r>
-              <a:rPr lang="en-US" sz="2025" b="1" dirty="0">
+              <a:rPr lang="en-US" sz="2000" b="1" dirty="0">
                 <a:solidFill>
                   <a:srgbClr val="000000"/>
                 </a:solidFill>
@@ -6671,7 +6735,7 @@
               <a:t>Pull origin ↓1</a:t>
             </a:r>
             <a:r>
-              <a:rPr lang="en-US" sz="2025" dirty="0">
+              <a:rPr lang="en-US" sz="2000" dirty="0">
                 <a:solidFill>
                   <a:srgbClr val="000000"/>
                 </a:solidFill>
@@ -6681,7 +6745,7 @@
               </a:rPr>
               <a:t>.</a:t>
             </a:r>
-            <a:endParaRPr lang="en-US" sz="2025" dirty="0"/>
+            <a:endParaRPr lang="en-US" sz="2000" dirty="0"/>
           </a:p>
         </p:txBody>
       </p:sp>
@@ -6715,7 +6779,7 @@
               <a:buNone/>
             </a:pPr>
             <a:r>
-              <a:rPr lang="en-US" sz="2250" b="1" dirty="0">
+              <a:rPr lang="en-US" sz="2200" b="1" dirty="0">
                 <a:solidFill>
                   <a:srgbClr val="1F6FB2"/>
                 </a:solidFill>
@@ -6725,7 +6789,7 @@
               </a:rPr>
               <a:t>4</a:t>
             </a:r>
-            <a:endParaRPr lang="en-US" sz="2250" dirty="0"/>
+            <a:endParaRPr lang="en-US" sz="2200" dirty="0"/>
           </a:p>
         </p:txBody>
       </p:sp>
@@ -6738,7 +6802,7 @@
         <p:spPr>
           <a:xfrm>
             <a:off x="2343150" y="6219825"/>
-            <a:ext cx="12258675" cy="423863"/>
+            <a:ext cx="11235690" cy="423863"/>
           </a:xfrm>
           <a:prstGeom prst="rect">
             <a:avLst/>
@@ -6759,7 +6823,7 @@
               <a:buNone/>
             </a:pPr>
             <a:r>
-              <a:rPr lang="en-US" sz="2025" b="1" dirty="0">
+              <a:rPr lang="en-US" sz="2000" b="1" dirty="0">
                 <a:solidFill>
                   <a:srgbClr val="000000"/>
                 </a:solidFill>
@@ -6770,7 +6834,7 @@
               <a:t>Pull origin</a:t>
             </a:r>
             <a:r>
-              <a:rPr lang="en-US" sz="2025" dirty="0">
+              <a:rPr lang="en-US" sz="2000" dirty="0">
                 <a:solidFill>
                   <a:srgbClr val="000000"/>
                 </a:solidFill>
@@ -6780,7 +6844,7 @@
               </a:rPr>
               <a:t>. Open README.md locally and confirm the new line.</a:t>
             </a:r>
-            <a:endParaRPr lang="en-US" sz="2025" dirty="0"/>
+            <a:endParaRPr lang="en-US" sz="2000" dirty="0"/>
           </a:p>
         </p:txBody>
       </p:sp>
@@ -6820,7 +6884,7 @@
         <p:spPr>
           <a:xfrm>
             <a:off x="1809750" y="7081838"/>
-            <a:ext cx="12027980" cy="393700"/>
+            <a:ext cx="11769090" cy="393700"/>
           </a:xfrm>
           <a:prstGeom prst="rect">
             <a:avLst/>
@@ -6861,7 +6925,7 @@
         <p:spPr>
           <a:xfrm>
             <a:off x="133350" y="4286250"/>
-            <a:ext cx="1442184" cy="381000"/>
+            <a:ext cx="1409700" cy="381000"/>
           </a:xfrm>
           <a:prstGeom prst="rect">
             <a:avLst/>
@@ -6947,6 +7011,30 @@
           </a:p>
         </p:txBody>
       </p:sp>
+      <p:pic>
+        <p:nvPicPr>
+          <p:cNvPr id="28" name="Screenshot placeholder" descr="Screenshot to add: GitHub Desktop toolbar after Fetch origin, showing the Pull origin ↓1 button"/>
+          <p:cNvPicPr>
+            <a:picLocks noChangeAspect="1"/>
+          </p:cNvPicPr>
+          <p:nvPr/>
+        </p:nvPicPr>
+        <p:blipFill>
+          <a:blip r:embed="rId3"/>
+          <a:stretch>
+            <a:fillRect/>
+          </a:stretch>
+        </p:blipFill>
+        <p:spPr>
+          <a:xfrm>
+            <a:off x="1810512" y="7680960"/>
+            <a:ext cx="8229600" cy="1737360"/>
+          </a:xfrm>
+          <a:prstGeom prst="rect">
+            <a:avLst/>
+          </a:prstGeom>
+        </p:spPr>
+      </p:pic>
     </p:spTree>
   </p:cSld>
   <p:clrMapOvr>
@@ -7124,7 +7212,7 @@
               <a:buNone/>
             </a:pPr>
             <a:r>
-              <a:rPr lang="en-US" sz="2250" b="1" dirty="0">
+              <a:rPr lang="en-US" sz="2200" b="1" dirty="0">
                 <a:solidFill>
                   <a:srgbClr val="1F6FB2"/>
                 </a:solidFill>
@@ -7134,7 +7222,7 @@
               </a:rPr>
               <a:t>1</a:t>
             </a:r>
-            <a:endParaRPr lang="en-US" sz="2250" dirty="0"/>
+            <a:endParaRPr lang="en-US" sz="2200" dirty="0"/>
           </a:p>
         </p:txBody>
       </p:sp>
@@ -7168,7 +7256,7 @@
               <a:buNone/>
             </a:pPr>
             <a:r>
-              <a:rPr lang="en-US" sz="1950" b="1" dirty="0">
+              <a:rPr lang="en-US" sz="1900" b="1" dirty="0">
                 <a:solidFill>
                   <a:srgbClr val="000000"/>
                 </a:solidFill>
@@ -7179,7 +7267,7 @@
               <a:t>Current branch </a:t>
             </a:r>
             <a:r>
-              <a:rPr lang="en-US" sz="1950" dirty="0">
+              <a:rPr lang="en-US" sz="1900" dirty="0">
                 <a:solidFill>
                   <a:srgbClr val="000000"/>
                 </a:solidFill>
@@ -7190,7 +7278,7 @@
               <a:t>› </a:t>
             </a:r>
             <a:r>
-              <a:rPr lang="en-US" sz="1950" b="1" dirty="0">
+              <a:rPr lang="en-US" sz="1900" b="1" dirty="0">
                 <a:solidFill>
                   <a:srgbClr val="000000"/>
                 </a:solidFill>
@@ -7201,7 +7289,7 @@
               <a:t>New branch</a:t>
             </a:r>
             <a:r>
-              <a:rPr lang="en-US" sz="1950" dirty="0">
+              <a:rPr lang="en-US" sz="1900" dirty="0">
                 <a:solidFill>
                   <a:srgbClr val="000000"/>
                 </a:solidFill>
@@ -7212,7 +7300,7 @@
               <a:t>: </a:t>
             </a:r>
             <a:r>
-              <a:rPr lang="en-US" sz="1725" dirty="0">
+              <a:rPr lang="en-US" sz="1700" dirty="0">
                 <a:solidFill>
                   <a:srgbClr val="000000"/>
                 </a:solidFill>
@@ -7222,7 +7310,7 @@
               </a:rPr>
               <a:t>feature/aluminum</a:t>
             </a:r>
-            <a:endParaRPr lang="en-US" sz="1950" dirty="0"/>
+            <a:endParaRPr lang="en-US" sz="1900" dirty="0"/>
           </a:p>
         </p:txBody>
       </p:sp>
@@ -7256,7 +7344,7 @@
               <a:buNone/>
             </a:pPr>
             <a:r>
-              <a:rPr lang="en-US" sz="2250" b="1" dirty="0">
+              <a:rPr lang="en-US" sz="2200" b="1" dirty="0">
                 <a:solidFill>
                   <a:srgbClr val="1F6FB2"/>
                 </a:solidFill>
@@ -7266,7 +7354,7 @@
               </a:rPr>
               <a:t>2</a:t>
             </a:r>
-            <a:endParaRPr lang="en-US" sz="2250" dirty="0"/>
+            <a:endParaRPr lang="en-US" sz="2200" dirty="0"/>
           </a:p>
         </p:txBody>
       </p:sp>
@@ -7300,7 +7388,7 @@
               <a:buNone/>
             </a:pPr>
             <a:r>
-              <a:rPr lang="en-US" sz="1950" dirty="0">
+              <a:rPr lang="en-US" sz="1900" dirty="0">
                 <a:solidFill>
                   <a:srgbClr val="000000"/>
                 </a:solidFill>
@@ -7311,7 +7399,7 @@
               <a:t>In beam.m: </a:t>
             </a:r>
             <a:r>
-              <a:rPr lang="en-US" sz="1725" dirty="0">
+              <a:rPr lang="en-US" sz="1700" dirty="0">
                 <a:solidFill>
                   <a:srgbClr val="000000"/>
                 </a:solidFill>
@@ -7321,7 +7409,7 @@
               </a:rPr>
               <a:t>E = 69e9; % Pa, aluminum</a:t>
             </a:r>
-            <a:endParaRPr lang="en-US" sz="1950" dirty="0"/>
+            <a:endParaRPr lang="en-US" sz="1900" dirty="0"/>
           </a:p>
         </p:txBody>
       </p:sp>
@@ -7355,7 +7443,7 @@
               <a:buNone/>
             </a:pPr>
             <a:r>
-              <a:rPr lang="en-US" sz="2250" b="1" dirty="0">
+              <a:rPr lang="en-US" sz="2200" b="1" dirty="0">
                 <a:solidFill>
                   <a:srgbClr val="1F6FB2"/>
                 </a:solidFill>
@@ -7365,7 +7453,7 @@
               </a:rPr>
               <a:t>3</a:t>
             </a:r>
-            <a:endParaRPr lang="en-US" sz="2250" dirty="0"/>
+            <a:endParaRPr lang="en-US" sz="2200" dirty="0"/>
           </a:p>
         </p:txBody>
       </p:sp>
@@ -7399,7 +7487,7 @@
               <a:buNone/>
             </a:pPr>
             <a:r>
-              <a:rPr lang="en-US" sz="1950" dirty="0">
+              <a:rPr lang="en-US" sz="1900" dirty="0">
                 <a:solidFill>
                   <a:srgbClr val="000000"/>
                 </a:solidFill>
@@ -7409,7 +7497,7 @@
               </a:rPr>
               <a:t>Commit to feature/aluminum.</a:t>
             </a:r>
-            <a:endParaRPr lang="en-US" sz="1950" dirty="0"/>
+            <a:endParaRPr lang="en-US" sz="1900" dirty="0"/>
           </a:p>
         </p:txBody>
       </p:sp>
@@ -7443,7 +7531,7 @@
               <a:buNone/>
             </a:pPr>
             <a:r>
-              <a:rPr lang="en-US" sz="2250" b="1" dirty="0">
+              <a:rPr lang="en-US" sz="2200" b="1" dirty="0">
                 <a:solidFill>
                   <a:srgbClr val="1F6FB2"/>
                 </a:solidFill>
@@ -7453,7 +7541,7 @@
               </a:rPr>
               <a:t>4</a:t>
             </a:r>
-            <a:endParaRPr lang="en-US" sz="2250" dirty="0"/>
+            <a:endParaRPr lang="en-US" sz="2200" dirty="0"/>
           </a:p>
         </p:txBody>
       </p:sp>
@@ -7487,7 +7575,7 @@
               <a:buNone/>
             </a:pPr>
             <a:r>
-              <a:rPr lang="en-US" sz="1950" b="1" dirty="0">
+              <a:rPr lang="en-US" sz="1900" b="1" dirty="0">
                 <a:solidFill>
                   <a:srgbClr val="000000"/>
                 </a:solidFill>
@@ -7498,7 +7586,7 @@
               <a:t>Publish branch</a:t>
             </a:r>
             <a:r>
-              <a:rPr lang="en-US" sz="1950" dirty="0">
+              <a:rPr lang="en-US" sz="1900" dirty="0">
                 <a:solidFill>
                   <a:srgbClr val="000000"/>
                 </a:solidFill>
@@ -7508,7 +7596,7 @@
               </a:rPr>
               <a:t>.</a:t>
             </a:r>
-            <a:endParaRPr lang="en-US" sz="1950" dirty="0"/>
+            <a:endParaRPr lang="en-US" sz="1900" dirty="0"/>
           </a:p>
         </p:txBody>
       </p:sp>
@@ -7542,7 +7630,7 @@
               <a:buNone/>
             </a:pPr>
             <a:r>
-              <a:rPr lang="en-US" sz="2250" b="1" dirty="0">
+              <a:rPr lang="en-US" sz="2200" b="1" dirty="0">
                 <a:solidFill>
                   <a:srgbClr val="1F6FB2"/>
                 </a:solidFill>
@@ -7552,7 +7640,7 @@
               </a:rPr>
               <a:t>5</a:t>
             </a:r>
-            <a:endParaRPr lang="en-US" sz="2250" dirty="0"/>
+            <a:endParaRPr lang="en-US" sz="2200" dirty="0"/>
           </a:p>
         </p:txBody>
       </p:sp>
@@ -7586,7 +7674,7 @@
               <a:buNone/>
             </a:pPr>
             <a:r>
-              <a:rPr lang="en-US" sz="1950" dirty="0">
+              <a:rPr lang="en-US" sz="1900" dirty="0">
                 <a:solidFill>
                   <a:srgbClr val="000000"/>
                 </a:solidFill>
@@ -7596,7 +7684,7 @@
               </a:rPr>
               <a:t>Switch Current branch to main. Look at beam.m.</a:t>
             </a:r>
-            <a:endParaRPr lang="en-US" sz="1950" dirty="0"/>
+            <a:endParaRPr lang="en-US" sz="1900" dirty="0"/>
           </a:p>
         </p:txBody>
       </p:sp>
@@ -7609,7 +7697,7 @@
         <p:spPr>
           <a:xfrm>
             <a:off x="7820025" y="4352925"/>
-            <a:ext cx="5837396" cy="758031"/>
+            <a:ext cx="5758815" cy="758031"/>
           </a:xfrm>
           <a:prstGeom prst="rect">
             <a:avLst/>
@@ -7630,7 +7718,7 @@
               <a:buNone/>
             </a:pPr>
             <a:r>
-              <a:rPr lang="en-US" sz="2025" b="1" dirty="0">
+              <a:rPr lang="en-US" sz="2000" b="1" dirty="0">
                 <a:solidFill>
                   <a:srgbClr val="000000"/>
                 </a:solidFill>
@@ -7641,7 +7729,7 @@
               <a:t>Branch: </a:t>
             </a:r>
             <a:r>
-              <a:rPr lang="en-US" sz="2025" dirty="0">
+              <a:rPr lang="en-US" sz="2000" dirty="0">
                 <a:solidFill>
                   <a:srgbClr val="000000"/>
                 </a:solidFill>
@@ -7651,7 +7739,7 @@
               </a:rPr>
               <a:t>a separate line of commits. main stays unchanged until the branch is merged.</a:t>
             </a:r>
-            <a:endParaRPr lang="en-US" sz="2025" dirty="0"/>
+            <a:endParaRPr lang="en-US" sz="2000" dirty="0"/>
           </a:p>
         </p:txBody>
       </p:sp>
@@ -7664,7 +7752,7 @@
         <p:spPr>
           <a:xfrm>
             <a:off x="7820025" y="6797874"/>
-            <a:ext cx="5837396" cy="758031"/>
+            <a:ext cx="5758815" cy="758031"/>
           </a:xfrm>
           <a:prstGeom prst="rect">
             <a:avLst/>
@@ -7685,7 +7773,7 @@
               <a:buNone/>
             </a:pPr>
             <a:r>
-              <a:rPr lang="en-US" sz="2025" dirty="0">
+              <a:rPr lang="en-US" sz="2000" dirty="0">
                 <a:solidFill>
                   <a:srgbClr val="000000"/>
                 </a:solidFill>
@@ -7695,7 +7783,7 @@
               </a:rPr>
               <a:t>Switching branches swaps the files in your folder. Commit before you switch.</a:t>
             </a:r>
-            <a:endParaRPr lang="en-US" sz="2025" dirty="0"/>
+            <a:endParaRPr lang="en-US" sz="2000" dirty="0"/>
           </a:p>
         </p:txBody>
       </p:sp>
@@ -7708,7 +7796,7 @@
         <p:spPr>
           <a:xfrm>
             <a:off x="7820025" y="7689255"/>
-            <a:ext cx="6234113" cy="398066"/>
+            <a:ext cx="5758815" cy="398066"/>
           </a:xfrm>
           <a:prstGeom prst="rect">
             <a:avLst/>
@@ -7729,7 +7817,7 @@
               <a:buNone/>
             </a:pPr>
             <a:r>
-              <a:rPr lang="en-US" sz="2025" b="1" dirty="0">
+              <a:rPr lang="en-US" sz="2000" b="1" dirty="0">
                 <a:solidFill>
                   <a:srgbClr val="FF0000"/>
                 </a:solidFill>
@@ -7739,7 +7827,7 @@
               </a:rPr>
               <a:t>Coding agents always work on their own branch.</a:t>
             </a:r>
-            <a:endParaRPr lang="en-US" sz="2025" b="1" dirty="0">
+            <a:endParaRPr lang="en-US" sz="2000" b="1" dirty="0">
               <a:solidFill>
                 <a:srgbClr val="FF0000"/>
               </a:solidFill>
@@ -7756,7 +7844,7 @@
         <p:spPr>
           <a:xfrm>
             <a:off x="133350" y="4667250"/>
-            <a:ext cx="1442184" cy="381000"/>
+            <a:ext cx="1409700" cy="381000"/>
           </a:xfrm>
           <a:prstGeom prst="rect">
             <a:avLst/>
@@ -7913,6 +8001,66 @@
           </a:fontRef>
         </p:style>
       </p:cxnSp>
+      <p:sp>
+        <p:nvSpPr>
+          <p:cNvPr id="28" name="Kicker"/>
+          <p:cNvSpPr/>
+          <p:nvPr/>
+        </p:nvSpPr>
+        <p:spPr>
+          <a:xfrm>
+            <a:off x="7818120" y="8183879"/>
+            <a:ext cx="5669280" cy="1371600"/>
+          </a:xfrm>
+          <a:prstGeom prst="rect">
+            <a:avLst/>
+          </a:prstGeom>
+          <a:solidFill>
+            <a:srgbClr val="152A47"/>
+          </a:solidFill>
+          <a:ln>
+            <a:noFill/>
+          </a:ln>
+          <a:effectLst/>
+        </p:spPr>
+        <p:style>
+          <a:lnRef idx="1">
+            <a:schemeClr val="accent1"/>
+          </a:lnRef>
+          <a:fillRef idx="3">
+            <a:schemeClr val="accent1"/>
+          </a:fillRef>
+          <a:effectRef idx="2">
+            <a:schemeClr val="accent1"/>
+          </a:effectRef>
+          <a:fontRef idx="minor">
+            <a:schemeClr val="lt1"/>
+          </a:fontRef>
+        </p:style>
+        <p:txBody>
+          <a:bodyPr rtlCol="0" anchor="ctr" wrap="square" lIns="201168" rIns="201168" tIns="109728" bIns="109728"/>
+          <a:lstStyle/>
+          <a:p>
+            <a:pPr algn="l"/>
+            <a:r>
+              <a:rPr sz="1700" b="1">
+                <a:solidFill>
+                  <a:srgbClr val="FFFFFF"/>
+                </a:solidFill>
+              </a:rPr>
+              <a:t>Why branch? </a:t>
+            </a:r>
+            <a:r>
+              <a:rPr sz="1700" b="0">
+                <a:solidFill>
+                  <a:srgbClr val="FFFFFF"/>
+                </a:solidFill>
+              </a:rPr>
+              <a:t>A branch is a separate line of commits. Try a change (yours or an agent’s) without touching main; merge it when it works, or delete it and nothing is lost.</a:t>
+            </a:r>
+          </a:p>
+        </p:txBody>
+      </p:sp>
     </p:spTree>
   </p:cSld>
   <p:clrMapOvr>
@@ -8060,7 +8208,7 @@
               <a:buNone/>
             </a:pPr>
             <a:r>
-              <a:rPr lang="en-US" sz="2250" b="1" dirty="0">
+              <a:rPr lang="en-US" sz="2200" b="1" dirty="0">
                 <a:solidFill>
                   <a:srgbClr val="1F6FB2"/>
                 </a:solidFill>
@@ -8070,7 +8218,7 @@
               </a:rPr>
               <a:t>1</a:t>
             </a:r>
-            <a:endParaRPr lang="en-US" sz="2250" dirty="0"/>
+            <a:endParaRPr lang="en-US" sz="2200" dirty="0"/>
           </a:p>
         </p:txBody>
       </p:sp>
@@ -8104,7 +8252,7 @@
               <a:buNone/>
             </a:pPr>
             <a:r>
-              <a:rPr lang="en-US" sz="2025" dirty="0">
+              <a:rPr lang="en-US" sz="2000" dirty="0">
                 <a:solidFill>
                   <a:srgbClr val="000000"/>
                 </a:solidFill>
@@ -8115,7 +8263,7 @@
               <a:t>Switch to feature/aluminum. Branch › </a:t>
             </a:r>
             <a:r>
-              <a:rPr lang="en-US" sz="2025" b="1" dirty="0">
+              <a:rPr lang="en-US" sz="2000" b="1" dirty="0">
                 <a:solidFill>
                   <a:srgbClr val="000000"/>
                 </a:solidFill>
@@ -8126,7 +8274,7 @@
               <a:t>Create pull request </a:t>
             </a:r>
             <a:r>
-              <a:rPr lang="en-US" sz="2025" dirty="0">
+              <a:rPr lang="en-US" sz="2000" dirty="0">
                 <a:solidFill>
                   <a:srgbClr val="000000"/>
                 </a:solidFill>
@@ -8136,7 +8284,7 @@
               </a:rPr>
               <a:t>. GitHub opens.</a:t>
             </a:r>
-            <a:endParaRPr lang="en-US" sz="2025" dirty="0"/>
+            <a:endParaRPr lang="en-US" sz="2000" dirty="0"/>
           </a:p>
         </p:txBody>
       </p:sp>
@@ -8170,7 +8318,7 @@
               <a:buNone/>
             </a:pPr>
             <a:r>
-              <a:rPr lang="en-US" sz="2250" b="1" dirty="0">
+              <a:rPr lang="en-US" sz="2200" b="1" dirty="0">
                 <a:solidFill>
                   <a:srgbClr val="1F6FB2"/>
                 </a:solidFill>
@@ -8180,7 +8328,7 @@
               </a:rPr>
               <a:t>2</a:t>
             </a:r>
-            <a:endParaRPr lang="en-US" sz="2250" dirty="0"/>
+            <a:endParaRPr lang="en-US" sz="2200" dirty="0"/>
           </a:p>
         </p:txBody>
       </p:sp>
@@ -8214,7 +8362,7 @@
               <a:buNone/>
             </a:pPr>
             <a:r>
-              <a:rPr lang="en-US" sz="2025" dirty="0">
+              <a:rPr lang="en-US" sz="2000" dirty="0">
                 <a:solidFill>
                   <a:srgbClr val="000000"/>
                 </a:solidFill>
@@ -8225,7 +8373,7 @@
               <a:t>Add a title and one-line description. </a:t>
             </a:r>
             <a:r>
-              <a:rPr lang="en-US" sz="2025" b="1" dirty="0">
+              <a:rPr lang="en-US" sz="2000" b="1" dirty="0">
                 <a:solidFill>
                   <a:srgbClr val="000000"/>
                 </a:solidFill>
@@ -8236,7 +8384,7 @@
               <a:t>Create pull request </a:t>
             </a:r>
             <a:r>
-              <a:rPr lang="en-US" sz="2025" dirty="0">
+              <a:rPr lang="en-US" sz="2000" dirty="0">
                 <a:solidFill>
                   <a:srgbClr val="000000"/>
                 </a:solidFill>
@@ -8246,7 +8394,7 @@
               </a:rPr>
               <a:t>.</a:t>
             </a:r>
-            <a:endParaRPr lang="en-US" sz="2025" dirty="0"/>
+            <a:endParaRPr lang="en-US" sz="2000" dirty="0"/>
           </a:p>
         </p:txBody>
       </p:sp>
@@ -8280,7 +8428,7 @@
               <a:buNone/>
             </a:pPr>
             <a:r>
-              <a:rPr lang="en-US" sz="2250" b="1" dirty="0">
+              <a:rPr lang="en-US" sz="2200" b="1" dirty="0">
                 <a:solidFill>
                   <a:srgbClr val="1F6FB2"/>
                 </a:solidFill>
@@ -8290,7 +8438,7 @@
               </a:rPr>
               <a:t>3</a:t>
             </a:r>
-            <a:endParaRPr lang="en-US" sz="2250" dirty="0"/>
+            <a:endParaRPr lang="en-US" sz="2200" dirty="0"/>
           </a:p>
         </p:txBody>
       </p:sp>
@@ -8324,7 +8472,7 @@
               <a:buNone/>
             </a:pPr>
             <a:r>
-              <a:rPr lang="en-US" sz="2025" dirty="0">
+              <a:rPr lang="en-US" sz="2000" dirty="0">
                 <a:solidFill>
                   <a:srgbClr val="000000"/>
                 </a:solidFill>
@@ -8335,7 +8483,7 @@
               <a:t>Open </a:t>
             </a:r>
             <a:r>
-              <a:rPr lang="en-US" sz="2025" b="1" dirty="0">
+              <a:rPr lang="en-US" sz="2000" b="1" dirty="0">
                 <a:solidFill>
                   <a:srgbClr val="000000"/>
                 </a:solidFill>
@@ -8346,7 +8494,7 @@
               <a:t>Files changed</a:t>
             </a:r>
             <a:r>
-              <a:rPr lang="en-US" sz="2025" dirty="0">
+              <a:rPr lang="en-US" sz="2000" dirty="0">
                 <a:solidFill>
                   <a:srgbClr val="000000"/>
                 </a:solidFill>
@@ -8356,7 +8504,7 @@
               </a:rPr>
               <a:t>. Review every line.</a:t>
             </a:r>
-            <a:endParaRPr lang="en-US" sz="2025" dirty="0"/>
+            <a:endParaRPr lang="en-US" sz="2000" dirty="0"/>
           </a:p>
         </p:txBody>
       </p:sp>
@@ -8390,7 +8538,7 @@
               <a:buNone/>
             </a:pPr>
             <a:r>
-              <a:rPr lang="en-US" sz="2250" b="1" dirty="0">
+              <a:rPr lang="en-US" sz="2200" b="1" dirty="0">
                 <a:solidFill>
                   <a:srgbClr val="1F6FB2"/>
                 </a:solidFill>
@@ -8400,7 +8548,7 @@
               </a:rPr>
               <a:t>4</a:t>
             </a:r>
-            <a:endParaRPr lang="en-US" sz="2250" dirty="0"/>
+            <a:endParaRPr lang="en-US" sz="2200" dirty="0"/>
           </a:p>
         </p:txBody>
       </p:sp>
@@ -8434,7 +8582,7 @@
               <a:buNone/>
             </a:pPr>
             <a:r>
-              <a:rPr lang="en-US" sz="2025" b="1" dirty="0">
+              <a:rPr lang="en-US" sz="2000" b="1" dirty="0">
                 <a:solidFill>
                   <a:srgbClr val="000000"/>
                 </a:solidFill>
@@ -8445,7 +8593,7 @@
               <a:t>Merge pull request </a:t>
             </a:r>
             <a:r>
-              <a:rPr lang="en-US" sz="2025" dirty="0">
+              <a:rPr lang="en-US" sz="2000" dirty="0">
                 <a:solidFill>
                   <a:srgbClr val="000000"/>
                 </a:solidFill>
@@ -8456,7 +8604,7 @@
               <a:t>› Confirm. Then </a:t>
             </a:r>
             <a:r>
-              <a:rPr lang="en-US" sz="2025" b="1" dirty="0">
+              <a:rPr lang="en-US" sz="2000" b="1" dirty="0">
                 <a:solidFill>
                   <a:srgbClr val="000000"/>
                 </a:solidFill>
@@ -8467,7 +8615,7 @@
               <a:t>Delete branch </a:t>
             </a:r>
             <a:r>
-              <a:rPr lang="en-US" sz="2025" dirty="0">
+              <a:rPr lang="en-US" sz="2000" dirty="0">
                 <a:solidFill>
                   <a:srgbClr val="000000"/>
                 </a:solidFill>
@@ -8477,7 +8625,7 @@
               </a:rPr>
               <a:t>.</a:t>
             </a:r>
-            <a:endParaRPr lang="en-US" sz="2025" dirty="0"/>
+            <a:endParaRPr lang="en-US" sz="2000" dirty="0"/>
           </a:p>
         </p:txBody>
       </p:sp>
@@ -8511,7 +8659,7 @@
               <a:buNone/>
             </a:pPr>
             <a:r>
-              <a:rPr lang="en-US" sz="2250" b="1" dirty="0">
+              <a:rPr lang="en-US" sz="2200" b="1" dirty="0">
                 <a:solidFill>
                   <a:srgbClr val="1F6FB2"/>
                 </a:solidFill>
@@ -8521,7 +8669,7 @@
               </a:rPr>
               <a:t>5</a:t>
             </a:r>
-            <a:endParaRPr lang="en-US" sz="2250" dirty="0"/>
+            <a:endParaRPr lang="en-US" sz="2200" dirty="0"/>
           </a:p>
         </p:txBody>
       </p:sp>
@@ -8555,7 +8703,7 @@
               <a:buNone/>
             </a:pPr>
             <a:r>
-              <a:rPr lang="en-US" sz="2025" dirty="0">
+              <a:rPr lang="en-US" sz="2000" dirty="0">
                 <a:solidFill>
                   <a:srgbClr val="000000"/>
                 </a:solidFill>
@@ -8566,7 +8714,7 @@
               <a:t>In Desktop: switch to main, </a:t>
             </a:r>
             <a:r>
-              <a:rPr lang="en-US" sz="2025" b="1" dirty="0">
+              <a:rPr lang="en-US" sz="2000" b="1" dirty="0">
                 <a:solidFill>
                   <a:srgbClr val="000000"/>
                 </a:solidFill>
@@ -8577,7 +8725,7 @@
               <a:t>Pull origin</a:t>
             </a:r>
             <a:r>
-              <a:rPr lang="en-US" sz="2025" dirty="0">
+              <a:rPr lang="en-US" sz="2000" dirty="0">
                 <a:solidFill>
                   <a:srgbClr val="000000"/>
                 </a:solidFill>
@@ -8587,7 +8735,7 @@
               </a:rPr>
               <a:t>.</a:t>
             </a:r>
-            <a:endParaRPr lang="en-US" sz="2025" dirty="0"/>
+            <a:endParaRPr lang="en-US" sz="2000" dirty="0"/>
           </a:p>
         </p:txBody>
       </p:sp>
@@ -8599,8 +8747,8 @@
         </p:nvSpPr>
         <p:spPr>
           <a:xfrm>
-            <a:off x="1809750" y="5940623"/>
-            <a:ext cx="5715000" cy="1112441"/>
+            <a:off x="1809750" y="5943600"/>
+            <a:ext cx="11676888" cy="1600200"/>
           </a:xfrm>
           <a:prstGeom prst="rect">
             <a:avLst/>
@@ -8626,8 +8774,8 @@
         </p:nvSpPr>
         <p:spPr>
           <a:xfrm>
-            <a:off x="2038350" y="6150173"/>
-            <a:ext cx="5429250" cy="731441"/>
+            <a:off x="2038350" y="6108192"/>
+            <a:ext cx="11247120" cy="1325880"/>
           </a:xfrm>
           <a:prstGeom prst="rect">
             <a:avLst/>
@@ -8648,17 +8796,28 @@
               <a:buNone/>
             </a:pPr>
             <a:r>
-              <a:rPr lang="en-US" sz="1950" dirty="0">
-                <a:solidFill>
-                  <a:srgbClr val="000000"/>
-                </a:solidFill>
-                <a:latin typeface="+mn-lt"/>
-                <a:ea typeface="+mn-ea"/>
-                <a:cs typeface="+mn-cs"/>
-              </a:rPr>
-              <a:t>A pull request is a review checkpoint. Nothing reaches main until someone clicks Merge.</a:t>
-            </a:r>
-            <a:endParaRPr lang="en-US" sz="1950" dirty="0"/>
+              <a:rPr lang="en-US" sz="1900" dirty="0" b="1">
+                <a:solidFill>
+                  <a:srgbClr val="000000"/>
+                </a:solidFill>
+                <a:latin typeface="+mn-lt"/>
+                <a:ea typeface="+mn-ea"/>
+                <a:cs typeface="+mn-cs"/>
+              </a:rPr>
+              <a:t>A pull request (PR) </a:t>
+            </a:r>
+            <a:r>
+              <a:rPr lang="en-US" sz="1900" dirty="0">
+                <a:solidFill>
+                  <a:srgbClr val="000000"/>
+                </a:solidFill>
+                <a:latin typeface="+mn-lt"/>
+                <a:ea typeface="+mn-ea"/>
+                <a:cs typeface="+mn-cs"/>
+              </a:rPr>
+              <a:t>asks to merge one branch into another. GitHub shows the diff, the commits, and a comment thread, so reviewers can comment line by line before anything reaches main. Nothing changes on main until someone clicks Merge. In Lesson 2, every change a coding agent makes arrives as a PR for you to review.</a:t>
+            </a:r>
+            <a:endParaRPr lang="en-US" sz="1900" dirty="0"/>
           </a:p>
         </p:txBody>
       </p:sp>
@@ -8671,7 +8830,7 @@
         <p:spPr>
           <a:xfrm>
             <a:off x="133350" y="4667250"/>
-            <a:ext cx="1442184" cy="381000"/>
+            <a:ext cx="1409700" cy="381000"/>
           </a:xfrm>
           <a:prstGeom prst="rect">
             <a:avLst/>
@@ -8757,6 +8916,30 @@
           </a:p>
         </p:txBody>
       </p:sp>
+      <p:pic>
+        <p:nvPicPr>
+          <p:cNvPr id="20" name="Screenshot placeholder" descr="Screenshot to add: GitHub pull request page for feature/aluminum: Files changed tab and the Merge pull request button"/>
+          <p:cNvPicPr>
+            <a:picLocks noChangeAspect="1"/>
+          </p:cNvPicPr>
+          <p:nvPr/>
+        </p:nvPicPr>
+        <p:blipFill>
+          <a:blip r:embed="rId3"/>
+          <a:stretch>
+            <a:fillRect/>
+          </a:stretch>
+        </p:blipFill>
+        <p:spPr>
+          <a:xfrm>
+            <a:off x="8092440" y="2103120"/>
+            <a:ext cx="5394960" cy="3566160"/>
+          </a:xfrm>
+          <a:prstGeom prst="rect">
+            <a:avLst/>
+          </a:prstGeom>
+        </p:spPr>
+      </p:pic>
     </p:spTree>
   </p:cSld>
   <p:clrMapOvr>
@@ -8834,7 +9017,7 @@
               <a:buNone/>
             </a:pPr>
             <a:r>
-              <a:rPr lang="en-US" sz="2025" dirty="0">
+              <a:rPr lang="en-US" sz="2000" dirty="0">
                 <a:solidFill>
                   <a:srgbClr val="000000"/>
                 </a:solidFill>
@@ -8844,7 +9027,7 @@
               </a:rPr>
               <a:t>A conflict happens when two commits change the same lines. You decide the result.</a:t>
             </a:r>
-            <a:endParaRPr lang="en-US" sz="2025" dirty="0"/>
+            <a:endParaRPr lang="en-US" sz="2000" dirty="0"/>
           </a:p>
         </p:txBody>
       </p:sp>
@@ -8948,7 +9131,7 @@
               <a:buNone/>
             </a:pPr>
             <a:r>
-              <a:rPr lang="en-US" sz="2250" b="1" dirty="0">
+              <a:rPr lang="en-US" sz="2200" b="1" dirty="0">
                 <a:solidFill>
                   <a:srgbClr val="1F6FB2"/>
                 </a:solidFill>
@@ -8958,7 +9141,7 @@
               </a:rPr>
               <a:t>1</a:t>
             </a:r>
-            <a:endParaRPr lang="en-US" sz="2250" dirty="0"/>
+            <a:endParaRPr lang="en-US" sz="2200" dirty="0"/>
           </a:p>
         </p:txBody>
       </p:sp>
@@ -8992,7 +9175,7 @@
               <a:buNone/>
             </a:pPr>
             <a:r>
-              <a:rPr lang="en-US" sz="1950" dirty="0">
+              <a:rPr lang="en-US" sz="1900" dirty="0">
                 <a:solidFill>
                   <a:srgbClr val="000000"/>
                 </a:solidFill>
@@ -9003,7 +9186,7 @@
               <a:t>On GitHub, edit beam.m on main: </a:t>
             </a:r>
             <a:r>
-              <a:rPr lang="en-US" sz="1725" dirty="0">
+              <a:rPr lang="en-US" sz="1700" dirty="0">
                 <a:solidFill>
                   <a:srgbClr val="000000"/>
                 </a:solidFill>
@@ -9014,7 +9197,7 @@
               <a:t>L = 2.5; </a:t>
             </a:r>
             <a:r>
-              <a:rPr lang="en-US" sz="1950" dirty="0">
+              <a:rPr lang="en-US" sz="1900" dirty="0">
                 <a:solidFill>
                   <a:srgbClr val="000000"/>
                 </a:solidFill>
@@ -9024,7 +9207,7 @@
               </a:rPr>
               <a:t>. Commit.</a:t>
             </a:r>
-            <a:endParaRPr lang="en-US" sz="1950" dirty="0"/>
+            <a:endParaRPr lang="en-US" sz="1900" dirty="0"/>
           </a:p>
         </p:txBody>
       </p:sp>
@@ -9058,7 +9241,7 @@
               <a:buNone/>
             </a:pPr>
             <a:r>
-              <a:rPr lang="en-US" sz="2250" b="1" dirty="0">
+              <a:rPr lang="en-US" sz="2200" b="1" dirty="0">
                 <a:solidFill>
                   <a:srgbClr val="1F6FB2"/>
                 </a:solidFill>
@@ -9068,7 +9251,7 @@
               </a:rPr>
               <a:t>2</a:t>
             </a:r>
-            <a:endParaRPr lang="en-US" sz="2250" dirty="0"/>
+            <a:endParaRPr lang="en-US" sz="2200" dirty="0"/>
           </a:p>
         </p:txBody>
       </p:sp>
@@ -9102,7 +9285,7 @@
               <a:buNone/>
             </a:pPr>
             <a:r>
-              <a:rPr lang="en-US" sz="1950" dirty="0">
+              <a:rPr lang="en-US" sz="1900" dirty="0">
                 <a:solidFill>
                   <a:srgbClr val="000000"/>
                 </a:solidFill>
@@ -9113,7 +9296,7 @@
               <a:t>Locally, on main: </a:t>
             </a:r>
             <a:r>
-              <a:rPr lang="en-US" sz="1725" dirty="0">
+              <a:rPr lang="en-US" sz="1700" dirty="0">
                 <a:solidFill>
                   <a:srgbClr val="000000"/>
                 </a:solidFill>
@@ -9124,7 +9307,7 @@
               <a:t>L = 3.0; </a:t>
             </a:r>
             <a:r>
-              <a:rPr lang="en-US" sz="1950" dirty="0">
+              <a:rPr lang="en-US" sz="1900" dirty="0">
                 <a:solidFill>
                   <a:srgbClr val="000000"/>
                 </a:solidFill>
@@ -9134,7 +9317,7 @@
               </a:rPr>
               <a:t>. Commit. Don’t pull first.</a:t>
             </a:r>
-            <a:endParaRPr lang="en-US" sz="1950" dirty="0"/>
+            <a:endParaRPr lang="en-US" sz="1900" dirty="0"/>
           </a:p>
         </p:txBody>
       </p:sp>
@@ -9168,7 +9351,7 @@
               <a:buNone/>
             </a:pPr>
             <a:r>
-              <a:rPr lang="en-US" sz="2250" b="1" dirty="0">
+              <a:rPr lang="en-US" sz="2200" b="1" dirty="0">
                 <a:solidFill>
                   <a:srgbClr val="1F6FB2"/>
                 </a:solidFill>
@@ -9178,7 +9361,7 @@
               </a:rPr>
               <a:t>3</a:t>
             </a:r>
-            <a:endParaRPr lang="en-US" sz="2250" dirty="0"/>
+            <a:endParaRPr lang="en-US" sz="2200" dirty="0"/>
           </a:p>
         </p:txBody>
       </p:sp>
@@ -9212,7 +9395,7 @@
               <a:buNone/>
             </a:pPr>
             <a:r>
-              <a:rPr lang="en-US" sz="1950" b="1" dirty="0">
+              <a:rPr lang="en-US" sz="1900" b="1" dirty="0">
                 <a:solidFill>
                   <a:srgbClr val="000000"/>
                 </a:solidFill>
@@ -9223,7 +9406,7 @@
               <a:t>Push origin </a:t>
             </a:r>
             <a:r>
-              <a:rPr lang="en-US" sz="1950" dirty="0">
+              <a:rPr lang="en-US" sz="1900" dirty="0">
                 <a:solidFill>
                   <a:srgbClr val="000000"/>
                 </a:solidFill>
@@ -9234,7 +9417,7 @@
               <a:t>is rejected. Click </a:t>
             </a:r>
             <a:r>
-              <a:rPr lang="en-US" sz="1950" b="1" dirty="0">
+              <a:rPr lang="en-US" sz="1900" b="1" dirty="0">
                 <a:solidFill>
                   <a:srgbClr val="000000"/>
                 </a:solidFill>
@@ -9245,7 +9428,7 @@
               <a:t>Pull origin</a:t>
             </a:r>
             <a:r>
-              <a:rPr lang="en-US" sz="1950" dirty="0">
+              <a:rPr lang="en-US" sz="1900" dirty="0">
                 <a:solidFill>
                   <a:srgbClr val="000000"/>
                 </a:solidFill>
@@ -9255,7 +9438,7 @@
               </a:rPr>
               <a:t>.</a:t>
             </a:r>
-            <a:endParaRPr lang="en-US" sz="1950" dirty="0"/>
+            <a:endParaRPr lang="en-US" sz="1900" dirty="0"/>
           </a:p>
         </p:txBody>
       </p:sp>
@@ -9289,7 +9472,7 @@
               <a:buNone/>
             </a:pPr>
             <a:r>
-              <a:rPr lang="en-US" sz="2250" b="1" dirty="0">
+              <a:rPr lang="en-US" sz="2200" b="1" dirty="0">
                 <a:solidFill>
                   <a:srgbClr val="1F6FB2"/>
                 </a:solidFill>
@@ -9299,7 +9482,7 @@
               </a:rPr>
               <a:t>4</a:t>
             </a:r>
-            <a:endParaRPr lang="en-US" sz="2250" dirty="0"/>
+            <a:endParaRPr lang="en-US" sz="2200" dirty="0"/>
           </a:p>
         </p:txBody>
       </p:sp>
@@ -9333,7 +9516,7 @@
               <a:buNone/>
             </a:pPr>
             <a:r>
-              <a:rPr lang="en-US" sz="1950" dirty="0">
+              <a:rPr lang="en-US" sz="1900" dirty="0">
                 <a:solidFill>
                   <a:srgbClr val="000000"/>
                 </a:solidFill>
@@ -9344,7 +9527,7 @@
               <a:t>Desktop lists the conflicted file. </a:t>
             </a:r>
             <a:r>
-              <a:rPr lang="en-US" sz="1950" b="1" dirty="0">
+              <a:rPr lang="en-US" sz="1900" b="1" dirty="0">
                 <a:solidFill>
                   <a:srgbClr val="000000"/>
                 </a:solidFill>
@@ -9355,7 +9538,7 @@
               <a:t>Open in Visual Studio Code </a:t>
             </a:r>
             <a:r>
-              <a:rPr lang="en-US" sz="1950" dirty="0">
+              <a:rPr lang="en-US" sz="1900" dirty="0">
                 <a:solidFill>
                   <a:srgbClr val="000000"/>
                 </a:solidFill>
@@ -9365,7 +9548,7 @@
               </a:rPr>
               <a:t>.</a:t>
             </a:r>
-            <a:endParaRPr lang="en-US" sz="1950" dirty="0"/>
+            <a:endParaRPr lang="en-US" sz="1900" dirty="0"/>
           </a:p>
         </p:txBody>
       </p:sp>
@@ -9399,7 +9582,7 @@
               <a:buNone/>
             </a:pPr>
             <a:r>
-              <a:rPr lang="en-US" sz="2250" b="1" dirty="0">
+              <a:rPr lang="en-US" sz="2200" b="1" dirty="0">
                 <a:solidFill>
                   <a:srgbClr val="1F6FB2"/>
                 </a:solidFill>
@@ -9409,7 +9592,7 @@
               </a:rPr>
               <a:t>5</a:t>
             </a:r>
-            <a:endParaRPr lang="en-US" sz="2250" dirty="0"/>
+            <a:endParaRPr lang="en-US" sz="2200" dirty="0"/>
           </a:p>
         </p:txBody>
       </p:sp>
@@ -9443,7 +9626,7 @@
               <a:buNone/>
             </a:pPr>
             <a:r>
-              <a:rPr lang="en-US" sz="1950" dirty="0">
+              <a:rPr lang="en-US" sz="1900" dirty="0">
                 <a:solidFill>
                   <a:srgbClr val="000000"/>
                 </a:solidFill>
@@ -9453,7 +9636,7 @@
               </a:rPr>
               <a:t>Keep one value, delete the markers, save.</a:t>
             </a:r>
-            <a:endParaRPr lang="en-US" sz="1950" dirty="0"/>
+            <a:endParaRPr lang="en-US" sz="1900" dirty="0"/>
           </a:p>
         </p:txBody>
       </p:sp>
@@ -9487,7 +9670,7 @@
               <a:buNone/>
             </a:pPr>
             <a:r>
-              <a:rPr lang="en-US" sz="2250" b="1" dirty="0">
+              <a:rPr lang="en-US" sz="2200" b="1" dirty="0">
                 <a:solidFill>
                   <a:srgbClr val="1F6FB2"/>
                 </a:solidFill>
@@ -9497,7 +9680,7 @@
               </a:rPr>
               <a:t>6</a:t>
             </a:r>
-            <a:endParaRPr lang="en-US" sz="2250" dirty="0"/>
+            <a:endParaRPr lang="en-US" sz="2200" dirty="0"/>
           </a:p>
         </p:txBody>
       </p:sp>
@@ -9531,7 +9714,7 @@
               <a:buNone/>
             </a:pPr>
             <a:r>
-              <a:rPr lang="en-US" sz="1950" b="1" dirty="0">
+              <a:rPr lang="en-US" sz="1900" b="1" dirty="0">
                 <a:solidFill>
                   <a:srgbClr val="000000"/>
                 </a:solidFill>
@@ -9542,7 +9725,7 @@
               <a:t>Continue merge</a:t>
             </a:r>
             <a:r>
-              <a:rPr lang="en-US" sz="1950" dirty="0">
+              <a:rPr lang="en-US" sz="1900" dirty="0">
                 <a:solidFill>
                   <a:srgbClr val="000000"/>
                 </a:solidFill>
@@ -9553,7 +9736,7 @@
               <a:t>, then </a:t>
             </a:r>
             <a:r>
-              <a:rPr lang="en-US" sz="1950" b="1" dirty="0">
+              <a:rPr lang="en-US" sz="1900" b="1" dirty="0">
                 <a:solidFill>
                   <a:srgbClr val="000000"/>
                 </a:solidFill>
@@ -9564,7 +9747,7 @@
               <a:t>Push origin</a:t>
             </a:r>
             <a:r>
-              <a:rPr lang="en-US" sz="1950" dirty="0">
+              <a:rPr lang="en-US" sz="1900" dirty="0">
                 <a:solidFill>
                   <a:srgbClr val="000000"/>
                 </a:solidFill>
@@ -9574,7 +9757,7 @@
               </a:rPr>
               <a:t>.</a:t>
             </a:r>
-            <a:endParaRPr lang="en-US" sz="1950" dirty="0"/>
+            <a:endParaRPr lang="en-US" sz="1900" dirty="0"/>
           </a:p>
         </p:txBody>
       </p:sp>
@@ -9587,7 +9770,7 @@
         <p:spPr>
           <a:xfrm>
             <a:off x="8001000" y="1524000"/>
-            <a:ext cx="6035040" cy="298450"/>
+            <a:ext cx="5577840" cy="298450"/>
           </a:xfrm>
           <a:prstGeom prst="rect">
             <a:avLst/>
@@ -9678,7 +9861,7 @@
               <a:buNone/>
             </a:pPr>
             <a:r>
-              <a:rPr lang="en-US" sz="1725" dirty="0">
+              <a:rPr lang="en-US" sz="1700" dirty="0">
                 <a:solidFill>
                   <a:srgbClr val="D4D4D4"/>
                 </a:solidFill>
@@ -9689,7 +9872,7 @@
               <a:t>E = 200e9;   </a:t>
             </a:r>
             <a:r>
-              <a:rPr lang="en-US" sz="1725" dirty="0">
+              <a:rPr lang="en-US" sz="1700" dirty="0">
                 <a:solidFill>
                   <a:srgbClr val="6A9955"/>
                 </a:solidFill>
@@ -9699,7 +9882,7 @@
               </a:rPr>
               <a:t>% Pa</a:t>
             </a:r>
-            <a:endParaRPr lang="en-US" sz="1725" dirty="0"/>
+            <a:endParaRPr lang="en-US" sz="1700" dirty="0"/>
           </a:p>
         </p:txBody>
       </p:sp>
@@ -9733,7 +9916,7 @@
               <a:buNone/>
             </a:pPr>
             <a:r>
-              <a:rPr lang="en-US" sz="1725" dirty="0">
+              <a:rPr lang="en-US" sz="1700" dirty="0">
                 <a:solidFill>
                   <a:srgbClr val="F48771"/>
                 </a:solidFill>
@@ -9743,7 +9926,7 @@
               </a:rPr>
               <a:t>&lt;&lt;&lt;&lt;&lt;&lt;&lt; HEAD</a:t>
             </a:r>
-            <a:endParaRPr lang="en-US" sz="1725" dirty="0"/>
+            <a:endParaRPr lang="en-US" sz="1700" dirty="0"/>
           </a:p>
         </p:txBody>
       </p:sp>
@@ -9777,7 +9960,7 @@
               <a:buNone/>
             </a:pPr>
             <a:r>
-              <a:rPr lang="en-US" sz="1725" dirty="0">
+              <a:rPr lang="en-US" sz="1700" dirty="0">
                 <a:solidFill>
                   <a:srgbClr val="D4D4D4"/>
                 </a:solidFill>
@@ -9788,7 +9971,7 @@
               <a:t>L = 3.0;     </a:t>
             </a:r>
             <a:r>
-              <a:rPr lang="en-US" sz="1725" dirty="0">
+              <a:rPr lang="en-US" sz="1700" dirty="0">
                 <a:solidFill>
                   <a:srgbClr val="6A9955"/>
                 </a:solidFill>
@@ -9798,7 +9981,7 @@
               </a:rPr>
               <a:t>% m</a:t>
             </a:r>
-            <a:endParaRPr lang="en-US" sz="1725" dirty="0"/>
+            <a:endParaRPr lang="en-US" sz="1700" dirty="0"/>
           </a:p>
         </p:txBody>
       </p:sp>
@@ -9832,7 +10015,7 @@
               <a:buNone/>
             </a:pPr>
             <a:r>
-              <a:rPr lang="en-US" sz="1725" dirty="0">
+              <a:rPr lang="en-US" sz="1700" dirty="0">
                 <a:solidFill>
                   <a:srgbClr val="F48771"/>
                 </a:solidFill>
@@ -9842,7 +10025,7 @@
               </a:rPr>
               <a:t>=======</a:t>
             </a:r>
-            <a:endParaRPr lang="en-US" sz="1725" dirty="0"/>
+            <a:endParaRPr lang="en-US" sz="1700" dirty="0"/>
           </a:p>
         </p:txBody>
       </p:sp>
@@ -9876,7 +10059,7 @@
               <a:buNone/>
             </a:pPr>
             <a:r>
-              <a:rPr lang="en-US" sz="1725" dirty="0">
+              <a:rPr lang="en-US" sz="1700" dirty="0">
                 <a:solidFill>
                   <a:srgbClr val="D4D4D4"/>
                 </a:solidFill>
@@ -9887,7 +10070,7 @@
               <a:t>L = 2.5;     </a:t>
             </a:r>
             <a:r>
-              <a:rPr lang="en-US" sz="1725" dirty="0">
+              <a:rPr lang="en-US" sz="1700" dirty="0">
                 <a:solidFill>
                   <a:srgbClr val="6A9955"/>
                 </a:solidFill>
@@ -9897,7 +10080,7 @@
               </a:rPr>
               <a:t>% m</a:t>
             </a:r>
-            <a:endParaRPr lang="en-US" sz="1725" dirty="0"/>
+            <a:endParaRPr lang="en-US" sz="1700" dirty="0"/>
           </a:p>
         </p:txBody>
       </p:sp>
@@ -9931,7 +10114,7 @@
               <a:buNone/>
             </a:pPr>
             <a:r>
-              <a:rPr lang="en-US" sz="1725" dirty="0">
+              <a:rPr lang="en-US" sz="1700" dirty="0">
                 <a:solidFill>
                   <a:srgbClr val="F48771"/>
                 </a:solidFill>
@@ -9941,7 +10124,7 @@
               </a:rPr>
               <a:t>&gt;&gt;&gt;&gt;&gt;&gt;&gt; origin/main</a:t>
             </a:r>
-            <a:endParaRPr lang="en-US" sz="1725" dirty="0"/>
+            <a:endParaRPr lang="en-US" sz="1700" dirty="0"/>
           </a:p>
         </p:txBody>
       </p:sp>
@@ -9975,7 +10158,7 @@
               <a:buNone/>
             </a:pPr>
             <a:r>
-              <a:rPr lang="en-US" sz="1725" dirty="0">
+              <a:rPr lang="en-US" sz="1700" dirty="0">
                 <a:solidFill>
                   <a:srgbClr val="D4D4D4"/>
                 </a:solidFill>
@@ -9986,7 +10169,7 @@
               <a:t>P = 750.0;   </a:t>
             </a:r>
             <a:r>
-              <a:rPr lang="en-US" sz="1725" dirty="0">
+              <a:rPr lang="en-US" sz="1700" dirty="0">
                 <a:solidFill>
                   <a:srgbClr val="6A9955"/>
                 </a:solidFill>
@@ -9996,7 +10179,7 @@
               </a:rPr>
               <a:t>% N</a:t>
             </a:r>
-            <a:endParaRPr lang="en-US" sz="1725" dirty="0"/>
+            <a:endParaRPr lang="en-US" sz="1700" dirty="0"/>
           </a:p>
         </p:txBody>
       </p:sp>
@@ -10053,7 +10236,7 @@
         <p:spPr>
           <a:xfrm>
             <a:off x="9645848" y="5076527"/>
-            <a:ext cx="4225707" cy="346670"/>
+            <a:ext cx="3932992" cy="346670"/>
           </a:xfrm>
           <a:prstGeom prst="rect">
             <a:avLst/>
@@ -10141,7 +10324,7 @@
         <p:spPr>
           <a:xfrm>
             <a:off x="9645848" y="5480348"/>
-            <a:ext cx="4225707" cy="346670"/>
+            <a:ext cx="3932992" cy="346670"/>
           </a:xfrm>
           <a:prstGeom prst="rect">
             <a:avLst/>
@@ -10185,7 +10368,7 @@
         <p:spPr>
           <a:xfrm>
             <a:off x="133350" y="5048250"/>
-            <a:ext cx="1442184" cy="381000"/>
+            <a:ext cx="1409700" cy="381000"/>
           </a:xfrm>
           <a:prstGeom prst="rect">
             <a:avLst/>
@@ -10271,6 +10454,30 @@
           </a:p>
         </p:txBody>
       </p:sp>
+      <p:pic>
+        <p:nvPicPr>
+          <p:cNvPr id="34" name="Screenshot placeholder" descr="Screenshot to add: VS Code showing the beam.m conflict, with Accept Current Change / Accept Incoming Change above the markers"/>
+          <p:cNvPicPr>
+            <a:picLocks noChangeAspect="1"/>
+          </p:cNvPicPr>
+          <p:nvPr/>
+        </p:nvPicPr>
+        <p:blipFill>
+          <a:blip r:embed="rId3"/>
+          <a:stretch>
+            <a:fillRect/>
+          </a:stretch>
+        </p:blipFill>
+        <p:spPr>
+          <a:xfrm>
+            <a:off x="8001000" y="6035040"/>
+            <a:ext cx="5486400" cy="3337560"/>
+          </a:xfrm>
+          <a:prstGeom prst="rect">
+            <a:avLst/>
+          </a:prstGeom>
+        </p:spPr>
+      </p:pic>
     </p:spTree>
   </p:cSld>
   <p:clrMapOvr>
@@ -10375,7 +10582,7 @@
               <a:buNone/>
             </a:pPr>
             <a:r>
-              <a:rPr lang="en-US" sz="1875" b="1" dirty="0">
+              <a:rPr lang="en-US" sz="1900" b="1" dirty="0">
                 <a:solidFill>
                   <a:srgbClr val="FFFFFF"/>
                 </a:solidFill>
@@ -10385,7 +10592,7 @@
               </a:rPr>
               <a:t>Situation</a:t>
             </a:r>
-            <a:endParaRPr lang="en-US" sz="1875" dirty="0"/>
+            <a:endParaRPr lang="en-US" sz="1900" dirty="0"/>
           </a:p>
         </p:txBody>
       </p:sp>
@@ -10446,7 +10653,7 @@
               <a:buNone/>
             </a:pPr>
             <a:r>
-              <a:rPr lang="en-US" sz="1875" b="1" dirty="0">
+              <a:rPr lang="en-US" sz="1900" b="1" dirty="0">
                 <a:solidFill>
                   <a:srgbClr val="FFFFFF"/>
                 </a:solidFill>
@@ -10456,7 +10663,7 @@
               </a:rPr>
               <a:t>What to do</a:t>
             </a:r>
-            <a:endParaRPr lang="en-US" sz="1875" dirty="0"/>
+            <a:endParaRPr lang="en-US" sz="1900" dirty="0"/>
           </a:p>
         </p:txBody>
       </p:sp>
@@ -10517,7 +10724,7 @@
               <a:buNone/>
             </a:pPr>
             <a:r>
-              <a:rPr lang="en-US" sz="1875" b="1" dirty="0">
+              <a:rPr lang="en-US" sz="1900" b="1" dirty="0">
                 <a:solidFill>
                   <a:srgbClr val="FFFFFF"/>
                 </a:solidFill>
@@ -10527,7 +10734,7 @@
               </a:rPr>
               <a:t>GitHub Desktop</a:t>
             </a:r>
-            <a:endParaRPr lang="en-US" sz="1875" dirty="0"/>
+            <a:endParaRPr lang="en-US" sz="1900" dirty="0"/>
           </a:p>
         </p:txBody>
       </p:sp>
@@ -10588,7 +10795,7 @@
               <a:buNone/>
             </a:pPr>
             <a:r>
-              <a:rPr lang="en-US" sz="1875" b="1" dirty="0">
+              <a:rPr lang="en-US" sz="1900" b="1" dirty="0">
                 <a:solidFill>
                   <a:srgbClr val="000000"/>
                 </a:solidFill>
@@ -10598,7 +10805,7 @@
               </a:rPr>
               <a:t>Not committed</a:t>
             </a:r>
-            <a:endParaRPr lang="en-US" sz="1875" dirty="0"/>
+            <a:endParaRPr lang="en-US" sz="1900" dirty="0"/>
           </a:p>
         </p:txBody>
       </p:sp>
@@ -10659,7 +10866,7 @@
               <a:buNone/>
             </a:pPr>
             <a:r>
-              <a:rPr lang="en-US" sz="1875" dirty="0">
+              <a:rPr lang="en-US" sz="1900" dirty="0">
                 <a:solidFill>
                   <a:srgbClr val="000000"/>
                 </a:solidFill>
@@ -10669,7 +10876,7 @@
               </a:rPr>
               <a:t>Throw away edits to a file</a:t>
             </a:r>
-            <a:endParaRPr lang="en-US" sz="1875" dirty="0"/>
+            <a:endParaRPr lang="en-US" sz="1900" dirty="0"/>
           </a:p>
         </p:txBody>
       </p:sp>
@@ -10730,7 +10937,7 @@
               <a:buNone/>
             </a:pPr>
             <a:r>
-              <a:rPr lang="en-US" sz="1875" dirty="0">
+              <a:rPr lang="en-US" sz="1900" dirty="0">
                 <a:solidFill>
                   <a:srgbClr val="000000"/>
                 </a:solidFill>
@@ -10740,7 +10947,7 @@
               </a:rPr>
               <a:t>Changes › right-click › Discard changes</a:t>
             </a:r>
-            <a:endParaRPr lang="en-US" sz="1875" dirty="0"/>
+            <a:endParaRPr lang="en-US" sz="1900" dirty="0"/>
           </a:p>
         </p:txBody>
       </p:sp>
@@ -10801,7 +11008,7 @@
               <a:buNone/>
             </a:pPr>
             <a:r>
-              <a:rPr lang="en-US" sz="1875" b="1" dirty="0">
+              <a:rPr lang="en-US" sz="1900" b="1" dirty="0">
                 <a:solidFill>
                   <a:srgbClr val="000000"/>
                 </a:solidFill>
@@ -10811,7 +11018,7 @@
               </a:rPr>
               <a:t>Committed, not pushed</a:t>
             </a:r>
-            <a:endParaRPr lang="en-US" sz="1875" dirty="0"/>
+            <a:endParaRPr lang="en-US" sz="1900" dirty="0"/>
           </a:p>
         </p:txBody>
       </p:sp>
@@ -10872,7 +11079,7 @@
               <a:buNone/>
             </a:pPr>
             <a:r>
-              <a:rPr lang="en-US" sz="1875" dirty="0">
+              <a:rPr lang="en-US" sz="1900" dirty="0">
                 <a:solidFill>
                   <a:srgbClr val="000000"/>
                 </a:solidFill>
@@ -10882,7 +11089,7 @@
               </a:rPr>
               <a:t>Take back the last commit; edits return to Changes</a:t>
             </a:r>
-            <a:endParaRPr lang="en-US" sz="1875" dirty="0"/>
+            <a:endParaRPr lang="en-US" sz="1900" dirty="0"/>
           </a:p>
         </p:txBody>
       </p:sp>
@@ -10943,7 +11150,7 @@
               <a:buNone/>
             </a:pPr>
             <a:r>
-              <a:rPr lang="en-US" sz="1875" dirty="0">
+              <a:rPr lang="en-US" sz="1900" dirty="0">
                 <a:solidFill>
                   <a:srgbClr val="000000"/>
                 </a:solidFill>
@@ -10953,7 +11160,7 @@
               </a:rPr>
               <a:t>Undo button (below commit box)</a:t>
             </a:r>
-            <a:endParaRPr lang="en-US" sz="1875" dirty="0"/>
+            <a:endParaRPr lang="en-US" sz="1900" dirty="0"/>
           </a:p>
         </p:txBody>
       </p:sp>
@@ -11014,7 +11221,7 @@
               <a:buNone/>
             </a:pPr>
             <a:r>
-              <a:rPr lang="en-US" sz="1875" b="1" dirty="0">
+              <a:rPr lang="en-US" sz="1900" b="1" dirty="0">
                 <a:solidFill>
                   <a:srgbClr val="000000"/>
                 </a:solidFill>
@@ -11024,7 +11231,7 @@
               </a:rPr>
               <a:t>Already pushed</a:t>
             </a:r>
-            <a:endParaRPr lang="en-US" sz="1875" dirty="0"/>
+            <a:endParaRPr lang="en-US" sz="1900" dirty="0"/>
           </a:p>
         </p:txBody>
       </p:sp>
@@ -11085,7 +11292,7 @@
               <a:buNone/>
             </a:pPr>
             <a:r>
-              <a:rPr lang="en-US" sz="1875" dirty="0">
+              <a:rPr lang="en-US" sz="1900" dirty="0">
                 <a:solidFill>
                   <a:srgbClr val="000000"/>
                 </a:solidFill>
@@ -11095,7 +11302,7 @@
               </a:rPr>
               <a:t>Add a new commit that reverses an old one</a:t>
             </a:r>
-            <a:endParaRPr lang="en-US" sz="1875" dirty="0"/>
+            <a:endParaRPr lang="en-US" sz="1900" dirty="0"/>
           </a:p>
         </p:txBody>
       </p:sp>
@@ -11156,7 +11363,7 @@
               <a:buNone/>
             </a:pPr>
             <a:r>
-              <a:rPr lang="en-US" sz="1875" dirty="0">
+              <a:rPr lang="en-US" sz="1900" dirty="0">
                 <a:solidFill>
                   <a:srgbClr val="000000"/>
                 </a:solidFill>
@@ -11166,7 +11373,7 @@
               </a:rPr>
               <a:t>History › right-click › Revert changes in commit</a:t>
             </a:r>
-            <a:endParaRPr lang="en-US" sz="1875" dirty="0"/>
+            <a:endParaRPr lang="en-US" sz="1900" dirty="0"/>
           </a:p>
         </p:txBody>
       </p:sp>
@@ -11270,7 +11477,7 @@
               <a:buNone/>
             </a:pPr>
             <a:r>
-              <a:rPr lang="en-US" sz="2250" b="1" dirty="0">
+              <a:rPr lang="en-US" sz="2200" b="1" dirty="0">
                 <a:solidFill>
                   <a:srgbClr val="1F6FB2"/>
                 </a:solidFill>
@@ -11280,7 +11487,7 @@
               </a:rPr>
               <a:t>1</a:t>
             </a:r>
-            <a:endParaRPr lang="en-US" sz="2250" dirty="0"/>
+            <a:endParaRPr lang="en-US" sz="2200" dirty="0"/>
           </a:p>
         </p:txBody>
       </p:sp>
@@ -11314,7 +11521,7 @@
               <a:buNone/>
             </a:pPr>
             <a:r>
-              <a:rPr lang="en-US" sz="1950" dirty="0">
+              <a:rPr lang="en-US" sz="1900" dirty="0">
                 <a:solidFill>
                   <a:srgbClr val="000000"/>
                 </a:solidFill>
@@ -11325,7 +11532,7 @@
               <a:t>Open the </a:t>
             </a:r>
             <a:r>
-              <a:rPr lang="en-US" sz="1950" b="1" dirty="0">
+              <a:rPr lang="en-US" sz="1900" b="1" dirty="0">
                 <a:solidFill>
                   <a:srgbClr val="000000"/>
                 </a:solidFill>
@@ -11336,7 +11543,7 @@
               <a:t>History </a:t>
             </a:r>
             <a:r>
-              <a:rPr lang="en-US" sz="1950" dirty="0">
+              <a:rPr lang="en-US" sz="1900" dirty="0">
                 <a:solidFill>
                   <a:srgbClr val="000000"/>
                 </a:solidFill>
@@ -11346,7 +11553,7 @@
               </a:rPr>
               <a:t>tab. Click each commit to see its diff.</a:t>
             </a:r>
-            <a:endParaRPr lang="en-US" sz="1950" dirty="0"/>
+            <a:endParaRPr lang="en-US" sz="1900" dirty="0"/>
           </a:p>
         </p:txBody>
       </p:sp>
@@ -11380,7 +11587,7 @@
               <a:buNone/>
             </a:pPr>
             <a:r>
-              <a:rPr lang="en-US" sz="2250" b="1" dirty="0">
+              <a:rPr lang="en-US" sz="2200" b="1" dirty="0">
                 <a:solidFill>
                   <a:srgbClr val="1F6FB2"/>
                 </a:solidFill>
@@ -11390,7 +11597,7 @@
               </a:rPr>
               <a:t>2</a:t>
             </a:r>
-            <a:endParaRPr lang="en-US" sz="2250" dirty="0"/>
+            <a:endParaRPr lang="en-US" sz="2200" dirty="0"/>
           </a:p>
         </p:txBody>
       </p:sp>
@@ -11424,7 +11631,7 @@
               <a:buNone/>
             </a:pPr>
             <a:r>
-              <a:rPr lang="en-US" sz="1950" dirty="0">
+              <a:rPr lang="en-US" sz="1900" dirty="0">
                 <a:solidFill>
                   <a:srgbClr val="000000"/>
                 </a:solidFill>
@@ -11435,7 +11642,7 @@
               <a:t>Right-click </a:t>
             </a:r>
             <a:r>
-              <a:rPr lang="en-US" sz="1950" i="1" dirty="0">
+              <a:rPr lang="en-US" sz="1900" i="1" dirty="0">
                 <a:solidFill>
                   <a:srgbClr val="000000"/>
                 </a:solidFill>
@@ -11446,7 +11653,7 @@
               <a:t>Increase tip load to 750 N </a:t>
             </a:r>
             <a:r>
-              <a:rPr lang="en-US" sz="1950" dirty="0">
+              <a:rPr lang="en-US" sz="1900" dirty="0">
                 <a:solidFill>
                   <a:srgbClr val="000000"/>
                 </a:solidFill>
@@ -11457,7 +11664,7 @@
               <a:t>› </a:t>
             </a:r>
             <a:r>
-              <a:rPr lang="en-US" sz="1950" b="1" dirty="0">
+              <a:rPr lang="en-US" sz="1900" b="1" dirty="0">
                 <a:solidFill>
                   <a:srgbClr val="000000"/>
                 </a:solidFill>
@@ -11468,7 +11675,7 @@
               <a:t>Revert changes in commit </a:t>
             </a:r>
             <a:r>
-              <a:rPr lang="en-US" sz="1950" dirty="0">
+              <a:rPr lang="en-US" sz="1900" dirty="0">
                 <a:solidFill>
                   <a:srgbClr val="000000"/>
                 </a:solidFill>
@@ -11478,7 +11685,7 @@
               </a:rPr>
               <a:t>.</a:t>
             </a:r>
-            <a:endParaRPr lang="en-US" sz="1950" dirty="0"/>
+            <a:endParaRPr lang="en-US" sz="1900" dirty="0"/>
           </a:p>
         </p:txBody>
       </p:sp>
@@ -11512,7 +11719,7 @@
               <a:buNone/>
             </a:pPr>
             <a:r>
-              <a:rPr lang="en-US" sz="2250" b="1" dirty="0">
+              <a:rPr lang="en-US" sz="2200" b="1" dirty="0">
                 <a:solidFill>
                   <a:srgbClr val="1F6FB2"/>
                 </a:solidFill>
@@ -11522,7 +11729,7 @@
               </a:rPr>
               <a:t>3</a:t>
             </a:r>
-            <a:endParaRPr lang="en-US" sz="2250" dirty="0"/>
+            <a:endParaRPr lang="en-US" sz="2200" dirty="0"/>
           </a:p>
         </p:txBody>
       </p:sp>
@@ -11556,7 +11763,7 @@
               <a:buNone/>
             </a:pPr>
             <a:r>
-              <a:rPr lang="en-US" sz="1950" dirty="0">
+              <a:rPr lang="en-US" sz="1900" dirty="0">
                 <a:solidFill>
                   <a:srgbClr val="000000"/>
                 </a:solidFill>
@@ -11566,7 +11773,7 @@
               </a:rPr>
               <a:t>Check beam.m: P is back to 500. Push origin.</a:t>
             </a:r>
-            <a:endParaRPr lang="en-US" sz="1950" dirty="0"/>
+            <a:endParaRPr lang="en-US" sz="1900" dirty="0"/>
           </a:p>
         </p:txBody>
       </p:sp>
@@ -11579,7 +11786,7 @@
         <p:spPr>
           <a:xfrm>
             <a:off x="133350" y="5429250"/>
-            <a:ext cx="1442184" cy="381000"/>
+            <a:ext cx="1409700" cy="381000"/>
           </a:xfrm>
           <a:prstGeom prst="rect">
             <a:avLst/>
@@ -11665,6 +11872,30 @@
           </a:p>
         </p:txBody>
       </p:sp>
+      <p:pic>
+        <p:nvPicPr>
+          <p:cNvPr id="38" name="Screenshot placeholder" descr="Screenshot to add: GitHub Desktop History tab: right-click a commit to show Revert changes in commit"/>
+          <p:cNvPicPr>
+            <a:picLocks noChangeAspect="1"/>
+          </p:cNvPicPr>
+          <p:nvPr/>
+        </p:nvPicPr>
+        <p:blipFill>
+          <a:blip r:embed="rId3"/>
+          <a:stretch>
+            <a:fillRect/>
+          </a:stretch>
+        </p:blipFill>
+        <p:spPr>
+          <a:xfrm>
+            <a:off x="8229600" y="5349240"/>
+            <a:ext cx="5257800" cy="4023360"/>
+          </a:xfrm>
+          <a:prstGeom prst="rect">
+            <a:avLst/>
+          </a:prstGeom>
+        </p:spPr>
+      </p:pic>
     </p:spTree>
   </p:cSld>
   <p:clrMapOvr>
@@ -11739,7 +11970,7 @@
               <a:buNone/>
             </a:pPr>
             <a:r>
-              <a:rPr lang="en-US" sz="1950" b="1" dirty="0">
+              <a:rPr lang="en-US" sz="1900" b="1" dirty="0">
                 <a:solidFill>
                   <a:srgbClr val="000000"/>
                 </a:solidFill>
@@ -11749,7 +11980,7 @@
               </a:rPr>
               <a:t>README.md</a:t>
             </a:r>
-            <a:endParaRPr lang="en-US" sz="1950" dirty="0"/>
+            <a:endParaRPr lang="en-US" sz="1900" dirty="0"/>
           </a:p>
         </p:txBody>
       </p:sp>
@@ -11856,7 +12087,7 @@
               <a:buNone/>
             </a:pPr>
             <a:r>
-              <a:rPr lang="en-US" sz="1575" dirty="0">
+              <a:rPr lang="en-US" sz="1600" dirty="0">
                 <a:solidFill>
                   <a:srgbClr val="D4D4D4"/>
                 </a:solidFill>
@@ -11866,7 +12097,7 @@
               </a:rPr>
               <a:t># beam-calc</a:t>
             </a:r>
-            <a:endParaRPr lang="en-US" sz="1575" dirty="0"/>
+            <a:endParaRPr lang="en-US" sz="1600" dirty="0"/>
           </a:p>
           <a:p>
             <a:pPr marL="0" indent="0" algn="l">
@@ -11876,7 +12107,7 @@
               <a:buNone/>
             </a:pPr>
             <a:r>
-              <a:rPr lang="en-US" sz="1575" dirty="0">
+              <a:rPr lang="en-US" sz="1600" dirty="0">
                 <a:solidFill>
                   <a:srgbClr val="D4D4D4"/>
                 </a:solidFill>
@@ -11886,7 +12117,7 @@
               </a:rPr>
               <a:t>Cantilever tip deflection.</a:t>
             </a:r>
-            <a:endParaRPr lang="en-US" sz="1575" dirty="0"/>
+            <a:endParaRPr lang="en-US" sz="1600" dirty="0"/>
           </a:p>
           <a:p>
             <a:pPr marL="0" indent="0" algn="l">
@@ -11895,7 +12126,7 @@
               </a:lnSpc>
               <a:buNone/>
             </a:pPr>
-            <a:endParaRPr lang="en-US" sz="1575" dirty="0"/>
+            <a:endParaRPr lang="en-US" sz="1600" dirty="0"/>
           </a:p>
           <a:p>
             <a:pPr marL="0" indent="0" algn="l">
@@ -11905,7 +12136,7 @@
               <a:buNone/>
             </a:pPr>
             <a:r>
-              <a:rPr lang="en-US" sz="1575" dirty="0">
+              <a:rPr lang="en-US" sz="1600" dirty="0">
                 <a:solidFill>
                   <a:srgbClr val="D4D4D4"/>
                 </a:solidFill>
@@ -11915,7 +12146,7 @@
               </a:rPr>
               <a:t>## Run</a:t>
             </a:r>
-            <a:endParaRPr lang="en-US" sz="1575" dirty="0"/>
+            <a:endParaRPr lang="en-US" sz="1600" dirty="0"/>
           </a:p>
           <a:p>
             <a:pPr marL="0" indent="0" algn="l">
@@ -11925,7 +12156,7 @@
               <a:buNone/>
             </a:pPr>
             <a:r>
-              <a:rPr lang="en-US" sz="1575" dirty="0">
+              <a:rPr lang="en-US" sz="1600" dirty="0">
                 <a:solidFill>
                   <a:srgbClr val="D4D4D4"/>
                 </a:solidFill>
@@ -11935,7 +12166,7 @@
               </a:rPr>
               <a:t>In MATLAB: beam</a:t>
             </a:r>
-            <a:endParaRPr lang="en-US" sz="1575" dirty="0"/>
+            <a:endParaRPr lang="en-US" sz="1600" dirty="0"/>
           </a:p>
           <a:p>
             <a:pPr marL="0" indent="0" algn="l">
@@ -11944,7 +12175,7 @@
               </a:lnSpc>
               <a:buNone/>
             </a:pPr>
-            <a:endParaRPr lang="en-US" sz="1575" dirty="0"/>
+            <a:endParaRPr lang="en-US" sz="1600" dirty="0"/>
           </a:p>
           <a:p>
             <a:pPr marL="0" indent="0" algn="l">
@@ -11954,7 +12185,7 @@
               <a:buNone/>
             </a:pPr>
             <a:r>
-              <a:rPr lang="en-US" sz="1575" dirty="0">
+              <a:rPr lang="en-US" sz="1600" dirty="0">
                 <a:solidFill>
                   <a:srgbClr val="D4D4D4"/>
                 </a:solidFill>
@@ -11964,7 +12195,7 @@
               </a:rPr>
               <a:t>## Test</a:t>
             </a:r>
-            <a:endParaRPr lang="en-US" sz="1575" dirty="0"/>
+            <a:endParaRPr lang="en-US" sz="1600" dirty="0"/>
           </a:p>
           <a:p>
             <a:pPr marL="0" indent="0" algn="l">
@@ -11974,7 +12205,7 @@
               <a:buNone/>
             </a:pPr>
             <a:r>
-              <a:rPr lang="en-US" sz="1575" dirty="0">
+              <a:rPr lang="en-US" sz="1600" dirty="0">
                 <a:solidFill>
                   <a:srgbClr val="D4D4D4"/>
                 </a:solidFill>
@@ -11984,7 +12215,7 @@
               </a:rPr>
               <a:t>runtests('tests')</a:t>
             </a:r>
-            <a:endParaRPr lang="en-US" sz="1575" dirty="0"/>
+            <a:endParaRPr lang="en-US" sz="1600" dirty="0"/>
           </a:p>
           <a:p>
             <a:pPr marL="0" indent="0" algn="l">
@@ -11993,7 +12224,7 @@
               </a:lnSpc>
               <a:buNone/>
             </a:pPr>
-            <a:endParaRPr lang="en-US" sz="1575" dirty="0"/>
+            <a:endParaRPr lang="en-US" sz="1600" dirty="0"/>
           </a:p>
           <a:p>
             <a:pPr marL="0" indent="0" algn="l">
@@ -12003,7 +12234,7 @@
               <a:buNone/>
             </a:pPr>
             <a:r>
-              <a:rPr lang="en-US" sz="1575" dirty="0">
+              <a:rPr lang="en-US" sz="1600" dirty="0">
                 <a:solidFill>
                   <a:srgbClr val="D4D4D4"/>
                 </a:solidFill>
@@ -12013,7 +12244,7 @@
               </a:rPr>
               <a:t>Units: SI throughout.</a:t>
             </a:r>
-            <a:endParaRPr lang="en-US" sz="1575" dirty="0"/>
+            <a:endParaRPr lang="en-US" sz="1600" dirty="0"/>
           </a:p>
         </p:txBody>
       </p:sp>
@@ -12044,7 +12275,7 @@
               <a:buNone/>
             </a:pPr>
             <a:r>
-              <a:rPr lang="en-US" sz="1950" b="1" dirty="0">
+              <a:rPr lang="en-US" sz="1900" b="1" dirty="0">
                 <a:solidFill>
                   <a:srgbClr val="000000"/>
                 </a:solidFill>
@@ -12054,7 +12285,7 @@
               </a:rPr>
               <a:t>.gitignore</a:t>
             </a:r>
-            <a:endParaRPr lang="en-US" sz="1950" dirty="0"/>
+            <a:endParaRPr lang="en-US" sz="1900" dirty="0"/>
           </a:p>
         </p:txBody>
       </p:sp>
@@ -12161,7 +12392,7 @@
               <a:buNone/>
             </a:pPr>
             <a:r>
-              <a:rPr lang="en-US" sz="1575" dirty="0">
+              <a:rPr lang="en-US" sz="1600" dirty="0">
                 <a:solidFill>
                   <a:srgbClr val="6A9955"/>
                 </a:solidFill>
@@ -12171,7 +12402,7 @@
               </a:rPr>
               <a:t># MATLAB</a:t>
             </a:r>
-            <a:endParaRPr lang="en-US" sz="1575" dirty="0"/>
+            <a:endParaRPr lang="en-US" sz="1600" dirty="0"/>
           </a:p>
           <a:p>
             <a:pPr marL="0" indent="0" algn="l">
@@ -12181,7 +12412,7 @@
               <a:buNone/>
             </a:pPr>
             <a:r>
-              <a:rPr lang="en-US" sz="1575" dirty="0">
+              <a:rPr lang="en-US" sz="1600" dirty="0">
                 <a:solidFill>
                   <a:srgbClr val="D4D4D4"/>
                 </a:solidFill>
@@ -12194,7 +12425,7 @@
               </a:rPr>
               <a:t>*.asv</a:t>
             </a:r>
-            <a:endParaRPr lang="en-US" sz="1575" dirty="0"/>
+            <a:endParaRPr lang="en-US" sz="1600" dirty="0"/>
           </a:p>
           <a:p>
             <a:pPr marL="0" indent="0" algn="l">
@@ -12204,7 +12435,7 @@
               <a:buNone/>
             </a:pPr>
             <a:r>
-              <a:rPr lang="en-US" sz="1575" dirty="0">
+              <a:rPr lang="en-US" sz="1600" dirty="0">
                 <a:solidFill>
                   <a:srgbClr val="D4D4D4"/>
                 </a:solidFill>
@@ -12217,7 +12448,7 @@
               </a:rPr>
               <a:t>*.mex*</a:t>
             </a:r>
-            <a:endParaRPr lang="en-US" sz="1575" dirty="0"/>
+            <a:endParaRPr lang="en-US" sz="1600" dirty="0"/>
           </a:p>
           <a:p>
             <a:pPr marL="0" indent="0" algn="l">
@@ -12227,7 +12458,7 @@
               <a:buNone/>
             </a:pPr>
             <a:r>
-              <a:rPr lang="en-US" sz="1575" dirty="0">
+              <a:rPr lang="en-US" sz="1600" dirty="0">
                 <a:solidFill>
                   <a:srgbClr val="D4D4D4"/>
                 </a:solidFill>
@@ -12240,7 +12471,7 @@
               </a:rPr>
               <a:t>slprj/</a:t>
             </a:r>
-            <a:endParaRPr lang="en-US" sz="1575" dirty="0"/>
+            <a:endParaRPr lang="en-US" sz="1600" dirty="0"/>
           </a:p>
           <a:p>
             <a:pPr marL="0" indent="0" algn="l">
@@ -12250,7 +12481,7 @@
               <a:buNone/>
             </a:pPr>
             <a:r>
-              <a:rPr lang="en-US" sz="1575" dirty="0">
+              <a:rPr lang="en-US" sz="1600" dirty="0">
                 <a:solidFill>
                   <a:srgbClr val="D4D4D4"/>
                 </a:solidFill>
@@ -12263,7 +12494,7 @@
               </a:rPr>
               <a:t>codegen/ </a:t>
             </a:r>
-            <a:endParaRPr lang="en-US" sz="1575" dirty="0"/>
+            <a:endParaRPr lang="en-US" sz="1600" dirty="0"/>
           </a:p>
           <a:p>
             <a:pPr marL="0" indent="0" algn="l">
@@ -12273,7 +12504,7 @@
               <a:buNone/>
             </a:pPr>
             <a:r>
-              <a:rPr lang="en-US" sz="1575" dirty="0">
+              <a:rPr lang="en-US" sz="1600" dirty="0">
                 <a:solidFill>
                   <a:srgbClr val="6A9955"/>
                 </a:solidFill>
@@ -12283,7 +12514,7 @@
               </a:rPr>
               <a:t># Outputs and data</a:t>
             </a:r>
-            <a:endParaRPr lang="en-US" sz="1575" dirty="0"/>
+            <a:endParaRPr lang="en-US" sz="1600" dirty="0"/>
           </a:p>
           <a:p>
             <a:pPr marL="0" indent="0" algn="l">
@@ -12293,7 +12524,7 @@
               <a:buNone/>
             </a:pPr>
             <a:r>
-              <a:rPr lang="en-US" sz="1575" dirty="0">
+              <a:rPr lang="en-US" sz="1600" dirty="0">
                 <a:solidFill>
                   <a:srgbClr val="D4D4D4"/>
                 </a:solidFill>
@@ -12306,7 +12537,7 @@
               </a:rPr>
               <a:t>results/</a:t>
             </a:r>
-            <a:endParaRPr lang="en-US" sz="1575" dirty="0"/>
+            <a:endParaRPr lang="en-US" sz="1600" dirty="0"/>
           </a:p>
           <a:p>
             <a:pPr marL="0" indent="0" algn="l">
@@ -12316,7 +12547,7 @@
               <a:buNone/>
             </a:pPr>
             <a:r>
-              <a:rPr lang="en-US" sz="1575" dirty="0">
+              <a:rPr lang="en-US" sz="1600" dirty="0">
                 <a:solidFill>
                   <a:srgbClr val="D4D4D4"/>
                 </a:solidFill>
@@ -12329,7 +12560,7 @@
               </a:rPr>
               <a:t>data/raw/ </a:t>
             </a:r>
-            <a:endParaRPr lang="en-US" sz="1575" dirty="0"/>
+            <a:endParaRPr lang="en-US" sz="1600" dirty="0"/>
           </a:p>
           <a:p>
             <a:pPr marL="0" indent="0" algn="l">
@@ -12339,7 +12570,7 @@
               <a:buNone/>
             </a:pPr>
             <a:r>
-              <a:rPr lang="en-US" sz="1575" dirty="0">
+              <a:rPr lang="en-US" sz="1600" dirty="0">
                 <a:solidFill>
                   <a:srgbClr val="6A9955"/>
                 </a:solidFill>
@@ -12349,7 +12580,7 @@
               </a:rPr>
               <a:t># Secrets</a:t>
             </a:r>
-            <a:endParaRPr lang="en-US" sz="1575" dirty="0"/>
+            <a:endParaRPr lang="en-US" sz="1600" dirty="0"/>
           </a:p>
           <a:p>
             <a:pPr marL="0" indent="0" algn="l">
@@ -12359,7 +12590,7 @@
               <a:buNone/>
             </a:pPr>
             <a:r>
-              <a:rPr lang="en-US" sz="1575" dirty="0">
+              <a:rPr lang="en-US" sz="1600" dirty="0">
                 <a:solidFill>
                   <a:srgbClr val="D4D4D4"/>
                 </a:solidFill>
@@ -12372,7 +12603,7 @@
               </a:rPr>
               <a:t>.env</a:t>
             </a:r>
-            <a:endParaRPr lang="en-US" sz="1575" dirty="0"/>
+            <a:endParaRPr lang="en-US" sz="1600" dirty="0"/>
           </a:p>
         </p:txBody>
       </p:sp>
@@ -12385,7 +12616,7 @@
         <p:spPr>
           <a:xfrm>
             <a:off x="9721850" y="1571625"/>
-            <a:ext cx="4142105" cy="323850"/>
+            <a:ext cx="3856990" cy="323850"/>
           </a:xfrm>
           <a:prstGeom prst="rect">
             <a:avLst/>
@@ -12403,7 +12634,7 @@
               <a:buNone/>
             </a:pPr>
             <a:r>
-              <a:rPr lang="en-US" sz="1950" b="1" dirty="0">
+              <a:rPr lang="en-US" sz="1900" b="1" dirty="0">
                 <a:solidFill>
                   <a:srgbClr val="000000"/>
                 </a:solidFill>
@@ -12413,7 +12644,7 @@
               </a:rPr>
               <a:t>AGENTS.md</a:t>
             </a:r>
-            <a:endParaRPr lang="en-US" sz="1950" dirty="0"/>
+            <a:endParaRPr lang="en-US" sz="1900" dirty="0"/>
           </a:p>
         </p:txBody>
       </p:sp>
@@ -12426,7 +12657,7 @@
         <p:spPr>
           <a:xfrm>
             <a:off x="9721850" y="1990725"/>
-            <a:ext cx="3878517" cy="963811"/>
+            <a:ext cx="3856990" cy="963811"/>
           </a:xfrm>
           <a:prstGeom prst="rect">
             <a:avLst/>
@@ -12520,7 +12751,7 @@
               <a:buNone/>
             </a:pPr>
             <a:r>
-              <a:rPr lang="en-US" sz="1575" dirty="0">
+              <a:rPr lang="en-US" sz="1600" dirty="0">
                 <a:solidFill>
                   <a:srgbClr val="D4D4D4"/>
                 </a:solidFill>
@@ -12530,7 +12761,7 @@
               </a:rPr>
               <a:t># AGENTS.md</a:t>
             </a:r>
-            <a:endParaRPr lang="en-US" sz="1575" dirty="0"/>
+            <a:endParaRPr lang="en-US" sz="1600" dirty="0"/>
           </a:p>
           <a:p>
             <a:pPr marL="0" indent="0" algn="l">
@@ -12540,7 +12771,7 @@
               <a:buNone/>
             </a:pPr>
             <a:r>
-              <a:rPr lang="en-US" sz="1575" dirty="0">
+              <a:rPr lang="en-US" sz="1600" dirty="0">
                 <a:solidFill>
                   <a:srgbClr val="D4D4D4"/>
                 </a:solidFill>
@@ -12550,7 +12781,7 @@
               </a:rPr>
               <a:t>## Project</a:t>
             </a:r>
-            <a:endParaRPr lang="en-US" sz="1575" dirty="0"/>
+            <a:endParaRPr lang="en-US" sz="1600" dirty="0"/>
           </a:p>
           <a:p>
             <a:pPr marL="0" indent="0" algn="l">
@@ -12560,7 +12791,7 @@
               <a:buNone/>
             </a:pPr>
             <a:r>
-              <a:rPr lang="en-US" sz="1575" dirty="0">
+              <a:rPr lang="en-US" sz="1600" dirty="0">
                 <a:solidFill>
                   <a:srgbClr val="D4D4D4"/>
                 </a:solidFill>
@@ -12570,7 +12801,7 @@
               </a:rPr>
               <a:t>MATLAB R2024b,</a:t>
             </a:r>
-            <a:endParaRPr lang="en-US" sz="1575" dirty="0"/>
+            <a:endParaRPr lang="en-US" sz="1600" dirty="0"/>
           </a:p>
           <a:p>
             <a:pPr marL="0" indent="0" algn="l">
@@ -12580,7 +12811,7 @@
               <a:buNone/>
             </a:pPr>
             <a:r>
-              <a:rPr lang="en-US" sz="1575" dirty="0">
+              <a:rPr lang="en-US" sz="1600" dirty="0">
                 <a:solidFill>
                   <a:srgbClr val="D4D4D4"/>
                 </a:solidFill>
@@ -12590,7 +12821,7 @@
               </a:rPr>
               <a:t>no extra toolboxes.</a:t>
             </a:r>
-            <a:endParaRPr lang="en-US" sz="1575" dirty="0"/>
+            <a:endParaRPr lang="en-US" sz="1600" dirty="0"/>
           </a:p>
           <a:p>
             <a:pPr marL="0" indent="0" algn="l">
@@ -12599,7 +12830,7 @@
               </a:lnSpc>
               <a:buNone/>
             </a:pPr>
-            <a:endParaRPr lang="en-US" sz="1575" dirty="0"/>
+            <a:endParaRPr lang="en-US" sz="1600" dirty="0"/>
           </a:p>
           <a:p>
             <a:pPr marL="0" indent="0" algn="l">
@@ -12609,7 +12840,7 @@
               <a:buNone/>
             </a:pPr>
             <a:r>
-              <a:rPr lang="en-US" sz="1575" dirty="0">
+              <a:rPr lang="en-US" sz="1600" dirty="0">
                 <a:solidFill>
                   <a:srgbClr val="D4D4D4"/>
                 </a:solidFill>
@@ -12619,7 +12850,7 @@
               </a:rPr>
               <a:t>## Conventions</a:t>
             </a:r>
-            <a:endParaRPr lang="en-US" sz="1575" dirty="0"/>
+            <a:endParaRPr lang="en-US" sz="1600" dirty="0"/>
           </a:p>
           <a:p>
             <a:pPr marL="0" indent="0" algn="l">
@@ -12629,7 +12860,7 @@
               <a:buNone/>
             </a:pPr>
             <a:r>
-              <a:rPr lang="en-US" sz="1575" dirty="0">
+              <a:rPr lang="en-US" sz="1600" dirty="0">
                 <a:solidFill>
                   <a:srgbClr val="D4D4D4"/>
                 </a:solidFill>
@@ -12639,7 +12870,7 @@
               </a:rPr>
               <a:t>- SI units; comment</a:t>
             </a:r>
-            <a:endParaRPr lang="en-US" sz="1575" dirty="0"/>
+            <a:endParaRPr lang="en-US" sz="1600" dirty="0"/>
           </a:p>
           <a:p>
             <a:pPr marL="0" indent="0" algn="l">
@@ -12649,7 +12880,7 @@
               <a:buNone/>
             </a:pPr>
             <a:r>
-              <a:rPr lang="en-US" sz="1575" dirty="0">
+              <a:rPr lang="en-US" sz="1600" dirty="0">
                 <a:solidFill>
                   <a:srgbClr val="D4D4D4"/>
                 </a:solidFill>
@@ -12659,7 +12890,7 @@
               </a:rPr>
               <a:t>  units on every constant.</a:t>
             </a:r>
-            <a:endParaRPr lang="en-US" sz="1575" dirty="0"/>
+            <a:endParaRPr lang="en-US" sz="1600" dirty="0"/>
           </a:p>
           <a:p>
             <a:pPr marL="0" indent="0" algn="l">
@@ -12668,7 +12899,7 @@
               </a:lnSpc>
               <a:buNone/>
             </a:pPr>
-            <a:endParaRPr lang="en-US" sz="1575" dirty="0"/>
+            <a:endParaRPr lang="en-US" sz="1600" dirty="0"/>
           </a:p>
           <a:p>
             <a:pPr marL="0" indent="0" algn="l">
@@ -12678,7 +12909,7 @@
               <a:buNone/>
             </a:pPr>
             <a:r>
-              <a:rPr lang="en-US" sz="1575" dirty="0">
+              <a:rPr lang="en-US" sz="1600" dirty="0">
                 <a:solidFill>
                   <a:srgbClr val="D4D4D4"/>
                 </a:solidFill>
@@ -12688,7 +12919,7 @@
               </a:rPr>
               <a:t>## Before committing</a:t>
             </a:r>
-            <a:endParaRPr lang="en-US" sz="1575" dirty="0"/>
+            <a:endParaRPr lang="en-US" sz="1600" dirty="0"/>
           </a:p>
           <a:p>
             <a:pPr marL="0" indent="0" algn="l">
@@ -12698,7 +12929,7 @@
               <a:buNone/>
             </a:pPr>
             <a:r>
-              <a:rPr lang="en-US" sz="1575" dirty="0">
+              <a:rPr lang="en-US" sz="1600" dirty="0">
                 <a:solidFill>
                   <a:srgbClr val="D4D4D4"/>
                 </a:solidFill>
@@ -12708,7 +12939,7 @@
               </a:rPr>
               <a:t>- Run runtests('tests')</a:t>
             </a:r>
-            <a:endParaRPr lang="en-US" sz="1575" dirty="0"/>
+            <a:endParaRPr lang="en-US" sz="1600" dirty="0"/>
           </a:p>
         </p:txBody>
       </p:sp>
@@ -12721,7 +12952,7 @@
         <p:spPr>
           <a:xfrm>
             <a:off x="133350" y="5810250"/>
-            <a:ext cx="1442184" cy="381000"/>
+            <a:ext cx="1409700" cy="381000"/>
           </a:xfrm>
           <a:prstGeom prst="rect">
             <a:avLst/>
@@ -12952,7 +13183,7 @@
               <a:buNone/>
             </a:pPr>
             <a:r>
-              <a:rPr lang="en-US" sz="1875" dirty="0">
+              <a:rPr lang="en-US" sz="1900" dirty="0">
                 <a:solidFill>
                   <a:srgbClr val="000000"/>
                 </a:solidFill>
@@ -12962,7 +13193,7 @@
               </a:rPr>
               <a:t>Anyone on the internet can view and copy it.</a:t>
             </a:r>
-            <a:endParaRPr lang="en-US" sz="1875" dirty="0"/>
+            <a:endParaRPr lang="en-US" sz="1900" dirty="0"/>
           </a:p>
         </p:txBody>
       </p:sp>
@@ -13002,7 +13233,7 @@
         <p:spPr>
           <a:xfrm>
             <a:off x="7972425" y="1847850"/>
-            <a:ext cx="5815013" cy="393700"/>
+            <a:ext cx="5606415" cy="393700"/>
           </a:xfrm>
           <a:prstGeom prst="rect">
             <a:avLst/>
@@ -13043,7 +13274,7 @@
         <p:spPr>
           <a:xfrm>
             <a:off x="7972425" y="2298700"/>
-            <a:ext cx="5815013" cy="371475"/>
+            <a:ext cx="5606415" cy="371475"/>
           </a:xfrm>
           <a:prstGeom prst="rect">
             <a:avLst/>
@@ -13064,7 +13295,7 @@
               <a:buNone/>
             </a:pPr>
             <a:r>
-              <a:rPr lang="en-US" sz="1875" dirty="0">
+              <a:rPr lang="en-US" sz="1900" dirty="0">
                 <a:solidFill>
                   <a:srgbClr val="FFFFFF"/>
                 </a:solidFill>
@@ -13074,7 +13305,7 @@
               </a:rPr>
               <a:t>Only you and people you invite.</a:t>
             </a:r>
-            <a:endParaRPr lang="en-US" sz="1875" dirty="0"/>
+            <a:endParaRPr lang="en-US" sz="1900" dirty="0"/>
           </a:p>
         </p:txBody>
       </p:sp>
@@ -13176,7 +13407,7 @@
               <a:buNone/>
             </a:pPr>
             <a:r>
-              <a:rPr lang="en-US" sz="1950" dirty="0">
+              <a:rPr lang="en-US" sz="1900" dirty="0">
                 <a:solidFill>
                   <a:srgbClr val="000000"/>
                 </a:solidFill>
@@ -13186,7 +13417,7 @@
               </a:rPr>
               <a:t>Passwords, API keys, tokens</a:t>
             </a:r>
-            <a:endParaRPr lang="en-US" sz="1950" dirty="0"/>
+            <a:endParaRPr lang="en-US" sz="1900" dirty="0"/>
           </a:p>
         </p:txBody>
       </p:sp>
@@ -13247,7 +13478,7 @@
               <a:buNone/>
             </a:pPr>
             <a:r>
-              <a:rPr lang="en-US" sz="1950" dirty="0">
+              <a:rPr lang="en-US" sz="1900" dirty="0">
                 <a:solidFill>
                   <a:srgbClr val="000000"/>
                 </a:solidFill>
@@ -13257,7 +13488,7 @@
               </a:rPr>
               <a:t>Student records, grades, PII</a:t>
             </a:r>
-            <a:endParaRPr lang="en-US" sz="1950" dirty="0"/>
+            <a:endParaRPr lang="en-US" sz="1900" dirty="0"/>
           </a:p>
         </p:txBody>
       </p:sp>
@@ -13318,7 +13549,7 @@
               <a:buNone/>
             </a:pPr>
             <a:r>
-              <a:rPr lang="en-US" sz="1950" dirty="0">
+              <a:rPr lang="en-US" sz="1900" dirty="0">
                 <a:solidFill>
                   <a:srgbClr val="000000"/>
                 </a:solidFill>
@@ -13328,7 +13559,7 @@
               </a:rPr>
               <a:t>CUI or export-controlled data</a:t>
             </a:r>
-            <a:endParaRPr lang="en-US" sz="1950" dirty="0"/>
+            <a:endParaRPr lang="en-US" sz="1900" dirty="0"/>
           </a:p>
         </p:txBody>
       </p:sp>
@@ -13389,7 +13620,7 @@
               <a:buNone/>
             </a:pPr>
             <a:r>
-              <a:rPr lang="en-US" sz="1950" dirty="0">
+              <a:rPr lang="en-US" sz="1900" dirty="0">
                 <a:solidFill>
                   <a:srgbClr val="000000"/>
                 </a:solidFill>
@@ -13399,7 +13630,7 @@
               </a:rPr>
               <a:t>Anything not cleared for release</a:t>
             </a:r>
-            <a:endParaRPr lang="en-US" sz="1950" dirty="0"/>
+            <a:endParaRPr lang="en-US" sz="1900" dirty="0"/>
           </a:p>
         </p:txBody>
       </p:sp>
@@ -13412,7 +13643,7 @@
         <p:spPr>
           <a:xfrm>
             <a:off x="7839075" y="3146425"/>
-            <a:ext cx="6213158" cy="393700"/>
+            <a:ext cx="5739765" cy="393700"/>
           </a:xfrm>
           <a:prstGeom prst="rect">
             <a:avLst/>
@@ -13480,7 +13711,7 @@
         <p:spPr>
           <a:xfrm>
             <a:off x="8086725" y="3635375"/>
-            <a:ext cx="5562695" cy="706636"/>
+            <a:ext cx="5492115" cy="706636"/>
           </a:xfrm>
           <a:prstGeom prst="rect">
             <a:avLst/>
@@ -13501,7 +13732,7 @@
               <a:buNone/>
             </a:pPr>
             <a:r>
-              <a:rPr lang="en-US" sz="1950" dirty="0">
+              <a:rPr lang="en-US" sz="1900" dirty="0">
                 <a:solidFill>
                   <a:srgbClr val="000000"/>
                 </a:solidFill>
@@ -13511,7 +13742,7 @@
               </a:rPr>
               <a:t>History is permanent. Deleting a file later doesn’t remove it from past commits.</a:t>
             </a:r>
-            <a:endParaRPr lang="en-US" sz="1950" dirty="0"/>
+            <a:endParaRPr lang="en-US" sz="1900" dirty="0"/>
           </a:p>
         </p:txBody>
       </p:sp>
@@ -13572,7 +13803,7 @@
               <a:buNone/>
             </a:pPr>
             <a:r>
-              <a:rPr lang="en-US" sz="1950" dirty="0">
+              <a:rPr lang="en-US" sz="1900" dirty="0">
                 <a:solidFill>
                   <a:srgbClr val="000000"/>
                 </a:solidFill>
@@ -13582,7 +13813,7 @@
               </a:rPr>
               <a:t>Pushed a secret? Rotate it immediately.</a:t>
             </a:r>
-            <a:endParaRPr lang="en-US" sz="1950" dirty="0"/>
+            <a:endParaRPr lang="en-US" sz="1900" dirty="0"/>
           </a:p>
         </p:txBody>
       </p:sp>
@@ -13622,7 +13853,7 @@
         <p:spPr>
           <a:xfrm>
             <a:off x="8086725" y="4866779"/>
-            <a:ext cx="5562695" cy="706636"/>
+            <a:ext cx="5492115" cy="706636"/>
           </a:xfrm>
           <a:prstGeom prst="rect">
             <a:avLst/>
@@ -13643,7 +13874,7 @@
               <a:buNone/>
             </a:pPr>
             <a:r>
-              <a:rPr lang="en-US" sz="1950" dirty="0">
+              <a:rPr lang="en-US" sz="1900" dirty="0">
                 <a:solidFill>
                   <a:srgbClr val="000000"/>
                 </a:solidFill>
@@ -13653,7 +13884,7 @@
               </a:rPr>
               <a:t>Connecting a repo to an agent sends its contents to that service.</a:t>
             </a:r>
-            <a:endParaRPr lang="en-US" sz="1950" dirty="0"/>
+            <a:endParaRPr lang="en-US" sz="1900" dirty="0"/>
           </a:p>
         </p:txBody>
       </p:sp>
@@ -13693,7 +13924,7 @@
         <p:spPr>
           <a:xfrm>
             <a:off x="1809750" y="6049665"/>
-            <a:ext cx="12027980" cy="384770"/>
+            <a:ext cx="11769090" cy="384770"/>
           </a:xfrm>
           <a:prstGeom prst="rect">
             <a:avLst/>
@@ -13714,7 +13945,7 @@
               <a:buNone/>
             </a:pPr>
             <a:r>
-              <a:rPr lang="en-US" sz="1950" dirty="0">
+              <a:rPr lang="en-US" sz="1900" dirty="0">
                 <a:solidFill>
                   <a:srgbClr val="000000"/>
                 </a:solidFill>
@@ -13724,7 +13955,7 @@
               </a:rPr>
               <a:t>Follow current USAFA guidance on GenAI tools and data handling. Private is not the same as approved.</a:t>
             </a:r>
-            <a:endParaRPr lang="en-US" sz="1950" dirty="0"/>
+            <a:endParaRPr lang="en-US" sz="1900" dirty="0"/>
           </a:p>
         </p:txBody>
       </p:sp>
@@ -13737,7 +13968,7 @@
         <p:spPr>
           <a:xfrm>
             <a:off x="133350" y="5810250"/>
-            <a:ext cx="1442184" cy="381000"/>
+            <a:ext cx="1409700" cy="381000"/>
           </a:xfrm>
           <a:prstGeom prst="rect">
             <a:avLst/>
@@ -13949,7 +14180,7 @@
         <p:spPr>
           <a:xfrm>
             <a:off x="1809750" y="2133600"/>
-            <a:ext cx="12845415" cy="411460"/>
+            <a:ext cx="11769090" cy="411460"/>
           </a:xfrm>
           <a:prstGeom prst="rect">
             <a:avLst/>
@@ -14014,7 +14245,7 @@
               <a:buNone/>
             </a:pPr>
             <a:r>
-              <a:rPr lang="en-US" sz="2250" b="1" dirty="0">
+              <a:rPr lang="en-US" sz="2200" b="1" dirty="0">
                 <a:solidFill>
                   <a:srgbClr val="1F6FB2"/>
                 </a:solidFill>
@@ -14024,7 +14255,7 @@
               </a:rPr>
               <a:t>1</a:t>
             </a:r>
-            <a:endParaRPr lang="en-US" sz="2250" dirty="0"/>
+            <a:endParaRPr lang="en-US" sz="2200" dirty="0"/>
           </a:p>
         </p:txBody>
       </p:sp>
@@ -14037,7 +14268,7 @@
         <p:spPr>
           <a:xfrm>
             <a:off x="2343150" y="2735560"/>
-            <a:ext cx="11478578" cy="732433"/>
+            <a:ext cx="11235690" cy="732433"/>
           </a:xfrm>
           <a:prstGeom prst="rect">
             <a:avLst/>
@@ -14058,7 +14289,7 @@
               <a:buNone/>
             </a:pPr>
             <a:r>
-              <a:rPr lang="en-US" sz="2025" dirty="0">
+              <a:rPr lang="en-US" sz="2000" dirty="0">
                 <a:solidFill>
                   <a:srgbClr val="000000"/>
                 </a:solidFill>
@@ -14069,7 +14300,7 @@
               <a:t>File › </a:t>
             </a:r>
             <a:r>
-              <a:rPr lang="en-US" sz="2025" b="1" dirty="0">
+              <a:rPr lang="en-US" sz="2000" b="1" dirty="0">
                 <a:solidFill>
                   <a:srgbClr val="000000"/>
                 </a:solidFill>
@@ -14080,7 +14311,7 @@
               <a:t>Add local repository </a:t>
             </a:r>
             <a:r>
-              <a:rPr lang="en-US" sz="2025" dirty="0">
+              <a:rPr lang="en-US" sz="2000" dirty="0">
                 <a:solidFill>
                   <a:srgbClr val="000000"/>
                 </a:solidFill>
@@ -14091,7 +14322,7 @@
               <a:t>› select the folder. Desktop says it isn’t a repo yet; click </a:t>
             </a:r>
             <a:r>
-              <a:rPr lang="en-US" sz="2025" b="1" dirty="0">
+              <a:rPr lang="en-US" sz="2000" b="1" dirty="0">
                 <a:solidFill>
                   <a:srgbClr val="000000"/>
                 </a:solidFill>
@@ -14102,7 +14333,7 @@
               <a:t>create a repository </a:t>
             </a:r>
             <a:r>
-              <a:rPr lang="en-US" sz="2025" dirty="0">
+              <a:rPr lang="en-US" sz="2000" dirty="0">
                 <a:solidFill>
                   <a:srgbClr val="000000"/>
                 </a:solidFill>
@@ -14112,7 +14343,7 @@
               </a:rPr>
               <a:t>.</a:t>
             </a:r>
-            <a:endParaRPr lang="en-US" sz="2025" dirty="0"/>
+            <a:endParaRPr lang="en-US" sz="2000" dirty="0"/>
           </a:p>
         </p:txBody>
       </p:sp>
@@ -14146,7 +14377,7 @@
               <a:buNone/>
             </a:pPr>
             <a:r>
-              <a:rPr lang="en-US" sz="2250" b="1" dirty="0">
+              <a:rPr lang="en-US" sz="2200" b="1" dirty="0">
                 <a:solidFill>
                   <a:srgbClr val="1F6FB2"/>
                 </a:solidFill>
@@ -14156,7 +14387,7 @@
               </a:rPr>
               <a:t>2</a:t>
             </a:r>
-            <a:endParaRPr lang="en-US" sz="2250" dirty="0"/>
+            <a:endParaRPr lang="en-US" sz="2200" dirty="0"/>
           </a:p>
         </p:txBody>
       </p:sp>
@@ -14169,7 +14400,7 @@
         <p:spPr>
           <a:xfrm>
             <a:off x="2343150" y="3497915"/>
-            <a:ext cx="12258675" cy="423863"/>
+            <a:ext cx="11235690" cy="777240"/>
           </a:xfrm>
           <a:prstGeom prst="rect">
             <a:avLst/>
@@ -14190,7 +14421,7 @@
               <a:buNone/>
             </a:pPr>
             <a:r>
-              <a:rPr lang="en-US" sz="2025" dirty="0">
+              <a:rPr lang="en-US" sz="2000" dirty="0">
                 <a:solidFill>
                   <a:srgbClr val="000000"/>
                 </a:solidFill>
@@ -14201,7 +14432,7 @@
               <a:t>Set </a:t>
             </a:r>
             <a:r>
-              <a:rPr lang="en-US" sz="2025" b="1" dirty="0">
+              <a:rPr lang="en-US" sz="2000" b="1" dirty="0">
                 <a:solidFill>
                   <a:srgbClr val="000000"/>
                 </a:solidFill>
@@ -14212,18 +14443,18 @@
               <a:t>Git ignore </a:t>
             </a:r>
             <a:r>
-              <a:rPr lang="en-US" sz="2025" dirty="0">
-                <a:solidFill>
-                  <a:srgbClr val="000000"/>
-                </a:solidFill>
-                <a:latin typeface="+mn-lt"/>
-                <a:ea typeface="+mn-ea"/>
-                <a:cs typeface="+mn-cs"/>
-              </a:rPr>
-              <a:t>to your language (e.g. MATLAB). Leave the rest as default. Click </a:t>
-            </a:r>
-            <a:r>
-              <a:rPr lang="en-US" sz="2025" b="1" dirty="0">
+              <a:rPr lang="en-US" sz="2000" dirty="0">
+                <a:solidFill>
+                  <a:srgbClr val="000000"/>
+                </a:solidFill>
+                <a:latin typeface="+mn-lt"/>
+                <a:ea typeface="+mn-ea"/>
+                <a:cs typeface="+mn-cs"/>
+              </a:rPr>
+              <a:t>to your language (e.g. MATLAB). This adds a .gitignore that keeps files MATLAB generates (autosaves, build output) out of every commit. Leave the rest as default. Click </a:t>
+            </a:r>
+            <a:r>
+              <a:rPr lang="en-US" sz="2000" b="1" dirty="0">
                 <a:solidFill>
                   <a:srgbClr val="000000"/>
                 </a:solidFill>
@@ -14234,7 +14465,7 @@
               <a:t>Create repository</a:t>
             </a:r>
             <a:r>
-              <a:rPr lang="en-US" sz="2025" dirty="0">
+              <a:rPr lang="en-US" sz="2000" dirty="0">
                 <a:solidFill>
                   <a:srgbClr val="000000"/>
                 </a:solidFill>
@@ -14244,7 +14475,7 @@
               </a:rPr>
               <a:t>.</a:t>
             </a:r>
-            <a:endParaRPr lang="en-US" sz="2025" dirty="0"/>
+            <a:endParaRPr lang="en-US" sz="2000" dirty="0"/>
           </a:p>
         </p:txBody>
       </p:sp>
@@ -14256,7 +14487,7 @@
         </p:nvSpPr>
         <p:spPr>
           <a:xfrm>
-            <a:off x="1809750" y="4112277"/>
+            <a:off x="1809750" y="4523757"/>
             <a:ext cx="609600" cy="732433"/>
           </a:xfrm>
           <a:prstGeom prst="rect">
@@ -14278,7 +14509,7 @@
               <a:buNone/>
             </a:pPr>
             <a:r>
-              <a:rPr lang="en-US" sz="2250" b="1" dirty="0">
+              <a:rPr lang="en-US" sz="2200" b="1" dirty="0">
                 <a:solidFill>
                   <a:srgbClr val="1F6FB2"/>
                 </a:solidFill>
@@ -14288,7 +14519,7 @@
               </a:rPr>
               <a:t>3</a:t>
             </a:r>
-            <a:endParaRPr lang="en-US" sz="2250" dirty="0"/>
+            <a:endParaRPr lang="en-US" sz="2200" dirty="0"/>
           </a:p>
         </p:txBody>
       </p:sp>
@@ -14300,8 +14531,8 @@
         </p:nvSpPr>
         <p:spPr>
           <a:xfrm>
-            <a:off x="2343150" y="4112277"/>
-            <a:ext cx="11478578" cy="732433"/>
+            <a:off x="2343150" y="4523757"/>
+            <a:ext cx="11235690" cy="732433"/>
           </a:xfrm>
           <a:prstGeom prst="rect">
             <a:avLst/>
@@ -14322,7 +14553,7 @@
               <a:buNone/>
             </a:pPr>
             <a:r>
-              <a:rPr lang="en-US" sz="2025" dirty="0">
+              <a:rPr lang="en-US" sz="2000" dirty="0">
                 <a:solidFill>
                   <a:srgbClr val="000000"/>
                 </a:solidFill>
@@ -14332,7 +14563,7 @@
               </a:rPr>
               <a:t>Desktop makes the first commit. Check the Changes tab for files that shouldn’t be there (data, outputs, passwords).</a:t>
             </a:r>
-            <a:endParaRPr lang="en-US" sz="2025" dirty="0"/>
+            <a:endParaRPr lang="en-US" sz="2000" dirty="0"/>
           </a:p>
         </p:txBody>
       </p:sp>
@@ -14344,7 +14575,7 @@
         </p:nvSpPr>
         <p:spPr>
           <a:xfrm>
-            <a:off x="1809750" y="5035211"/>
+            <a:off x="1809750" y="5446691"/>
             <a:ext cx="609600" cy="423863"/>
           </a:xfrm>
           <a:prstGeom prst="rect">
@@ -14366,7 +14597,7 @@
               <a:buNone/>
             </a:pPr>
             <a:r>
-              <a:rPr lang="en-US" sz="2250" b="1" dirty="0">
+              <a:rPr lang="en-US" sz="2200" b="1" dirty="0">
                 <a:solidFill>
                   <a:srgbClr val="1F6FB2"/>
                 </a:solidFill>
@@ -14376,7 +14607,7 @@
               </a:rPr>
               <a:t>4</a:t>
             </a:r>
-            <a:endParaRPr lang="en-US" sz="2250" dirty="0"/>
+            <a:endParaRPr lang="en-US" sz="2200" dirty="0"/>
           </a:p>
         </p:txBody>
       </p:sp>
@@ -14388,8 +14619,8 @@
         </p:nvSpPr>
         <p:spPr>
           <a:xfrm>
-            <a:off x="2343150" y="5035211"/>
-            <a:ext cx="12258675" cy="423863"/>
+            <a:off x="2343150" y="5446691"/>
+            <a:ext cx="11235690" cy="423863"/>
           </a:xfrm>
           <a:prstGeom prst="rect">
             <a:avLst/>
@@ -14410,7 +14641,7 @@
               <a:buNone/>
             </a:pPr>
             <a:r>
-              <a:rPr lang="en-US" sz="2025" b="1" dirty="0">
+              <a:rPr lang="en-US" sz="2000" b="1" dirty="0">
                 <a:solidFill>
                   <a:srgbClr val="000000"/>
                 </a:solidFill>
@@ -14421,7 +14652,7 @@
               <a:t>Publish repository</a:t>
             </a:r>
             <a:r>
-              <a:rPr lang="en-US" sz="2025" dirty="0">
+              <a:rPr lang="en-US" sz="2000" dirty="0">
                 <a:solidFill>
                   <a:srgbClr val="000000"/>
                 </a:solidFill>
@@ -14432,7 +14663,7 @@
               <a:t>. Leave </a:t>
             </a:r>
             <a:r>
-              <a:rPr lang="en-US" sz="2025" b="1" dirty="0">
+              <a:rPr lang="en-US" sz="2000" b="1" dirty="0">
                 <a:solidFill>
                   <a:srgbClr val="000000"/>
                 </a:solidFill>
@@ -14443,7 +14674,7 @@
               <a:t>Keep this code private </a:t>
             </a:r>
             <a:r>
-              <a:rPr lang="en-US" sz="2025" dirty="0">
+              <a:rPr lang="en-US" sz="2000" dirty="0">
                 <a:solidFill>
                   <a:srgbClr val="000000"/>
                 </a:solidFill>
@@ -14453,7 +14684,7 @@
               </a:rPr>
               <a:t>checked.</a:t>
             </a:r>
-            <a:endParaRPr lang="en-US" sz="2025" dirty="0"/>
+            <a:endParaRPr lang="en-US" sz="2000" dirty="0"/>
           </a:p>
         </p:txBody>
       </p:sp>
@@ -14465,7 +14696,7 @@
         </p:nvSpPr>
         <p:spPr>
           <a:xfrm>
-            <a:off x="1809750" y="5649573"/>
+            <a:off x="1809750" y="6061053"/>
             <a:ext cx="609600" cy="423863"/>
           </a:xfrm>
           <a:prstGeom prst="rect">
@@ -14487,7 +14718,7 @@
               <a:buNone/>
             </a:pPr>
             <a:r>
-              <a:rPr lang="en-US" sz="2250" b="1" dirty="0">
+              <a:rPr lang="en-US" sz="2200" b="1" dirty="0">
                 <a:solidFill>
                   <a:srgbClr val="1F6FB2"/>
                 </a:solidFill>
@@ -14497,7 +14728,7 @@
               </a:rPr>
               <a:t>5</a:t>
             </a:r>
-            <a:endParaRPr lang="en-US" sz="2250" dirty="0"/>
+            <a:endParaRPr lang="en-US" sz="2200" dirty="0"/>
           </a:p>
         </p:txBody>
       </p:sp>
@@ -14509,8 +14740,8 @@
         </p:nvSpPr>
         <p:spPr>
           <a:xfrm>
-            <a:off x="2343150" y="5649573"/>
-            <a:ext cx="12258675" cy="423863"/>
+            <a:off x="2343150" y="6061053"/>
+            <a:ext cx="11235690" cy="423863"/>
           </a:xfrm>
           <a:prstGeom prst="rect">
             <a:avLst/>
@@ -14531,7 +14762,7 @@
               <a:buNone/>
             </a:pPr>
             <a:r>
-              <a:rPr lang="en-US" sz="2025" dirty="0">
+              <a:rPr lang="en-US" sz="2000" dirty="0">
                 <a:solidFill>
                   <a:srgbClr val="000000"/>
                 </a:solidFill>
@@ -14542,7 +14773,7 @@
               <a:t>Repository › </a:t>
             </a:r>
             <a:r>
-              <a:rPr lang="en-US" sz="2025" b="1" dirty="0">
+              <a:rPr lang="en-US" sz="2000" b="1" dirty="0">
                 <a:solidFill>
                   <a:srgbClr val="000000"/>
                 </a:solidFill>
@@ -14553,7 +14784,7 @@
               <a:t>View on GitHub </a:t>
             </a:r>
             <a:r>
-              <a:rPr lang="en-US" sz="2025" dirty="0">
+              <a:rPr lang="en-US" sz="2000" dirty="0">
                 <a:solidFill>
                   <a:srgbClr val="000000"/>
                 </a:solidFill>
@@ -14563,7 +14794,7 @@
               </a:rPr>
               <a:t>to confirm it’s there.</a:t>
             </a:r>
-            <a:endParaRPr lang="en-US" sz="2025" dirty="0"/>
+            <a:endParaRPr lang="en-US" sz="2000" dirty="0"/>
           </a:p>
         </p:txBody>
       </p:sp>
@@ -14575,7 +14806,7 @@
         </p:nvSpPr>
         <p:spPr>
           <a:xfrm>
-            <a:off x="1809750" y="6263936"/>
+            <a:off x="1809750" y="6675416"/>
             <a:ext cx="11677650" cy="19050"/>
           </a:xfrm>
           <a:prstGeom prst="rect">
@@ -14602,8 +14833,8 @@
         </p:nvSpPr>
         <p:spPr>
           <a:xfrm>
-            <a:off x="1809750" y="6492536"/>
-            <a:ext cx="12027980" cy="384770"/>
+            <a:off x="1809750" y="6904016"/>
+            <a:ext cx="11769090" cy="384770"/>
           </a:xfrm>
           <a:prstGeom prst="rect">
             <a:avLst/>
@@ -14624,7 +14855,7 @@
               <a:buNone/>
             </a:pPr>
             <a:r>
-              <a:rPr lang="en-US" sz="1950" dirty="0">
+              <a:rPr lang="en-US" sz="1900" dirty="0">
                 <a:solidFill>
                   <a:srgbClr val="404040"/>
                 </a:solidFill>
@@ -14635,7 +14866,7 @@
               <a:t>Starting from nothing? File › </a:t>
             </a:r>
             <a:r>
-              <a:rPr lang="en-US" sz="1950" b="1" dirty="0">
+              <a:rPr lang="en-US" sz="1900" b="1" dirty="0">
                 <a:solidFill>
                   <a:srgbClr val="000000"/>
                 </a:solidFill>
@@ -14646,7 +14877,7 @@
               <a:t>New repository </a:t>
             </a:r>
             <a:r>
-              <a:rPr lang="en-US" sz="1950" dirty="0">
+              <a:rPr lang="en-US" sz="1900" dirty="0">
                 <a:solidFill>
                   <a:srgbClr val="404040"/>
                 </a:solidFill>
@@ -14656,7 +14887,7 @@
               </a:rPr>
               <a:t>does steps 1–2 with an empty folder.</a:t>
             </a:r>
-            <a:endParaRPr lang="en-US" sz="1950" dirty="0"/>
+            <a:endParaRPr lang="en-US" sz="1900" dirty="0"/>
           </a:p>
         </p:txBody>
       </p:sp>
@@ -14669,7 +14900,7 @@
         <p:spPr>
           <a:xfrm>
             <a:off x="133350" y="5810250"/>
-            <a:ext cx="1442184" cy="381000"/>
+            <a:ext cx="1409700" cy="381000"/>
           </a:xfrm>
           <a:prstGeom prst="rect">
             <a:avLst/>
@@ -14755,6 +14986,30 @@
           </a:p>
         </p:txBody>
       </p:sp>
+      <p:pic>
+        <p:nvPicPr>
+          <p:cNvPr id="21" name="Screenshot placeholder" descr="Screenshot to add: GitHub Desktop Publish repository dialog with Keep this code private checked"/>
+          <p:cNvPicPr>
+            <a:picLocks noChangeAspect="1"/>
+          </p:cNvPicPr>
+          <p:nvPr/>
+        </p:nvPicPr>
+        <p:blipFill>
+          <a:blip r:embed="rId3"/>
+          <a:stretch>
+            <a:fillRect/>
+          </a:stretch>
+        </p:blipFill>
+        <p:spPr>
+          <a:xfrm>
+            <a:off x="1810512" y="7498079"/>
+            <a:ext cx="4937760" cy="2103120"/>
+          </a:xfrm>
+          <a:prstGeom prst="rect">
+            <a:avLst/>
+          </a:prstGeom>
+        </p:spPr>
+      </p:pic>
     </p:spTree>
   </p:cSld>
   <p:clrMapOvr>
@@ -14811,7 +15066,7 @@
         <p:spPr>
           <a:xfrm>
             <a:off x="1809750" y="1619250"/>
-            <a:ext cx="12845415" cy="393700"/>
+            <a:ext cx="11769090" cy="393700"/>
           </a:xfrm>
           <a:prstGeom prst="rect">
             <a:avLst/>
@@ -14873,7 +15128,7 @@
               <a:buNone/>
             </a:pPr>
             <a:r>
-              <a:rPr lang="en-US" sz="2250" b="1" dirty="0">
+              <a:rPr lang="en-US" sz="2200" b="1" dirty="0">
                 <a:solidFill>
                   <a:srgbClr val="1F6FB2"/>
                 </a:solidFill>
@@ -14883,7 +15138,7 @@
               </a:rPr>
               <a:t>1</a:t>
             </a:r>
-            <a:endParaRPr lang="en-US" sz="2250" dirty="0"/>
+            <a:endParaRPr lang="en-US" sz="2200" dirty="0"/>
           </a:p>
         </p:txBody>
       </p:sp>
@@ -14896,7 +15151,7 @@
         <p:spPr>
           <a:xfrm>
             <a:off x="2343150" y="2209800"/>
-            <a:ext cx="12258675" cy="384770"/>
+            <a:ext cx="11235690" cy="384770"/>
           </a:xfrm>
           <a:prstGeom prst="rect">
             <a:avLst/>
@@ -14961,7 +15216,7 @@
               <a:buNone/>
             </a:pPr>
             <a:r>
-              <a:rPr lang="en-US" sz="2250" b="1" dirty="0">
+              <a:rPr lang="en-US" sz="2200" b="1" dirty="0">
                 <a:solidFill>
                   <a:srgbClr val="1F6FB2"/>
                 </a:solidFill>
@@ -14971,7 +15226,7 @@
               </a:rPr>
               <a:t>2</a:t>
             </a:r>
-            <a:endParaRPr lang="en-US" sz="2250" dirty="0"/>
+            <a:endParaRPr lang="en-US" sz="2200" dirty="0"/>
           </a:p>
         </p:txBody>
       </p:sp>
@@ -14984,7 +15239,7 @@
         <p:spPr>
           <a:xfrm>
             <a:off x="2343150" y="2753320"/>
-            <a:ext cx="12258675" cy="384770"/>
+            <a:ext cx="11235690" cy="384770"/>
           </a:xfrm>
           <a:prstGeom prst="rect">
             <a:avLst/>
@@ -15049,7 +15304,7 @@
               <a:buNone/>
             </a:pPr>
             <a:r>
-              <a:rPr lang="en-US" sz="2250" b="1" dirty="0">
+              <a:rPr lang="en-US" sz="2200" b="1" dirty="0">
                 <a:solidFill>
                   <a:srgbClr val="1F6FB2"/>
                 </a:solidFill>
@@ -15059,7 +15314,7 @@
               </a:rPr>
               <a:t>3</a:t>
             </a:r>
-            <a:endParaRPr lang="en-US" sz="2250" dirty="0"/>
+            <a:endParaRPr lang="en-US" sz="2200" dirty="0"/>
           </a:p>
         </p:txBody>
       </p:sp>
@@ -15072,7 +15327,7 @@
         <p:spPr>
           <a:xfrm>
             <a:off x="2343150" y="3296841"/>
-            <a:ext cx="12258675" cy="384770"/>
+            <a:ext cx="11235690" cy="384770"/>
           </a:xfrm>
           <a:prstGeom prst="rect">
             <a:avLst/>
@@ -15137,7 +15392,7 @@
               <a:buNone/>
             </a:pPr>
             <a:r>
-              <a:rPr lang="en-US" sz="2250" b="1" dirty="0">
+              <a:rPr lang="en-US" sz="2200" b="1" dirty="0">
                 <a:solidFill>
                   <a:srgbClr val="1F6FB2"/>
                 </a:solidFill>
@@ -15147,7 +15402,7 @@
               </a:rPr>
               <a:t>4</a:t>
             </a:r>
-            <a:endParaRPr lang="en-US" sz="2250" dirty="0"/>
+            <a:endParaRPr lang="en-US" sz="2200" dirty="0"/>
           </a:p>
         </p:txBody>
       </p:sp>
@@ -15160,7 +15415,7 @@
         <p:spPr>
           <a:xfrm>
             <a:off x="2343150" y="3840361"/>
-            <a:ext cx="12258675" cy="384770"/>
+            <a:ext cx="11235690" cy="384770"/>
           </a:xfrm>
           <a:prstGeom prst="rect">
             <a:avLst/>
@@ -15225,7 +15480,7 @@
               <a:buNone/>
             </a:pPr>
             <a:r>
-              <a:rPr lang="en-US" sz="2250" b="1" dirty="0">
+              <a:rPr lang="en-US" sz="2200" b="1" dirty="0">
                 <a:solidFill>
                   <a:srgbClr val="1F6FB2"/>
                 </a:solidFill>
@@ -15235,7 +15490,7 @@
               </a:rPr>
               <a:t>5</a:t>
             </a:r>
-            <a:endParaRPr lang="en-US" sz="2250" dirty="0"/>
+            <a:endParaRPr lang="en-US" sz="2200" dirty="0"/>
           </a:p>
         </p:txBody>
       </p:sp>
@@ -15248,7 +15503,7 @@
         <p:spPr>
           <a:xfrm>
             <a:off x="2343150" y="4383881"/>
-            <a:ext cx="12258675" cy="384770"/>
+            <a:ext cx="11235690" cy="384770"/>
           </a:xfrm>
           <a:prstGeom prst="rect">
             <a:avLst/>
@@ -15292,7 +15547,7 @@
         <p:spPr>
           <a:xfrm>
             <a:off x="1809750" y="5149652"/>
-            <a:ext cx="12845415" cy="393700"/>
+            <a:ext cx="11769090" cy="393700"/>
           </a:xfrm>
           <a:prstGeom prst="rect">
             <a:avLst/>
@@ -15660,7 +15915,7 @@
         <p:spPr>
           <a:xfrm>
             <a:off x="133350" y="2381250"/>
-            <a:ext cx="1442184" cy="381000"/>
+            <a:ext cx="1409700" cy="381000"/>
           </a:xfrm>
           <a:prstGeom prst="rect">
             <a:avLst/>
@@ -15802,7 +16057,7 @@
         <p:spPr>
           <a:xfrm>
             <a:off x="1809750" y="1619250"/>
-            <a:ext cx="12845415" cy="393700"/>
+            <a:ext cx="11769090" cy="393700"/>
           </a:xfrm>
           <a:prstGeom prst="rect">
             <a:avLst/>
@@ -15944,7 +16199,7 @@
               <a:buNone/>
             </a:pPr>
             <a:r>
-              <a:rPr lang="en-US" sz="2025" dirty="0">
+              <a:rPr lang="en-US" sz="2000" dirty="0">
                 <a:solidFill>
                   <a:srgbClr val="000000"/>
                 </a:solidFill>
@@ -15955,7 +16210,7 @@
               <a:t>Repo is on GitHub and </a:t>
             </a:r>
             <a:r>
-              <a:rPr lang="en-US" sz="2025" b="1" dirty="0">
+              <a:rPr lang="en-US" sz="2000" b="1" dirty="0">
                 <a:solidFill>
                   <a:srgbClr val="000000"/>
                 </a:solidFill>
@@ -15966,7 +16221,7 @@
               <a:t>private</a:t>
             </a:r>
             <a:r>
-              <a:rPr lang="en-US" sz="2025" dirty="0">
+              <a:rPr lang="en-US" sz="2000" dirty="0">
                 <a:solidFill>
                   <a:srgbClr val="000000"/>
                 </a:solidFill>
@@ -15976,7 +16231,7 @@
               </a:rPr>
               <a:t> (steps on the previous slide)</a:t>
             </a:r>
-            <a:endParaRPr lang="en-US" sz="2025" dirty="0"/>
+            <a:endParaRPr lang="en-US" sz="2000" dirty="0"/>
           </a:p>
         </p:txBody>
       </p:sp>
@@ -16063,7 +16318,7 @@
               <a:buNone/>
             </a:pPr>
             <a:r>
-              <a:rPr lang="en-US" sz="2025" dirty="0">
+              <a:rPr lang="en-US" sz="2000" dirty="0">
                 <a:solidFill>
                   <a:srgbClr val="000000"/>
                 </a:solidFill>
@@ -16073,7 +16328,7 @@
               </a:rPr>
               <a:t>main runs as-is (you’ve tested it)</a:t>
             </a:r>
-            <a:endParaRPr lang="en-US" sz="2025" dirty="0"/>
+            <a:endParaRPr lang="en-US" sz="2000" dirty="0"/>
           </a:p>
         </p:txBody>
       </p:sp>
@@ -16160,7 +16415,7 @@
               <a:buNone/>
             </a:pPr>
             <a:r>
-              <a:rPr lang="en-US" sz="2025" dirty="0">
+              <a:rPr lang="en-US" sz="2000" dirty="0">
                 <a:solidFill>
                   <a:srgbClr val="000000"/>
                 </a:solidFill>
@@ -16170,7 +16425,7 @@
               </a:rPr>
               <a:t>README explains how to run it</a:t>
             </a:r>
-            <a:endParaRPr lang="en-US" sz="2025" dirty="0"/>
+            <a:endParaRPr lang="en-US" sz="2000" dirty="0"/>
           </a:p>
         </p:txBody>
       </p:sp>
@@ -16257,7 +16512,7 @@
               <a:buNone/>
             </a:pPr>
             <a:r>
-              <a:rPr lang="en-US" sz="2025" dirty="0">
+              <a:rPr lang="en-US" sz="2000" dirty="0">
                 <a:solidFill>
                   <a:srgbClr val="000000"/>
                 </a:solidFill>
@@ -16267,7 +16522,7 @@
               </a:rPr>
               <a:t>.gitignore excludes outputs, data, and secrets</a:t>
             </a:r>
-            <a:endParaRPr lang="en-US" sz="2025" dirty="0"/>
+            <a:endParaRPr lang="en-US" sz="2000" dirty="0"/>
           </a:p>
         </p:txBody>
       </p:sp>
@@ -16354,7 +16609,7 @@
               <a:buNone/>
             </a:pPr>
             <a:r>
-              <a:rPr lang="en-US" sz="2025" dirty="0">
+              <a:rPr lang="en-US" sz="2000" dirty="0">
                 <a:solidFill>
                   <a:srgbClr val="000000"/>
                 </a:solidFill>
@@ -16364,7 +16619,7 @@
               </a:rPr>
               <a:t>No sensitive data anywhere in history</a:t>
             </a:r>
-            <a:endParaRPr lang="en-US" sz="2025" dirty="0"/>
+            <a:endParaRPr lang="en-US" sz="2000" dirty="0"/>
           </a:p>
         </p:txBody>
       </p:sp>
@@ -16451,7 +16706,7 @@
               <a:buNone/>
             </a:pPr>
             <a:r>
-              <a:rPr lang="en-US" sz="2025" dirty="0">
+              <a:rPr lang="en-US" sz="2000" dirty="0">
                 <a:solidFill>
                   <a:srgbClr val="000000"/>
                 </a:solidFill>
@@ -16461,7 +16716,7 @@
               </a:rPr>
               <a:t>You can branch, open a PR, merge, and pull</a:t>
             </a:r>
-            <a:endParaRPr lang="en-US" sz="2025" dirty="0"/>
+            <a:endParaRPr lang="en-US" sz="2000" dirty="0"/>
           </a:p>
         </p:txBody>
       </p:sp>
@@ -16548,7 +16803,7 @@
               <a:buNone/>
             </a:pPr>
             <a:r>
-              <a:rPr lang="en-US" sz="2025" dirty="0">
+              <a:rPr lang="en-US" sz="2000" dirty="0">
                 <a:solidFill>
                   <a:srgbClr val="000000"/>
                 </a:solidFill>
@@ -16558,7 +16813,7 @@
               </a:rPr>
               <a:t>Optional: a first-draft AGENTS.md</a:t>
             </a:r>
-            <a:endParaRPr lang="en-US" sz="2025" dirty="0"/>
+            <a:endParaRPr lang="en-US" sz="2000" dirty="0"/>
           </a:p>
         </p:txBody>
       </p:sp>
@@ -16619,7 +16874,7 @@
               <a:buNone/>
             </a:pPr>
             <a:r>
-              <a:rPr lang="en-US" sz="2025" b="1" dirty="0">
+              <a:rPr lang="en-US" sz="2000" b="1" dirty="0">
                 <a:solidFill>
                   <a:srgbClr val="FFFFFF"/>
                 </a:solidFill>
@@ -16630,7 +16885,7 @@
               <a:t>Next: Lesson 2 </a:t>
             </a:r>
             <a:r>
-              <a:rPr lang="en-US" sz="2025" dirty="0">
+              <a:rPr lang="en-US" sz="2000" dirty="0">
                 <a:solidFill>
                   <a:srgbClr val="FFFFFF"/>
                 </a:solidFill>
@@ -16643,7 +16898,7 @@
               </a:rPr>
               <a:t>· Agentic AI workflow: connect this repo to a coding agent and review its first pull request.</a:t>
             </a:r>
-            <a:endParaRPr lang="en-US" sz="2025" dirty="0"/>
+            <a:endParaRPr lang="en-US" sz="2000" dirty="0"/>
           </a:p>
         </p:txBody>
       </p:sp>
@@ -16656,7 +16911,7 @@
         <p:spPr>
           <a:xfrm>
             <a:off x="133350" y="5810250"/>
-            <a:ext cx="1442184" cy="381000"/>
+            <a:ext cx="1409700" cy="381000"/>
           </a:xfrm>
           <a:prstGeom prst="rect">
             <a:avLst/>
@@ -16846,7 +17101,7 @@
               <a:buNone/>
             </a:pPr>
             <a:r>
-              <a:rPr lang="en-US" sz="1875" b="1" dirty="0">
+              <a:rPr lang="en-US" sz="1900" b="1" dirty="0">
                 <a:solidFill>
                   <a:srgbClr val="FFFFFF"/>
                 </a:solidFill>
@@ -16856,7 +17111,7 @@
               </a:rPr>
               <a:t>Symptom</a:t>
             </a:r>
-            <a:endParaRPr lang="en-US" sz="1875" dirty="0"/>
+            <a:endParaRPr lang="en-US" sz="1900" dirty="0"/>
           </a:p>
         </p:txBody>
       </p:sp>
@@ -16917,7 +17172,7 @@
               <a:buNone/>
             </a:pPr>
             <a:r>
-              <a:rPr lang="en-US" sz="1875" b="1" dirty="0">
+              <a:rPr lang="en-US" sz="1900" b="1" dirty="0">
                 <a:solidFill>
                   <a:srgbClr val="FFFFFF"/>
                 </a:solidFill>
@@ -16927,7 +17182,7 @@
               </a:rPr>
               <a:t>Fix</a:t>
             </a:r>
-            <a:endParaRPr lang="en-US" sz="1875" dirty="0"/>
+            <a:endParaRPr lang="en-US" sz="1900" dirty="0"/>
           </a:p>
         </p:txBody>
       </p:sp>
@@ -16988,7 +17243,7 @@
               <a:buNone/>
             </a:pPr>
             <a:r>
-              <a:rPr lang="en-US" sz="1875" b="1" dirty="0">
+              <a:rPr lang="en-US" sz="1900" b="1" dirty="0">
                 <a:solidFill>
                   <a:srgbClr val="000000"/>
                 </a:solidFill>
@@ -16998,7 +17253,7 @@
               </a:rPr>
               <a:t>Push rejected; Desktop shows Pull origin</a:t>
             </a:r>
-            <a:endParaRPr lang="en-US" sz="1875" dirty="0"/>
+            <a:endParaRPr lang="en-US" sz="1900" dirty="0"/>
           </a:p>
         </p:txBody>
       </p:sp>
@@ -17059,7 +17314,7 @@
               <a:buNone/>
             </a:pPr>
             <a:r>
-              <a:rPr lang="en-US" sz="1875" dirty="0">
+              <a:rPr lang="en-US" sz="1900" dirty="0">
                 <a:solidFill>
                   <a:srgbClr val="000000"/>
                 </a:solidFill>
@@ -17069,7 +17324,7 @@
               </a:rPr>
               <a:t>GitHub has newer commits. Pull, resolve any conflict, then push.</a:t>
             </a:r>
-            <a:endParaRPr lang="en-US" sz="1875" dirty="0"/>
+            <a:endParaRPr lang="en-US" sz="1900" dirty="0"/>
           </a:p>
         </p:txBody>
       </p:sp>
@@ -17130,7 +17385,7 @@
               <a:buNone/>
             </a:pPr>
             <a:r>
-              <a:rPr lang="en-US" sz="1875" b="1" dirty="0">
+              <a:rPr lang="en-US" sz="1900" b="1" dirty="0">
                 <a:solidFill>
                   <a:srgbClr val="000000"/>
                 </a:solidFill>
@@ -17140,7 +17395,7 @@
               </a:rPr>
               <a:t>Repo missing from Clone list</a:t>
             </a:r>
-            <a:endParaRPr lang="en-US" sz="1875" dirty="0"/>
+            <a:endParaRPr lang="en-US" sz="1900" dirty="0"/>
           </a:p>
         </p:txBody>
       </p:sp>
@@ -17201,7 +17456,7 @@
               <a:buNone/>
             </a:pPr>
             <a:r>
-              <a:rPr lang="en-US" sz="1875" dirty="0">
+              <a:rPr lang="en-US" sz="1900" dirty="0">
                 <a:solidFill>
                   <a:srgbClr val="000000"/>
                 </a:solidFill>
@@ -17211,7 +17466,7 @@
               </a:rPr>
               <a:t>Check the signed-in account (Options › Accounts) or paste the URL in the URL tab.</a:t>
             </a:r>
-            <a:endParaRPr lang="en-US" sz="1875" dirty="0"/>
+            <a:endParaRPr lang="en-US" sz="1900" dirty="0"/>
           </a:p>
         </p:txBody>
       </p:sp>
@@ -17272,7 +17527,7 @@
               <a:buNone/>
             </a:pPr>
             <a:r>
-              <a:rPr lang="en-US" sz="1875" b="1" dirty="0">
+              <a:rPr lang="en-US" sz="1900" b="1" dirty="0">
                 <a:solidFill>
                   <a:srgbClr val="000000"/>
                 </a:solidFill>
@@ -17282,7 +17537,7 @@
               </a:rPr>
               <a:t>Authentication failed</a:t>
             </a:r>
-            <a:endParaRPr lang="en-US" sz="1875" dirty="0"/>
+            <a:endParaRPr lang="en-US" sz="1900" dirty="0"/>
           </a:p>
         </p:txBody>
       </p:sp>
@@ -17343,7 +17598,7 @@
               <a:buNone/>
             </a:pPr>
             <a:r>
-              <a:rPr lang="en-US" sz="1875" dirty="0">
+              <a:rPr lang="en-US" sz="1900" dirty="0">
                 <a:solidFill>
                   <a:srgbClr val="000000"/>
                 </a:solidFill>
@@ -17353,7 +17608,7 @@
               </a:rPr>
               <a:t>Sign out and back in under Options › Accounts.</a:t>
             </a:r>
-            <a:endParaRPr lang="en-US" sz="1875" dirty="0"/>
+            <a:endParaRPr lang="en-US" sz="1900" dirty="0"/>
           </a:p>
         </p:txBody>
       </p:sp>
@@ -17414,7 +17669,7 @@
               <a:buNone/>
             </a:pPr>
             <a:r>
-              <a:rPr lang="en-US" sz="1875" b="1" dirty="0">
+              <a:rPr lang="en-US" sz="1900" b="1" dirty="0">
                 <a:solidFill>
                   <a:srgbClr val="000000"/>
                 </a:solidFill>
@@ -17424,7 +17679,7 @@
               </a:rPr>
               <a:t>Can’t switch branch or pull: uncommitted changes</a:t>
             </a:r>
-            <a:endParaRPr lang="en-US" sz="1875" dirty="0"/>
+            <a:endParaRPr lang="en-US" sz="1900" dirty="0"/>
           </a:p>
         </p:txBody>
       </p:sp>
@@ -17485,7 +17740,7 @@
               <a:buNone/>
             </a:pPr>
             <a:r>
-              <a:rPr lang="en-US" sz="1875" dirty="0">
+              <a:rPr lang="en-US" sz="1900" dirty="0">
                 <a:solidFill>
                   <a:srgbClr val="000000"/>
                 </a:solidFill>
@@ -17495,7 +17750,7 @@
               </a:rPr>
               <a:t>Commit them, or choose to stash them when Desktop asks.</a:t>
             </a:r>
-            <a:endParaRPr lang="en-US" sz="1875" dirty="0"/>
+            <a:endParaRPr lang="en-US" sz="1900" dirty="0"/>
           </a:p>
         </p:txBody>
       </p:sp>
@@ -17556,7 +17811,7 @@
               <a:buNone/>
             </a:pPr>
             <a:r>
-              <a:rPr lang="en-US" sz="1875" b="1" dirty="0">
+              <a:rPr lang="en-US" sz="1900" b="1" dirty="0">
                 <a:solidFill>
                   <a:srgbClr val="000000"/>
                 </a:solidFill>
@@ -17566,7 +17821,7 @@
               </a:rPr>
               <a:t>Committed to the wrong branch</a:t>
             </a:r>
-            <a:endParaRPr lang="en-US" sz="1875" dirty="0"/>
+            <a:endParaRPr lang="en-US" sz="1900" dirty="0"/>
           </a:p>
         </p:txBody>
       </p:sp>
@@ -17627,7 +17882,7 @@
               <a:buNone/>
             </a:pPr>
             <a:r>
-              <a:rPr lang="en-US" sz="1875" dirty="0">
+              <a:rPr lang="en-US" sz="1900" dirty="0">
                 <a:solidFill>
                   <a:srgbClr val="000000"/>
                 </a:solidFill>
@@ -17637,7 +17892,7 @@
               </a:rPr>
               <a:t>Not pushed: Undo, switch branch, commit again.</a:t>
             </a:r>
-            <a:endParaRPr lang="en-US" sz="1875" dirty="0"/>
+            <a:endParaRPr lang="en-US" sz="1900" dirty="0"/>
           </a:p>
         </p:txBody>
       </p:sp>
@@ -17698,7 +17953,7 @@
               <a:buNone/>
             </a:pPr>
             <a:r>
-              <a:rPr lang="en-US" sz="1875" b="1" dirty="0">
+              <a:rPr lang="en-US" sz="1900" b="1" dirty="0">
                 <a:solidFill>
                   <a:srgbClr val="000000"/>
                 </a:solidFill>
@@ -17708,7 +17963,7 @@
               </a:rPr>
               <a:t>Unwanted files in Changes</a:t>
             </a:r>
-            <a:endParaRPr lang="en-US" sz="1875" dirty="0"/>
+            <a:endParaRPr lang="en-US" sz="1900" dirty="0"/>
           </a:p>
         </p:txBody>
       </p:sp>
@@ -17769,7 +18024,7 @@
               <a:buNone/>
             </a:pPr>
             <a:r>
-              <a:rPr lang="en-US" sz="1875" dirty="0">
+              <a:rPr lang="en-US" sz="1900" dirty="0">
                 <a:solidFill>
                   <a:srgbClr val="000000"/>
                 </a:solidFill>
@@ -17779,7 +18034,7 @@
               </a:rPr>
               <a:t>Right-click › Ignore file (adds it to .gitignore).</a:t>
             </a:r>
-            <a:endParaRPr lang="en-US" sz="1875" dirty="0"/>
+            <a:endParaRPr lang="en-US" sz="1900" dirty="0"/>
           </a:p>
         </p:txBody>
       </p:sp>
@@ -17840,7 +18095,7 @@
               <a:buNone/>
             </a:pPr>
             <a:r>
-              <a:rPr lang="en-US" sz="1875" b="1" dirty="0">
+              <a:rPr lang="en-US" sz="1900" b="1" dirty="0">
                 <a:solidFill>
                   <a:srgbClr val="000000"/>
                 </a:solidFill>
@@ -17850,7 +18105,7 @@
               </a:rPr>
               <a:t>Files flicker or duplicate</a:t>
             </a:r>
-            <a:endParaRPr lang="en-US" sz="1875" dirty="0"/>
+            <a:endParaRPr lang="en-US" sz="1900" dirty="0"/>
           </a:p>
         </p:txBody>
       </p:sp>
@@ -17911,7 +18166,7 @@
               <a:buNone/>
             </a:pPr>
             <a:r>
-              <a:rPr lang="en-US" sz="1875" dirty="0">
+              <a:rPr lang="en-US" sz="1900" dirty="0">
                 <a:solidFill>
                   <a:srgbClr val="000000"/>
                 </a:solidFill>
@@ -17921,7 +18176,7 @@
               </a:rPr>
               <a:t>Repo is in a OneDrive-synced folder. Re-clone to a local path.</a:t>
             </a:r>
-            <a:endParaRPr lang="en-US" sz="1875" dirty="0"/>
+            <a:endParaRPr lang="en-US" sz="1900" dirty="0"/>
           </a:p>
         </p:txBody>
       </p:sp>
@@ -17982,7 +18237,7 @@
               <a:buNone/>
             </a:pPr>
             <a:r>
-              <a:rPr lang="en-US" sz="1875" b="1" dirty="0">
+              <a:rPr lang="en-US" sz="1900" b="1" dirty="0">
                 <a:solidFill>
                   <a:srgbClr val="000000"/>
                 </a:solidFill>
@@ -17992,7 +18247,7 @@
               </a:rPr>
               <a:t>Pushed a password or key</a:t>
             </a:r>
-            <a:endParaRPr lang="en-US" sz="1875" dirty="0"/>
+            <a:endParaRPr lang="en-US" sz="1900" dirty="0"/>
           </a:p>
         </p:txBody>
       </p:sp>
@@ -18053,7 +18308,7 @@
               <a:buNone/>
             </a:pPr>
             <a:r>
-              <a:rPr lang="en-US" sz="1875" dirty="0">
+              <a:rPr lang="en-US" sz="1900" dirty="0">
                 <a:solidFill>
                   <a:srgbClr val="000000"/>
                 </a:solidFill>
@@ -18063,7 +18318,7 @@
               </a:rPr>
               <a:t>Rotate it now. Deleting the file doesn’t remove it from history.</a:t>
             </a:r>
-            <a:endParaRPr lang="en-US" sz="1875" dirty="0"/>
+            <a:endParaRPr lang="en-US" sz="1900" dirty="0"/>
           </a:p>
         </p:txBody>
       </p:sp>
@@ -18076,7 +18331,7 @@
         <p:spPr>
           <a:xfrm>
             <a:off x="133350" y="6191250"/>
-            <a:ext cx="1442184" cy="381000"/>
+            <a:ext cx="1409700" cy="381000"/>
           </a:xfrm>
           <a:prstGeom prst="rect">
             <a:avLst/>
@@ -18266,7 +18521,7 @@
               <a:buNone/>
             </a:pPr>
             <a:r>
-              <a:rPr lang="en-US" sz="1875" b="1" dirty="0">
+              <a:rPr lang="en-US" sz="1900" b="1" dirty="0">
                 <a:solidFill>
                   <a:srgbClr val="FFFFFF"/>
                 </a:solidFill>
@@ -18276,7 +18531,7 @@
               </a:rPr>
               <a:t>To…</a:t>
             </a:r>
-            <a:endParaRPr lang="en-US" sz="1875" dirty="0"/>
+            <a:endParaRPr lang="en-US" sz="1900" dirty="0"/>
           </a:p>
         </p:txBody>
       </p:sp>
@@ -18337,7 +18592,7 @@
               <a:buNone/>
             </a:pPr>
             <a:r>
-              <a:rPr lang="en-US" sz="1875" b="1" dirty="0">
+              <a:rPr lang="en-US" sz="1900" b="1" dirty="0">
                 <a:solidFill>
                   <a:srgbClr val="FFFFFF"/>
                 </a:solidFill>
@@ -18347,7 +18602,7 @@
               </a:rPr>
               <a:t>In GitHub Desktop</a:t>
             </a:r>
-            <a:endParaRPr lang="en-US" sz="1875" dirty="0"/>
+            <a:endParaRPr lang="en-US" sz="1900" dirty="0"/>
           </a:p>
         </p:txBody>
       </p:sp>
@@ -18408,7 +18663,7 @@
               <a:buNone/>
             </a:pPr>
             <a:r>
-              <a:rPr lang="en-US" sz="1875" b="1" dirty="0">
+              <a:rPr lang="en-US" sz="1900" b="1" dirty="0">
                 <a:solidFill>
                   <a:srgbClr val="000000"/>
                 </a:solidFill>
@@ -18418,7 +18673,7 @@
               </a:rPr>
               <a:t>Get a repo from GitHub</a:t>
             </a:r>
-            <a:endParaRPr lang="en-US" sz="1875" dirty="0"/>
+            <a:endParaRPr lang="en-US" sz="1900" dirty="0"/>
           </a:p>
         </p:txBody>
       </p:sp>
@@ -18479,7 +18734,7 @@
               <a:buNone/>
             </a:pPr>
             <a:r>
-              <a:rPr lang="en-US" sz="1875" dirty="0">
+              <a:rPr lang="en-US" sz="1900" dirty="0">
                 <a:solidFill>
                   <a:srgbClr val="000000"/>
                 </a:solidFill>
@@ -18489,7 +18744,7 @@
               </a:rPr>
               <a:t>File › Clone repository</a:t>
             </a:r>
-            <a:endParaRPr lang="en-US" sz="1875" dirty="0"/>
+            <a:endParaRPr lang="en-US" sz="1900" dirty="0"/>
           </a:p>
         </p:txBody>
       </p:sp>
@@ -18550,7 +18805,7 @@
               <a:buNone/>
             </a:pPr>
             <a:r>
-              <a:rPr lang="en-US" sz="1875" b="1" dirty="0">
+              <a:rPr lang="en-US" sz="1900" b="1" dirty="0">
                 <a:solidFill>
                   <a:srgbClr val="000000"/>
                 </a:solidFill>
@@ -18560,7 +18815,7 @@
               </a:rPr>
               <a:t>Track an existing folder</a:t>
             </a:r>
-            <a:endParaRPr lang="en-US" sz="1875" dirty="0"/>
+            <a:endParaRPr lang="en-US" sz="1900" dirty="0"/>
           </a:p>
         </p:txBody>
       </p:sp>
@@ -18621,7 +18876,7 @@
               <a:buNone/>
             </a:pPr>
             <a:r>
-              <a:rPr lang="en-US" sz="1875" dirty="0">
+              <a:rPr lang="en-US" sz="1900" dirty="0">
                 <a:solidFill>
                   <a:srgbClr val="000000"/>
                 </a:solidFill>
@@ -18631,7 +18886,7 @@
               </a:rPr>
               <a:t>File › Add local repository › create a repository</a:t>
             </a:r>
-            <a:endParaRPr lang="en-US" sz="1875" dirty="0"/>
+            <a:endParaRPr lang="en-US" sz="1900" dirty="0"/>
           </a:p>
         </p:txBody>
       </p:sp>
@@ -18692,7 +18947,7 @@
               <a:buNone/>
             </a:pPr>
             <a:r>
-              <a:rPr lang="en-US" sz="1875" b="1" dirty="0">
+              <a:rPr lang="en-US" sz="1900" b="1" dirty="0">
                 <a:solidFill>
                   <a:srgbClr val="000000"/>
                 </a:solidFill>
@@ -18702,7 +18957,7 @@
               </a:rPr>
               <a:t>Put it on GitHub</a:t>
             </a:r>
-            <a:endParaRPr lang="en-US" sz="1875" dirty="0"/>
+            <a:endParaRPr lang="en-US" sz="1900" dirty="0"/>
           </a:p>
         </p:txBody>
       </p:sp>
@@ -18763,7 +19018,7 @@
               <a:buNone/>
             </a:pPr>
             <a:r>
-              <a:rPr lang="en-US" sz="1875" dirty="0">
+              <a:rPr lang="en-US" sz="1900" dirty="0">
                 <a:solidFill>
                   <a:srgbClr val="000000"/>
                 </a:solidFill>
@@ -18773,7 +19028,7 @@
               </a:rPr>
               <a:t>Publish repository (keep private)</a:t>
             </a:r>
-            <a:endParaRPr lang="en-US" sz="1875" dirty="0"/>
+            <a:endParaRPr lang="en-US" sz="1900" dirty="0"/>
           </a:p>
         </p:txBody>
       </p:sp>
@@ -18834,7 +19089,7 @@
               <a:buNone/>
             </a:pPr>
             <a:r>
-              <a:rPr lang="en-US" sz="1875" b="1" dirty="0">
+              <a:rPr lang="en-US" sz="1900" b="1" dirty="0">
                 <a:solidFill>
                   <a:srgbClr val="000000"/>
                 </a:solidFill>
@@ -18844,7 +19099,7 @@
               </a:rPr>
               <a:t>Save a snapshot</a:t>
             </a:r>
-            <a:endParaRPr lang="en-US" sz="1875" dirty="0"/>
+            <a:endParaRPr lang="en-US" sz="1900" dirty="0"/>
           </a:p>
         </p:txBody>
       </p:sp>
@@ -18905,7 +19160,7 @@
               <a:buNone/>
             </a:pPr>
             <a:r>
-              <a:rPr lang="en-US" sz="1875" dirty="0">
+              <a:rPr lang="en-US" sz="1900" dirty="0">
                 <a:solidFill>
                   <a:srgbClr val="000000"/>
                 </a:solidFill>
@@ -18915,7 +19170,7 @@
               </a:rPr>
               <a:t>Changes tab › Summary › Commit to &lt;branch&gt;</a:t>
             </a:r>
-            <a:endParaRPr lang="en-US" sz="1875" dirty="0"/>
+            <a:endParaRPr lang="en-US" sz="1900" dirty="0"/>
           </a:p>
         </p:txBody>
       </p:sp>
@@ -18976,7 +19231,7 @@
               <a:buNone/>
             </a:pPr>
             <a:r>
-              <a:rPr lang="en-US" sz="1875" b="1" dirty="0">
+              <a:rPr lang="en-US" sz="1900" b="1" dirty="0">
                 <a:solidFill>
                   <a:srgbClr val="000000"/>
                 </a:solidFill>
@@ -18986,7 +19241,7 @@
               </a:rPr>
               <a:t>Send commits</a:t>
             </a:r>
-            <a:endParaRPr lang="en-US" sz="1875" dirty="0"/>
+            <a:endParaRPr lang="en-US" sz="1900" dirty="0"/>
           </a:p>
         </p:txBody>
       </p:sp>
@@ -19047,7 +19302,7 @@
               <a:buNone/>
             </a:pPr>
             <a:r>
-              <a:rPr lang="en-US" sz="1875" dirty="0">
+              <a:rPr lang="en-US" sz="1900" dirty="0">
                 <a:solidFill>
                   <a:srgbClr val="000000"/>
                 </a:solidFill>
@@ -19057,7 +19312,7 @@
               </a:rPr>
               <a:t>Push origin</a:t>
             </a:r>
-            <a:endParaRPr lang="en-US" sz="1875" dirty="0"/>
+            <a:endParaRPr lang="en-US" sz="1900" dirty="0"/>
           </a:p>
         </p:txBody>
       </p:sp>
@@ -19118,7 +19373,7 @@
               <a:buNone/>
             </a:pPr>
             <a:r>
-              <a:rPr lang="en-US" sz="1875" b="1" dirty="0">
+              <a:rPr lang="en-US" sz="1900" b="1" dirty="0">
                 <a:solidFill>
                   <a:srgbClr val="000000"/>
                 </a:solidFill>
@@ -19128,7 +19383,7 @@
               </a:rPr>
               <a:t>Get the latest</a:t>
             </a:r>
-            <a:endParaRPr lang="en-US" sz="1875" dirty="0"/>
+            <a:endParaRPr lang="en-US" sz="1900" dirty="0"/>
           </a:p>
         </p:txBody>
       </p:sp>
@@ -19189,7 +19444,7 @@
               <a:buNone/>
             </a:pPr>
             <a:r>
-              <a:rPr lang="en-US" sz="1875" dirty="0">
+              <a:rPr lang="en-US" sz="1900" dirty="0">
                 <a:solidFill>
                   <a:srgbClr val="000000"/>
                 </a:solidFill>
@@ -19199,7 +19454,7 @@
               </a:rPr>
               <a:t>Fetch origin › Pull origin</a:t>
             </a:r>
-            <a:endParaRPr lang="en-US" sz="1875" dirty="0"/>
+            <a:endParaRPr lang="en-US" sz="1900" dirty="0"/>
           </a:p>
         </p:txBody>
       </p:sp>
@@ -19260,7 +19515,7 @@
               <a:buNone/>
             </a:pPr>
             <a:r>
-              <a:rPr lang="en-US" sz="1875" b="1" dirty="0">
+              <a:rPr lang="en-US" sz="1900" b="1" dirty="0">
                 <a:solidFill>
                   <a:srgbClr val="000000"/>
                 </a:solidFill>
@@ -19270,7 +19525,7 @@
               </a:rPr>
               <a:t>Start a branch</a:t>
             </a:r>
-            <a:endParaRPr lang="en-US" sz="1875" dirty="0"/>
+            <a:endParaRPr lang="en-US" sz="1900" dirty="0"/>
           </a:p>
         </p:txBody>
       </p:sp>
@@ -19331,7 +19586,7 @@
               <a:buNone/>
             </a:pPr>
             <a:r>
-              <a:rPr lang="en-US" sz="1875" dirty="0">
+              <a:rPr lang="en-US" sz="1900" dirty="0">
                 <a:solidFill>
                   <a:srgbClr val="000000"/>
                 </a:solidFill>
@@ -19341,7 +19596,7 @@
               </a:rPr>
               <a:t>Current branch › New branch › Publish branch</a:t>
             </a:r>
-            <a:endParaRPr lang="en-US" sz="1875" dirty="0"/>
+            <a:endParaRPr lang="en-US" sz="1900" dirty="0"/>
           </a:p>
         </p:txBody>
       </p:sp>
@@ -19402,7 +19657,7 @@
               <a:buNone/>
             </a:pPr>
             <a:r>
-              <a:rPr lang="en-US" sz="1875" b="1" dirty="0">
+              <a:rPr lang="en-US" sz="1900" b="1" dirty="0">
                 <a:solidFill>
                   <a:srgbClr val="000000"/>
                 </a:solidFill>
@@ -19412,7 +19667,7 @@
               </a:rPr>
               <a:t>Use someone’s branch</a:t>
             </a:r>
-            <a:endParaRPr lang="en-US" sz="1875" dirty="0"/>
+            <a:endParaRPr lang="en-US" sz="1900" dirty="0"/>
           </a:p>
         </p:txBody>
       </p:sp>
@@ -19473,7 +19728,7 @@
               <a:buNone/>
             </a:pPr>
             <a:r>
-              <a:rPr lang="en-US" sz="1875" dirty="0">
+              <a:rPr lang="en-US" sz="1900" dirty="0">
                 <a:solidFill>
                   <a:srgbClr val="000000"/>
                 </a:solidFill>
@@ -19483,7 +19738,7 @@
               </a:rPr>
               <a:t>Fetch origin › Current branch › pick it</a:t>
             </a:r>
-            <a:endParaRPr lang="en-US" sz="1875" dirty="0"/>
+            <a:endParaRPr lang="en-US" sz="1900" dirty="0"/>
           </a:p>
         </p:txBody>
       </p:sp>
@@ -19544,7 +19799,7 @@
               <a:buNone/>
             </a:pPr>
             <a:r>
-              <a:rPr lang="en-US" sz="1875" b="1" dirty="0">
+              <a:rPr lang="en-US" sz="1900" b="1" dirty="0">
                 <a:solidFill>
                   <a:srgbClr val="000000"/>
                 </a:solidFill>
@@ -19554,7 +19809,7 @@
               </a:rPr>
               <a:t>Propose a merge</a:t>
             </a:r>
-            <a:endParaRPr lang="en-US" sz="1875" dirty="0"/>
+            <a:endParaRPr lang="en-US" sz="1900" dirty="0"/>
           </a:p>
         </p:txBody>
       </p:sp>
@@ -19615,7 +19870,7 @@
               <a:buNone/>
             </a:pPr>
             <a:r>
-              <a:rPr lang="en-US" sz="1875" dirty="0">
+              <a:rPr lang="en-US" sz="1900" dirty="0">
                 <a:solidFill>
                   <a:srgbClr val="000000"/>
                 </a:solidFill>
@@ -19625,7 +19880,7 @@
               </a:rPr>
               <a:t>Branch › Create pull request</a:t>
             </a:r>
-            <a:endParaRPr lang="en-US" sz="1875" dirty="0"/>
+            <a:endParaRPr lang="en-US" sz="1900" dirty="0"/>
           </a:p>
         </p:txBody>
       </p:sp>
@@ -19686,7 +19941,7 @@
               <a:buNone/>
             </a:pPr>
             <a:r>
-              <a:rPr lang="en-US" sz="1875" b="1" dirty="0">
+              <a:rPr lang="en-US" sz="1900" b="1" dirty="0">
                 <a:solidFill>
                   <a:srgbClr val="000000"/>
                 </a:solidFill>
@@ -19696,7 +19951,7 @@
               </a:rPr>
               <a:t>Undo a pushed commit</a:t>
             </a:r>
-            <a:endParaRPr lang="en-US" sz="1875" dirty="0"/>
+            <a:endParaRPr lang="en-US" sz="1900" dirty="0"/>
           </a:p>
         </p:txBody>
       </p:sp>
@@ -19757,7 +20012,7 @@
               <a:buNone/>
             </a:pPr>
             <a:r>
-              <a:rPr lang="en-US" sz="1875" dirty="0">
+              <a:rPr lang="en-US" sz="1900" dirty="0">
                 <a:solidFill>
                   <a:srgbClr val="000000"/>
                 </a:solidFill>
@@ -19767,7 +20022,7 @@
               </a:rPr>
               <a:t>History › right-click › Revert changes in commit</a:t>
             </a:r>
-            <a:endParaRPr lang="en-US" sz="1875" dirty="0"/>
+            <a:endParaRPr lang="en-US" sz="1900" dirty="0"/>
           </a:p>
         </p:txBody>
       </p:sp>
@@ -19828,7 +20083,7 @@
               <a:buNone/>
             </a:pPr>
             <a:r>
-              <a:rPr lang="en-US" sz="1875" b="1" dirty="0">
+              <a:rPr lang="en-US" sz="1900" b="1" dirty="0">
                 <a:solidFill>
                   <a:srgbClr val="000000"/>
                 </a:solidFill>
@@ -19838,7 +20093,7 @@
               </a:rPr>
               <a:t>Edit the code</a:t>
             </a:r>
-            <a:endParaRPr lang="en-US" sz="1875" dirty="0"/>
+            <a:endParaRPr lang="en-US" sz="1900" dirty="0"/>
           </a:p>
         </p:txBody>
       </p:sp>
@@ -19899,7 +20154,7 @@
               <a:buNone/>
             </a:pPr>
             <a:r>
-              <a:rPr lang="en-US" sz="1875" dirty="0">
+              <a:rPr lang="en-US" sz="1900" dirty="0">
                 <a:solidFill>
                   <a:srgbClr val="000000"/>
                 </a:solidFill>
@@ -19909,7 +20164,7 @@
               </a:rPr>
               <a:t>Repository › Open in Visual Studio Code</a:t>
             </a:r>
-            <a:endParaRPr lang="en-US" sz="1875" dirty="0"/>
+            <a:endParaRPr lang="en-US" sz="1900" dirty="0"/>
           </a:p>
         </p:txBody>
       </p:sp>
@@ -19922,7 +20177,7 @@
         <p:spPr>
           <a:xfrm>
             <a:off x="133350" y="6191250"/>
-            <a:ext cx="1442184" cy="381000"/>
+            <a:ext cx="1409700" cy="381000"/>
           </a:xfrm>
           <a:prstGeom prst="rect">
             <a:avLst/>
@@ -20108,7 +20363,7 @@
         <p:spPr>
           <a:xfrm>
             <a:off x="2343150" y="1714500"/>
-            <a:ext cx="12258675" cy="464741"/>
+            <a:ext cx="11235690" cy="464741"/>
           </a:xfrm>
           <a:prstGeom prst="rect">
             <a:avLst/>
@@ -20129,7 +20384,7 @@
               <a:buNone/>
             </a:pPr>
             <a:r>
-              <a:rPr lang="en-US" sz="2175" dirty="0">
+              <a:rPr lang="en-US" sz="2200" dirty="0">
                 <a:solidFill>
                   <a:srgbClr val="000000"/>
                 </a:solidFill>
@@ -20139,7 +20394,7 @@
               </a:rPr>
               <a:t>You edited beam.m, but the change doesn’t appear on GitHub. What did you skip?</a:t>
             </a:r>
-            <a:endParaRPr lang="en-US" sz="2175" dirty="0"/>
+            <a:endParaRPr lang="en-US" sz="2200" dirty="0"/>
           </a:p>
         </p:txBody>
       </p:sp>
@@ -20196,7 +20451,7 @@
         <p:spPr>
           <a:xfrm>
             <a:off x="2343150" y="2522141"/>
-            <a:ext cx="12258675" cy="464741"/>
+            <a:ext cx="11235690" cy="464741"/>
           </a:xfrm>
           <a:prstGeom prst="rect">
             <a:avLst/>
@@ -20217,7 +20472,7 @@
               <a:buNone/>
             </a:pPr>
             <a:r>
-              <a:rPr lang="en-US" sz="2175" dirty="0">
+              <a:rPr lang="en-US" sz="2200" dirty="0">
                 <a:solidFill>
                   <a:srgbClr val="000000"/>
                 </a:solidFill>
@@ -20228,7 +20483,7 @@
               <a:t>What is the difference between </a:t>
             </a:r>
             <a:r>
-              <a:rPr lang="en-US" sz="2175" b="1" dirty="0">
+              <a:rPr lang="en-US" sz="2200" b="1" dirty="0">
                 <a:solidFill>
                   <a:srgbClr val="000000"/>
                 </a:solidFill>
@@ -20239,7 +20494,7 @@
               <a:t>Fetch </a:t>
             </a:r>
             <a:r>
-              <a:rPr lang="en-US" sz="2175" dirty="0">
+              <a:rPr lang="en-US" sz="2200" dirty="0">
                 <a:solidFill>
                   <a:srgbClr val="000000"/>
                 </a:solidFill>
@@ -20250,7 +20505,7 @@
               <a:t>and </a:t>
             </a:r>
             <a:r>
-              <a:rPr lang="en-US" sz="2175" b="1" dirty="0">
+              <a:rPr lang="en-US" sz="2200" b="1" dirty="0">
                 <a:solidFill>
                   <a:srgbClr val="000000"/>
                 </a:solidFill>
@@ -20261,7 +20516,7 @@
               <a:t>Pull</a:t>
             </a:r>
             <a:r>
-              <a:rPr lang="en-US" sz="2175" dirty="0">
+              <a:rPr lang="en-US" sz="2200" dirty="0">
                 <a:solidFill>
                   <a:srgbClr val="000000"/>
                 </a:solidFill>
@@ -20271,7 +20526,7 @@
               </a:rPr>
               <a:t>?</a:t>
             </a:r>
-            <a:endParaRPr lang="en-US" sz="2175" dirty="0"/>
+            <a:endParaRPr lang="en-US" sz="2200" dirty="0"/>
           </a:p>
         </p:txBody>
       </p:sp>
@@ -20328,7 +20583,7 @@
         <p:spPr>
           <a:xfrm>
             <a:off x="2343150" y="3329781"/>
-            <a:ext cx="12258675" cy="464741"/>
+            <a:ext cx="11235690" cy="464741"/>
           </a:xfrm>
           <a:prstGeom prst="rect">
             <a:avLst/>
@@ -20349,7 +20604,7 @@
               <a:buNone/>
             </a:pPr>
             <a:r>
-              <a:rPr lang="en-US" sz="2175" dirty="0">
+              <a:rPr lang="en-US" sz="2200" dirty="0">
                 <a:solidFill>
                   <a:srgbClr val="000000"/>
                 </a:solidFill>
@@ -20359,7 +20614,7 @@
               </a:rPr>
               <a:t>Why should a coding agent work on a branch instead of main?</a:t>
             </a:r>
-            <a:endParaRPr lang="en-US" sz="2175" dirty="0"/>
+            <a:endParaRPr lang="en-US" sz="2200" dirty="0"/>
           </a:p>
         </p:txBody>
       </p:sp>
@@ -20416,7 +20671,7 @@
         <p:spPr>
           <a:xfrm>
             <a:off x="2343150" y="4137422"/>
-            <a:ext cx="12258675" cy="464741"/>
+            <a:ext cx="11235690" cy="464741"/>
           </a:xfrm>
           <a:prstGeom prst="rect">
             <a:avLst/>
@@ -20437,7 +20692,7 @@
               <a:buNone/>
             </a:pPr>
             <a:r>
-              <a:rPr lang="en-US" sz="2175" dirty="0">
+              <a:rPr lang="en-US" sz="2200" dirty="0">
                 <a:solidFill>
                   <a:srgbClr val="000000"/>
                 </a:solidFill>
@@ -20447,7 +20702,7 @@
               </a:rPr>
               <a:t>Push origin is rejected. What do you do?</a:t>
             </a:r>
-            <a:endParaRPr lang="en-US" sz="2175" dirty="0"/>
+            <a:endParaRPr lang="en-US" sz="2200" dirty="0"/>
           </a:p>
         </p:txBody>
       </p:sp>
@@ -20504,7 +20759,7 @@
         <p:spPr>
           <a:xfrm>
             <a:off x="2343150" y="4945063"/>
-            <a:ext cx="12258675" cy="464741"/>
+            <a:ext cx="11235690" cy="464741"/>
           </a:xfrm>
           <a:prstGeom prst="rect">
             <a:avLst/>
@@ -20525,7 +20780,7 @@
               <a:buNone/>
             </a:pPr>
             <a:r>
-              <a:rPr lang="en-US" sz="2175" dirty="0">
+              <a:rPr lang="en-US" sz="2200" dirty="0">
                 <a:solidFill>
                   <a:srgbClr val="000000"/>
                 </a:solidFill>
@@ -20535,7 +20790,7 @@
               </a:rPr>
               <a:t>You pushed a file containing an API key, then deleted it in the next commit. Is the key safe?</a:t>
             </a:r>
-            <a:endParaRPr lang="en-US" sz="2175" dirty="0"/>
+            <a:endParaRPr lang="en-US" sz="2200" dirty="0"/>
           </a:p>
         </p:txBody>
       </p:sp>
@@ -20548,7 +20803,7 @@
         <p:spPr>
           <a:xfrm>
             <a:off x="133350" y="6191250"/>
-            <a:ext cx="1442184" cy="381000"/>
+            <a:ext cx="1409700" cy="381000"/>
           </a:xfrm>
           <a:prstGeom prst="rect">
             <a:avLst/>
@@ -20649,7 +20904,7 @@
         <p:spPr>
           <a:xfrm>
             <a:off x="2364922" y="6154879"/>
-            <a:ext cx="12258675" cy="464741"/>
+            <a:ext cx="11213918" cy="464741"/>
           </a:xfrm>
           <a:prstGeom prst="rect">
             <a:avLst/>
@@ -20670,7 +20925,7 @@
               <a:buNone/>
             </a:pPr>
             <a:r>
-              <a:rPr lang="en-US" sz="2175" dirty="0">
+              <a:rPr lang="en-US" sz="2200" dirty="0">
                 <a:solidFill>
                   <a:srgbClr val="000000"/>
                 </a:solidFill>
@@ -20680,7 +20935,7 @@
               </a:rPr>
               <a:t>Answers in slide notes. </a:t>
             </a:r>
-            <a:endParaRPr lang="en-US" sz="2175" dirty="0"/>
+            <a:endParaRPr lang="en-US" sz="2200" dirty="0"/>
           </a:p>
         </p:txBody>
       </p:sp>
@@ -20740,7 +20995,7 @@
         <p:spPr>
           <a:xfrm>
             <a:off x="1809750" y="1619250"/>
-            <a:ext cx="12845415" cy="393700"/>
+            <a:ext cx="11769090" cy="393700"/>
           </a:xfrm>
           <a:prstGeom prst="rect">
             <a:avLst/>
@@ -20856,7 +21111,7 @@
               <a:buNone/>
             </a:pPr>
             <a:r>
-              <a:rPr lang="en-US" sz="1950" b="1" dirty="0">
+              <a:rPr lang="en-US" sz="1900" b="1" dirty="0">
                 <a:solidFill>
                   <a:srgbClr val="000000"/>
                 </a:solidFill>
@@ -20866,7 +21121,7 @@
               </a:rPr>
               <a:t>GitHub account</a:t>
             </a:r>
-            <a:endParaRPr lang="en-US" sz="1950" dirty="0"/>
+            <a:endParaRPr lang="en-US" sz="1900" dirty="0"/>
           </a:p>
         </p:txBody>
       </p:sp>
@@ -20927,7 +21182,7 @@
               <a:buNone/>
             </a:pPr>
             <a:r>
-              <a:rPr lang="en-US" sz="1950" dirty="0">
+              <a:rPr lang="en-US" sz="1900" dirty="0">
                 <a:solidFill>
                   <a:srgbClr val="000000"/>
                 </a:solidFill>
@@ -20937,7 +21192,7 @@
               </a:rPr>
               <a:t>Sign up at github.com. Use the account type your organization directs (personal or institutional). Turn on two-factor authentication.</a:t>
             </a:r>
-            <a:endParaRPr lang="en-US" sz="1950" dirty="0"/>
+            <a:endParaRPr lang="en-US" sz="1900" dirty="0"/>
           </a:p>
         </p:txBody>
       </p:sp>
@@ -20998,7 +21253,7 @@
               <a:buNone/>
             </a:pPr>
             <a:r>
-              <a:rPr lang="en-US" sz="1950" b="1" dirty="0">
+              <a:rPr lang="en-US" sz="1900" b="1" dirty="0">
                 <a:solidFill>
                   <a:srgbClr val="000000"/>
                 </a:solidFill>
@@ -21008,7 +21263,7 @@
               </a:rPr>
               <a:t>GitHub Desktop</a:t>
             </a:r>
-            <a:endParaRPr lang="en-US" sz="1950" dirty="0"/>
+            <a:endParaRPr lang="en-US" sz="1900" dirty="0"/>
           </a:p>
         </p:txBody>
       </p:sp>
@@ -21069,7 +21324,7 @@
               <a:buNone/>
             </a:pPr>
             <a:r>
-              <a:rPr lang="en-US" sz="1950" dirty="0">
+              <a:rPr lang="en-US" sz="1900" dirty="0">
                 <a:solidFill>
                   <a:srgbClr val="000000"/>
                 </a:solidFill>
@@ -21079,7 +21334,7 @@
               </a:rPr>
               <a:t>Install from desktop.github.com. On a managed laptop, check with IT first.</a:t>
             </a:r>
-            <a:endParaRPr lang="en-US" sz="1950" dirty="0"/>
+            <a:endParaRPr lang="en-US" sz="1900" dirty="0"/>
           </a:p>
         </p:txBody>
       </p:sp>
@@ -21140,7 +21395,7 @@
               <a:buNone/>
             </a:pPr>
             <a:r>
-              <a:rPr lang="en-US" sz="1950" b="1" dirty="0">
+              <a:rPr lang="en-US" sz="1900" b="1" dirty="0">
                 <a:solidFill>
                   <a:srgbClr val="000000"/>
                 </a:solidFill>
@@ -21150,7 +21405,7 @@
               </a:rPr>
               <a:t>Text editor</a:t>
             </a:r>
-            <a:endParaRPr lang="en-US" sz="1950" dirty="0"/>
+            <a:endParaRPr lang="en-US" sz="1900" dirty="0"/>
           </a:p>
         </p:txBody>
       </p:sp>
@@ -21211,7 +21466,7 @@
               <a:buNone/>
             </a:pPr>
             <a:r>
-              <a:rPr lang="en-US" sz="1950" dirty="0">
+              <a:rPr lang="en-US" sz="1900" dirty="0">
                 <a:solidFill>
                   <a:srgbClr val="000000"/>
                 </a:solidFill>
@@ -21221,7 +21476,7 @@
               </a:rPr>
               <a:t>VS Code recommended. GitHub Desktop can open repos in it directly.</a:t>
             </a:r>
-            <a:endParaRPr lang="en-US" sz="1950" dirty="0"/>
+            <a:endParaRPr lang="en-US" sz="1900" dirty="0"/>
           </a:p>
         </p:txBody>
       </p:sp>
@@ -21282,7 +21537,7 @@
               <a:buNone/>
             </a:pPr>
             <a:r>
-              <a:rPr lang="en-US" sz="1950" b="1" dirty="0">
+              <a:rPr lang="en-US" sz="1900" b="1" dirty="0">
                 <a:solidFill>
                   <a:srgbClr val="000000"/>
                 </a:solidFill>
@@ -21292,7 +21547,7 @@
               </a:rPr>
               <a:t>MATLAB (optional)</a:t>
             </a:r>
-            <a:endParaRPr lang="en-US" sz="1950" dirty="0"/>
+            <a:endParaRPr lang="en-US" sz="1900" dirty="0"/>
           </a:p>
         </p:txBody>
       </p:sp>
@@ -21353,7 +21608,7 @@
               <a:buNone/>
             </a:pPr>
             <a:r>
-              <a:rPr lang="en-US" sz="1950" dirty="0">
+              <a:rPr lang="en-US" sz="1900" dirty="0">
                 <a:solidFill>
                   <a:srgbClr val="000000"/>
                 </a:solidFill>
@@ -21363,7 +21618,7 @@
               </a:rPr>
               <a:t>Lets you run the practice project. Not required to learn Git.</a:t>
             </a:r>
-            <a:endParaRPr lang="en-US" sz="1950" dirty="0"/>
+            <a:endParaRPr lang="en-US" sz="1900" dirty="0"/>
           </a:p>
         </p:txBody>
       </p:sp>
@@ -21424,7 +21679,7 @@
               <a:buNone/>
             </a:pPr>
             <a:r>
-              <a:rPr lang="en-US" sz="1950" b="1" dirty="0">
+              <a:rPr lang="en-US" sz="1900" b="1" dirty="0">
                 <a:solidFill>
                   <a:srgbClr val="000000"/>
                 </a:solidFill>
@@ -21434,7 +21689,7 @@
               </a:rPr>
               <a:t>Practice repo link</a:t>
             </a:r>
-            <a:endParaRPr lang="en-US" sz="1950" dirty="0"/>
+            <a:endParaRPr lang="en-US" sz="1900" dirty="0"/>
           </a:p>
         </p:txBody>
       </p:sp>
@@ -21495,7 +21750,7 @@
               <a:buNone/>
             </a:pPr>
             <a:r>
-              <a:rPr lang="en-US" sz="1950" dirty="0">
+              <a:rPr lang="en-US" sz="1900" dirty="0">
                 <a:solidFill>
                   <a:srgbClr val="000000"/>
                 </a:solidFill>
@@ -21517,7 +21772,7 @@
               <a:t>beam-calc</a:t>
             </a:r>
             <a:r>
-              <a:rPr lang="en-US" sz="1950" dirty="0">
+              <a:rPr lang="en-US" sz="1900" dirty="0">
                 <a:solidFill>
                   <a:srgbClr val="000000"/>
                 </a:solidFill>
@@ -21539,7 +21794,7 @@
               <a:rPr lang="en-US" sz="2000" dirty="0"/>
               <a:t> </a:t>
             </a:r>
-            <a:endParaRPr lang="en-US" sz="1950" dirty="0">
+            <a:endParaRPr lang="en-US" sz="1900" dirty="0">
               <a:solidFill>
                 <a:srgbClr val="000000"/>
               </a:solidFill>
@@ -21559,25 +21814,25 @@
         <p:spPr>
           <a:xfrm>
             <a:off x="1809750" y="6259810"/>
-            <a:ext cx="12845415" cy="368300"/>
-          </a:xfrm>
-          <a:prstGeom prst="rect">
-            <a:avLst/>
-          </a:prstGeom>
-          <a:noFill/>
-          <a:ln/>
-        </p:spPr>
-        <p:txBody>
-          <a:bodyPr wrap="square" lIns="25400" tIns="25400" rIns="25400" bIns="25400" rtlCol="0" anchor="t">
-            <a:normAutofit/>
-          </a:bodyPr>
-          <a:lstStyle/>
-          <a:p>
-            <a:pPr marL="0" indent="0" algn="l">
-              <a:buNone/>
-            </a:pPr>
-            <a:r>
-              <a:rPr lang="en-US" sz="1950" dirty="0">
+            <a:ext cx="11769090" cy="368300"/>
+          </a:xfrm>
+          <a:prstGeom prst="rect">
+            <a:avLst/>
+          </a:prstGeom>
+          <a:noFill/>
+          <a:ln/>
+        </p:spPr>
+        <p:txBody>
+          <a:bodyPr wrap="square" lIns="25400" tIns="25400" rIns="25400" bIns="25400" rtlCol="0" anchor="t">
+            <a:normAutofit/>
+          </a:bodyPr>
+          <a:lstStyle/>
+          <a:p>
+            <a:pPr marL="0" indent="0" algn="l">
+              <a:buNone/>
+            </a:pPr>
+            <a:r>
+              <a:rPr lang="en-US" sz="1900" dirty="0">
                 <a:solidFill>
                   <a:srgbClr val="404040"/>
                 </a:solidFill>
@@ -21587,7 +21842,7 @@
               </a:rPr>
               <a:t>You do not need the Git command line for this course. GitHub Desktop includes Git.</a:t>
             </a:r>
-            <a:endParaRPr lang="en-US" sz="1950" dirty="0"/>
+            <a:endParaRPr lang="en-US" sz="1900" dirty="0"/>
           </a:p>
         </p:txBody>
       </p:sp>
@@ -21600,7 +21855,7 @@
         <p:spPr>
           <a:xfrm>
             <a:off x="133350" y="2381250"/>
-            <a:ext cx="1442184" cy="381000"/>
+            <a:ext cx="1409700" cy="381000"/>
           </a:xfrm>
           <a:prstGeom prst="rect">
             <a:avLst/>
@@ -21760,7 +22015,7 @@
               <a:buNone/>
             </a:pPr>
             <a:r>
-              <a:rPr lang="en-US" sz="2250" b="1" dirty="0">
+              <a:rPr lang="en-US" sz="2200" b="1" dirty="0">
                 <a:solidFill>
                   <a:srgbClr val="000000"/>
                 </a:solidFill>
@@ -21770,7 +22025,7 @@
               </a:rPr>
               <a:t>Without it</a:t>
             </a:r>
-            <a:endParaRPr lang="en-US" sz="2250" dirty="0"/>
+            <a:endParaRPr lang="en-US" sz="2200" dirty="0"/>
           </a:p>
         </p:txBody>
       </p:sp>
@@ -21972,7 +22227,7 @@
               <a:buNone/>
             </a:pPr>
             <a:r>
-              <a:rPr lang="en-US" sz="1950" dirty="0">
+              <a:rPr lang="en-US" sz="1900" dirty="0">
                 <a:solidFill>
                   <a:srgbClr val="404040"/>
                 </a:solidFill>
@@ -21982,7 +22237,7 @@
               </a:rPr>
               <a:t>Which one is current? What changed between them, and why?</a:t>
             </a:r>
-            <a:endParaRPr lang="en-US" sz="1950" dirty="0"/>
+            <a:endParaRPr lang="en-US" sz="1900" dirty="0"/>
           </a:p>
         </p:txBody>
       </p:sp>
@@ -21995,25 +22250,25 @@
         <p:spPr>
           <a:xfrm>
             <a:off x="7820025" y="1619250"/>
-            <a:ext cx="6234113" cy="419100"/>
-          </a:xfrm>
-          <a:prstGeom prst="rect">
-            <a:avLst/>
-          </a:prstGeom>
-          <a:noFill/>
-          <a:ln/>
-        </p:spPr>
-        <p:txBody>
-          <a:bodyPr wrap="square" lIns="25400" tIns="25400" rIns="25400" bIns="25400" rtlCol="0" anchor="t">
-            <a:normAutofit/>
-          </a:bodyPr>
-          <a:lstStyle/>
-          <a:p>
-            <a:pPr marL="0" indent="0" algn="l">
-              <a:buNone/>
-            </a:pPr>
-            <a:r>
-              <a:rPr lang="en-US" sz="2250" b="1" dirty="0">
+            <a:ext cx="5758815" cy="419100"/>
+          </a:xfrm>
+          <a:prstGeom prst="rect">
+            <a:avLst/>
+          </a:prstGeom>
+          <a:noFill/>
+          <a:ln/>
+        </p:spPr>
+        <p:txBody>
+          <a:bodyPr wrap="square" lIns="25400" tIns="25400" rIns="25400" bIns="25400" rtlCol="0" anchor="t">
+            <a:normAutofit/>
+          </a:bodyPr>
+          <a:lstStyle/>
+          <a:p>
+            <a:pPr marL="0" indent="0" algn="l">
+              <a:buNone/>
+            </a:pPr>
+            <a:r>
+              <a:rPr lang="en-US" sz="2200" b="1" dirty="0">
                 <a:solidFill>
                   <a:srgbClr val="000000"/>
                 </a:solidFill>
@@ -22023,7 +22278,7 @@
               </a:rPr>
               <a:t>With Git</a:t>
             </a:r>
-            <a:endParaRPr lang="en-US" sz="2250" dirty="0"/>
+            <a:endParaRPr lang="en-US" sz="2200" dirty="0"/>
           </a:p>
         </p:txBody>
       </p:sp>
@@ -22172,7 +22427,7 @@
         <p:spPr>
           <a:xfrm>
             <a:off x="7820025" y="4301331"/>
-            <a:ext cx="5837396" cy="731441"/>
+            <a:ext cx="5758815" cy="731441"/>
           </a:xfrm>
           <a:prstGeom prst="rect">
             <a:avLst/>
@@ -22193,7 +22448,7 @@
               <a:buNone/>
             </a:pPr>
             <a:r>
-              <a:rPr lang="en-US" sz="1950" dirty="0">
+              <a:rPr lang="en-US" sz="1900" dirty="0">
                 <a:solidFill>
                   <a:srgbClr val="404040"/>
                 </a:solidFill>
@@ -22203,7 +22458,7 @@
               </a:rPr>
               <a:t>One file. Every saved version, with who, when, and why.</a:t>
             </a:r>
-            <a:endParaRPr lang="en-US" sz="1950" dirty="0"/>
+            <a:endParaRPr lang="en-US" sz="1900" dirty="0"/>
           </a:p>
         </p:txBody>
       </p:sp>
@@ -22261,7 +22516,7 @@
               <a:buNone/>
             </a:pPr>
             <a:r>
-              <a:rPr lang="en-US" sz="1950" b="1" dirty="0">
+              <a:rPr lang="en-US" sz="1900" b="1" dirty="0">
                 <a:solidFill>
                   <a:srgbClr val="152A47"/>
                 </a:solidFill>
@@ -22271,7 +22526,7 @@
               </a:rPr>
               <a:t>History</a:t>
             </a:r>
-            <a:endParaRPr lang="en-US" sz="1950" dirty="0"/>
+            <a:endParaRPr lang="en-US" sz="1900" dirty="0"/>
           </a:p>
         </p:txBody>
       </p:sp>
@@ -22373,7 +22628,7 @@
               <a:buNone/>
             </a:pPr>
             <a:r>
-              <a:rPr lang="en-US" sz="1950" b="1" dirty="0">
+              <a:rPr lang="en-US" sz="1900" b="1" dirty="0">
                 <a:solidFill>
                   <a:srgbClr val="152A47"/>
                 </a:solidFill>
@@ -22383,7 +22638,7 @@
               </a:rPr>
               <a:t>Undo</a:t>
             </a:r>
-            <a:endParaRPr lang="en-US" sz="1950" dirty="0"/>
+            <a:endParaRPr lang="en-US" sz="1900" dirty="0"/>
           </a:p>
         </p:txBody>
       </p:sp>
@@ -22485,7 +22740,7 @@
               <a:buNone/>
             </a:pPr>
             <a:r>
-              <a:rPr lang="en-US" sz="1950" b="1" dirty="0">
+              <a:rPr lang="en-US" sz="1900" b="1" dirty="0">
                 <a:solidFill>
                   <a:srgbClr val="152A47"/>
                 </a:solidFill>
@@ -22495,7 +22750,7 @@
               </a:rPr>
               <a:t>Parallel work</a:t>
             </a:r>
-            <a:endParaRPr lang="en-US" sz="1950" dirty="0"/>
+            <a:endParaRPr lang="en-US" sz="1900" dirty="0"/>
           </a:p>
         </p:txBody>
       </p:sp>
@@ -22597,7 +22852,7 @@
               <a:buNone/>
             </a:pPr>
             <a:r>
-              <a:rPr lang="en-US" sz="1950" b="1" dirty="0">
+              <a:rPr lang="en-US" sz="1900" b="1" dirty="0">
                 <a:solidFill>
                   <a:srgbClr val="152A47"/>
                 </a:solidFill>
@@ -22607,7 +22862,7 @@
               </a:rPr>
               <a:t>Review</a:t>
             </a:r>
-            <a:endParaRPr lang="en-US" sz="1950" dirty="0"/>
+            <a:endParaRPr lang="en-US" sz="1900" dirty="0"/>
           </a:p>
         </p:txBody>
       </p:sp>
@@ -22664,7 +22919,7 @@
         <p:spPr>
           <a:xfrm>
             <a:off x="133350" y="2762250"/>
-            <a:ext cx="1442184" cy="381000"/>
+            <a:ext cx="1409700" cy="381000"/>
           </a:xfrm>
           <a:prstGeom prst="rect">
             <a:avLst/>
@@ -22855,7 +23110,7 @@
               <a:buNone/>
             </a:pPr>
             <a:r>
-              <a:rPr lang="en-US" sz="2250" b="1" dirty="0">
+              <a:rPr lang="en-US" sz="2200" b="1" dirty="0">
                 <a:solidFill>
                   <a:srgbClr val="000000"/>
                 </a:solidFill>
@@ -22865,7 +23120,7 @@
               </a:rPr>
               <a:t>Local repo</a:t>
             </a:r>
-            <a:endParaRPr lang="en-US" sz="2250" dirty="0"/>
+            <a:endParaRPr lang="en-US" sz="2200" dirty="0"/>
           </a:p>
         </p:txBody>
       </p:sp>
@@ -22948,114 +23203,6 @@
               <a:t>push</a:t>
             </a:r>
             <a:endParaRPr lang="en-US" sz="1800" dirty="0"/>
-          </a:p>
-        </p:txBody>
-      </p:sp>
-      <p:sp>
-        <p:nvSpPr>
-          <p:cNvPr id="7" name="Shape 19"/>
-          <p:cNvSpPr/>
-          <p:nvPr/>
-        </p:nvSpPr>
-        <p:spPr>
-          <a:xfrm>
-            <a:off x="5791200" y="2073275"/>
-            <a:ext cx="3714750" cy="28575"/>
-          </a:xfrm>
-          <a:prstGeom prst="rect">
-            <a:avLst/>
-          </a:prstGeom>
-          <a:solidFill>
-            <a:srgbClr val="000000"/>
-          </a:solidFill>
-          <a:ln/>
-        </p:spPr>
-        <p:txBody>
-          <a:bodyPr/>
-          <a:lstStyle/>
-          <a:p>
-            <a:endParaRPr lang="en-US"/>
-          </a:p>
-        </p:txBody>
-      </p:sp>
-      <p:sp>
-        <p:nvSpPr>
-          <p:cNvPr id="8" name="Shape 20"/>
-          <p:cNvSpPr/>
-          <p:nvPr/>
-        </p:nvSpPr>
-        <p:spPr>
-          <a:xfrm>
-            <a:off x="9372600" y="1997075"/>
-            <a:ext cx="152400" cy="165100"/>
-          </a:xfrm>
-          <a:prstGeom prst="rect">
-            <a:avLst/>
-          </a:prstGeom>
-          <a:solidFill>
-            <a:srgbClr val="000000"/>
-          </a:solidFill>
-          <a:ln/>
-        </p:spPr>
-        <p:txBody>
-          <a:bodyPr/>
-          <a:lstStyle/>
-          <a:p>
-            <a:endParaRPr lang="en-US"/>
-          </a:p>
-        </p:txBody>
-      </p:sp>
-      <p:sp>
-        <p:nvSpPr>
-          <p:cNvPr id="9" name="Shape 21"/>
-          <p:cNvSpPr/>
-          <p:nvPr/>
-        </p:nvSpPr>
-        <p:spPr>
-          <a:xfrm>
-            <a:off x="5791200" y="2349500"/>
-            <a:ext cx="3714750" cy="28575"/>
-          </a:xfrm>
-          <a:prstGeom prst="rect">
-            <a:avLst/>
-          </a:prstGeom>
-          <a:solidFill>
-            <a:srgbClr val="000000"/>
-          </a:solidFill>
-          <a:ln/>
-        </p:spPr>
-        <p:txBody>
-          <a:bodyPr/>
-          <a:lstStyle/>
-          <a:p>
-            <a:endParaRPr lang="en-US"/>
-          </a:p>
-        </p:txBody>
-      </p:sp>
-      <p:sp>
-        <p:nvSpPr>
-          <p:cNvPr id="10" name="Shape 22"/>
-          <p:cNvSpPr/>
-          <p:nvPr/>
-        </p:nvSpPr>
-        <p:spPr>
-          <a:xfrm>
-            <a:off x="5772150" y="2273300"/>
-            <a:ext cx="152400" cy="165100"/>
-          </a:xfrm>
-          <a:prstGeom prst="rect">
-            <a:avLst/>
-          </a:prstGeom>
-          <a:solidFill>
-            <a:srgbClr val="000000"/>
-          </a:solidFill>
-          <a:ln/>
-        </p:spPr>
-        <p:txBody>
-          <a:bodyPr/>
-          <a:lstStyle/>
-          <a:p>
-            <a:endParaRPr lang="en-US"/>
           </a:p>
         </p:txBody>
       </p:sp>
@@ -23158,7 +23305,7 @@
               <a:buNone/>
             </a:pPr>
             <a:r>
-              <a:rPr lang="en-US" sz="2250" b="1" dirty="0">
+              <a:rPr lang="en-US" sz="2200" b="1" dirty="0">
                 <a:solidFill>
                   <a:srgbClr val="000000"/>
                 </a:solidFill>
@@ -23168,7 +23315,7 @@
               </a:rPr>
               <a:t>Remote repo</a:t>
             </a:r>
-            <a:endParaRPr lang="en-US" sz="2250" dirty="0"/>
+            <a:endParaRPr lang="en-US" sz="2200" dirty="0"/>
           </a:p>
         </p:txBody>
       </p:sp>
@@ -23267,7 +23414,7 @@
               <a:buNone/>
             </a:pPr>
             <a:r>
-              <a:rPr lang="en-US" sz="2250" b="1" dirty="0">
+              <a:rPr lang="en-US" sz="2200" b="1" dirty="0">
                 <a:solidFill>
                   <a:srgbClr val="000000"/>
                 </a:solidFill>
@@ -23277,7 +23424,7 @@
               </a:rPr>
               <a:t>Git</a:t>
             </a:r>
-            <a:endParaRPr lang="en-US" sz="2250" dirty="0"/>
+            <a:endParaRPr lang="en-US" sz="2200" dirty="0"/>
           </a:p>
         </p:txBody>
       </p:sp>
@@ -23311,7 +23458,7 @@
               <a:buNone/>
             </a:pPr>
             <a:r>
-              <a:rPr lang="en-US" sz="1950" dirty="0">
+              <a:rPr lang="en-US" sz="1900" dirty="0">
                 <a:solidFill>
                   <a:srgbClr val="000000"/>
                 </a:solidFill>
@@ -23322,7 +23469,7 @@
               <a:t>Version control software. Runs on your computer. Stores history in a hidden </a:t>
             </a:r>
             <a:r>
-              <a:rPr lang="en-US" sz="1725" dirty="0">
+              <a:rPr lang="en-US" sz="1700" dirty="0">
                 <a:solidFill>
                   <a:srgbClr val="000000"/>
                 </a:solidFill>
@@ -23333,7 +23480,7 @@
               <a:t>.git </a:t>
             </a:r>
             <a:r>
-              <a:rPr lang="en-US" sz="1950" dirty="0">
+              <a:rPr lang="en-US" sz="1900" dirty="0">
                 <a:solidFill>
                   <a:srgbClr val="000000"/>
                 </a:solidFill>
@@ -23343,7 +23490,7 @@
               </a:rPr>
               <a:t>folder in the project.</a:t>
             </a:r>
-            <a:endParaRPr lang="en-US" sz="1950" dirty="0"/>
+            <a:endParaRPr lang="en-US" sz="1900" dirty="0"/>
           </a:p>
         </p:txBody>
       </p:sp>
@@ -23401,7 +23548,7 @@
               <a:buNone/>
             </a:pPr>
             <a:r>
-              <a:rPr lang="en-US" sz="2250" b="1" dirty="0">
+              <a:rPr lang="en-US" sz="2200" b="1" dirty="0">
                 <a:solidFill>
                   <a:srgbClr val="000000"/>
                 </a:solidFill>
@@ -23411,7 +23558,7 @@
               </a:rPr>
               <a:t>GitHub</a:t>
             </a:r>
-            <a:endParaRPr lang="en-US" sz="2250" dirty="0"/>
+            <a:endParaRPr lang="en-US" sz="2200" dirty="0"/>
           </a:p>
         </p:txBody>
       </p:sp>
@@ -23445,7 +23592,7 @@
               <a:buNone/>
             </a:pPr>
             <a:r>
-              <a:rPr lang="en-US" sz="1950" dirty="0">
+              <a:rPr lang="en-US" sz="1900" dirty="0">
                 <a:solidFill>
                   <a:srgbClr val="000000"/>
                 </a:solidFill>
@@ -23455,7 +23602,7 @@
               </a:rPr>
               <a:t>A website that hosts repos. Adds sharing, pull requests, and access control. Coding agents connect here.</a:t>
             </a:r>
-            <a:endParaRPr lang="en-US" sz="1950" dirty="0"/>
+            <a:endParaRPr lang="en-US" sz="1900" dirty="0"/>
           </a:p>
         </p:txBody>
       </p:sp>
@@ -23495,25 +23642,25 @@
         <p:spPr>
           <a:xfrm>
             <a:off x="9747250" y="3403600"/>
-            <a:ext cx="4114165" cy="419100"/>
-          </a:xfrm>
-          <a:prstGeom prst="rect">
-            <a:avLst/>
-          </a:prstGeom>
-          <a:noFill/>
-          <a:ln/>
-        </p:spPr>
-        <p:txBody>
-          <a:bodyPr wrap="square" lIns="25400" tIns="25400" rIns="25400" bIns="25400" rtlCol="0" anchor="t">
-            <a:normAutofit/>
-          </a:bodyPr>
-          <a:lstStyle/>
-          <a:p>
-            <a:pPr marL="0" indent="0" algn="l">
-              <a:buNone/>
-            </a:pPr>
-            <a:r>
-              <a:rPr lang="en-US" sz="2250" b="1" dirty="0">
+            <a:ext cx="3831590" cy="419100"/>
+          </a:xfrm>
+          <a:prstGeom prst="rect">
+            <a:avLst/>
+          </a:prstGeom>
+          <a:noFill/>
+          <a:ln/>
+        </p:spPr>
+        <p:txBody>
+          <a:bodyPr wrap="square" lIns="25400" tIns="25400" rIns="25400" bIns="25400" rtlCol="0" anchor="t">
+            <a:normAutofit/>
+          </a:bodyPr>
+          <a:lstStyle/>
+          <a:p>
+            <a:pPr marL="0" indent="0" algn="l">
+              <a:buNone/>
+            </a:pPr>
+            <a:r>
+              <a:rPr lang="en-US" sz="2200" b="1" dirty="0">
                 <a:solidFill>
                   <a:srgbClr val="000000"/>
                 </a:solidFill>
@@ -23523,7 +23670,7 @@
               </a:rPr>
               <a:t>GitHub Desktop</a:t>
             </a:r>
-            <a:endParaRPr lang="en-US" sz="2250" dirty="0"/>
+            <a:endParaRPr lang="en-US" sz="2200" dirty="0"/>
           </a:p>
         </p:txBody>
       </p:sp>
@@ -23536,7 +23683,7 @@
         <p:spPr>
           <a:xfrm>
             <a:off x="9747250" y="3898900"/>
-            <a:ext cx="3852355" cy="1078111"/>
+            <a:ext cx="3831590" cy="1078111"/>
           </a:xfrm>
           <a:prstGeom prst="rect">
             <a:avLst/>
@@ -23557,7 +23704,7 @@
               <a:buNone/>
             </a:pPr>
             <a:r>
-              <a:rPr lang="en-US" sz="1950" dirty="0">
+              <a:rPr lang="en-US" sz="1900" dirty="0">
                 <a:solidFill>
                   <a:srgbClr val="000000"/>
                 </a:solidFill>
@@ -23567,7 +23714,7 @@
               </a:rPr>
               <a:t>A free app with buttons for Git commands. Links your local repo to GitHub.</a:t>
             </a:r>
-            <a:endParaRPr lang="en-US" sz="1950" dirty="0"/>
+            <a:endParaRPr lang="en-US" sz="1900" dirty="0"/>
           </a:p>
         </p:txBody>
       </p:sp>
@@ -23580,25 +23727,25 @@
         <p:spPr>
           <a:xfrm>
             <a:off x="1809750" y="5628481"/>
-            <a:ext cx="12845415" cy="368300"/>
-          </a:xfrm>
-          <a:prstGeom prst="rect">
-            <a:avLst/>
-          </a:prstGeom>
-          <a:noFill/>
-          <a:ln/>
-        </p:spPr>
-        <p:txBody>
-          <a:bodyPr wrap="square" lIns="25400" tIns="25400" rIns="25400" bIns="25400" rtlCol="0" anchor="t">
-            <a:normAutofit/>
-          </a:bodyPr>
-          <a:lstStyle/>
-          <a:p>
-            <a:pPr marL="0" indent="0" algn="l">
-              <a:buNone/>
-            </a:pPr>
-            <a:r>
-              <a:rPr lang="en-US" sz="1950" dirty="0">
+            <a:ext cx="11769090" cy="368300"/>
+          </a:xfrm>
+          <a:prstGeom prst="rect">
+            <a:avLst/>
+          </a:prstGeom>
+          <a:noFill/>
+          <a:ln/>
+        </p:spPr>
+        <p:txBody>
+          <a:bodyPr wrap="square" lIns="25400" tIns="25400" rIns="25400" bIns="25400" rtlCol="0" anchor="t">
+            <a:normAutofit/>
+          </a:bodyPr>
+          <a:lstStyle/>
+          <a:p>
+            <a:pPr marL="0" indent="0" algn="l">
+              <a:buNone/>
+            </a:pPr>
+            <a:r>
+              <a:rPr lang="en-US" sz="1900" dirty="0">
                 <a:solidFill>
                   <a:srgbClr val="404040"/>
                 </a:solidFill>
@@ -23608,7 +23755,7 @@
               </a:rPr>
               <a:t>Git works offline. GitHub is only needed to share or back up your work.</a:t>
             </a:r>
-            <a:endParaRPr lang="en-US" sz="1950" dirty="0"/>
+            <a:endParaRPr lang="en-US" sz="1900" dirty="0"/>
           </a:p>
         </p:txBody>
       </p:sp>
@@ -23621,7 +23768,7 @@
         <p:spPr>
           <a:xfrm>
             <a:off x="133350" y="2762250"/>
-            <a:ext cx="1442184" cy="381000"/>
+            <a:ext cx="1409700" cy="381000"/>
           </a:xfrm>
           <a:prstGeom prst="rect">
             <a:avLst/>
@@ -23707,6 +23854,78 @@
           </a:p>
         </p:txBody>
       </p:sp>
+      <p:cxnSp>
+        <p:nvCxnSpPr>
+          <p:cNvPr id="28" name="Push arrow"/>
+          <p:cNvCxnSpPr/>
+          <p:nvPr/>
+        </p:nvCxnSpPr>
+        <p:spPr>
+          <a:xfrm>
+            <a:off x="5788152" y="2089404"/>
+            <a:ext cx="3739896" cy="0"/>
+          </a:xfrm>
+          <a:prstGeom prst="line">
+            <a:avLst/>
+          </a:prstGeom>
+          <a:ln w="28575">
+            <a:solidFill>
+              <a:srgbClr val="000000"/>
+            </a:solidFill>
+            <a:tailEnd type="triangle" w="med" len="med"/>
+          </a:ln>
+        </p:spPr>
+        <p:style>
+          <a:lnRef idx="2">
+            <a:schemeClr val="accent1"/>
+          </a:lnRef>
+          <a:fillRef idx="0">
+            <a:schemeClr val="accent1"/>
+          </a:fillRef>
+          <a:effectRef idx="1">
+            <a:schemeClr val="accent1"/>
+          </a:effectRef>
+          <a:fontRef idx="minor">
+            <a:schemeClr val="tx1"/>
+          </a:fontRef>
+        </p:style>
+      </p:cxnSp>
+      <p:cxnSp>
+        <p:nvCxnSpPr>
+          <p:cNvPr id="29" name="Fetch/pull arrow"/>
+          <p:cNvCxnSpPr/>
+          <p:nvPr/>
+        </p:nvCxnSpPr>
+        <p:spPr>
+          <a:xfrm flipH="1">
+            <a:off x="5769864" y="2363724"/>
+            <a:ext cx="3730752" cy="0"/>
+          </a:xfrm>
+          <a:prstGeom prst="line">
+            <a:avLst/>
+          </a:prstGeom>
+          <a:ln w="28575">
+            <a:solidFill>
+              <a:srgbClr val="000000"/>
+            </a:solidFill>
+            <a:tailEnd type="triangle" w="med" len="med"/>
+          </a:ln>
+        </p:spPr>
+        <p:style>
+          <a:lnRef idx="2">
+            <a:schemeClr val="accent1"/>
+          </a:lnRef>
+          <a:fillRef idx="0">
+            <a:schemeClr val="accent1"/>
+          </a:fillRef>
+          <a:effectRef idx="1">
+            <a:schemeClr val="accent1"/>
+          </a:effectRef>
+          <a:fontRef idx="minor">
+            <a:schemeClr val="tx1"/>
+          </a:fontRef>
+        </p:style>
+      </p:cxnSp>
     </p:spTree>
   </p:cSld>
   <p:clrMapOvr>
@@ -23811,7 +24030,7 @@
               <a:buNone/>
             </a:pPr>
             <a:r>
-              <a:rPr lang="en-US" sz="1875" b="1" dirty="0">
+              <a:rPr lang="en-US" sz="1900" b="1" dirty="0">
                 <a:solidFill>
                   <a:srgbClr val="FFFFFF"/>
                 </a:solidFill>
@@ -23821,7 +24040,7 @@
               </a:rPr>
               <a:t>Term</a:t>
             </a:r>
-            <a:endParaRPr lang="en-US" sz="1875" dirty="0"/>
+            <a:endParaRPr lang="en-US" sz="1900" dirty="0"/>
           </a:p>
         </p:txBody>
       </p:sp>
@@ -23882,7 +24101,7 @@
               <a:buNone/>
             </a:pPr>
             <a:r>
-              <a:rPr lang="en-US" sz="1875" b="1" dirty="0">
+              <a:rPr lang="en-US" sz="1900" b="1" dirty="0">
                 <a:solidFill>
                   <a:srgbClr val="FFFFFF"/>
                 </a:solidFill>
@@ -23892,7 +24111,7 @@
               </a:rPr>
               <a:t>Meaning</a:t>
             </a:r>
-            <a:endParaRPr lang="en-US" sz="1875" dirty="0"/>
+            <a:endParaRPr lang="en-US" sz="1900" dirty="0"/>
           </a:p>
         </p:txBody>
       </p:sp>
@@ -23953,7 +24172,7 @@
               <a:buNone/>
             </a:pPr>
             <a:r>
-              <a:rPr lang="en-US" sz="1875" b="1" dirty="0">
+              <a:rPr lang="en-US" sz="1900" b="1" dirty="0">
                 <a:solidFill>
                   <a:srgbClr val="FFFFFF"/>
                 </a:solidFill>
@@ -23963,7 +24182,7 @@
               </a:rPr>
               <a:t>GitHub Desktop</a:t>
             </a:r>
-            <a:endParaRPr lang="en-US" sz="1875" dirty="0"/>
+            <a:endParaRPr lang="en-US" sz="1900" dirty="0"/>
           </a:p>
         </p:txBody>
       </p:sp>
@@ -24024,7 +24243,7 @@
               <a:buNone/>
             </a:pPr>
             <a:r>
-              <a:rPr lang="en-US" sz="1875" b="1" dirty="0">
+              <a:rPr lang="en-US" sz="1900" b="1" dirty="0">
                 <a:solidFill>
                   <a:srgbClr val="000000"/>
                 </a:solidFill>
@@ -24034,7 +24253,7 @@
               </a:rPr>
               <a:t>Repository</a:t>
             </a:r>
-            <a:endParaRPr lang="en-US" sz="1875" dirty="0"/>
+            <a:endParaRPr lang="en-US" sz="1900" dirty="0"/>
           </a:p>
         </p:txBody>
       </p:sp>
@@ -24095,7 +24314,7 @@
               <a:buNone/>
             </a:pPr>
             <a:r>
-              <a:rPr lang="en-US" sz="1875" dirty="0">
+              <a:rPr lang="en-US" sz="1900" dirty="0">
                 <a:solidFill>
                   <a:srgbClr val="000000"/>
                 </a:solidFill>
@@ -24105,7 +24324,7 @@
               </a:rPr>
               <a:t>A project folder whose full history Git tracks</a:t>
             </a:r>
-            <a:endParaRPr lang="en-US" sz="1875" dirty="0"/>
+            <a:endParaRPr lang="en-US" sz="1900" dirty="0"/>
           </a:p>
         </p:txBody>
       </p:sp>
@@ -24166,7 +24385,7 @@
               <a:buNone/>
             </a:pPr>
             <a:r>
-              <a:rPr lang="en-US" sz="1875" dirty="0">
+              <a:rPr lang="en-US" sz="1900" dirty="0">
                 <a:solidFill>
                   <a:srgbClr val="000000"/>
                 </a:solidFill>
@@ -24176,7 +24395,7 @@
               </a:rPr>
               <a:t>New / Add / Clone repository</a:t>
             </a:r>
-            <a:endParaRPr lang="en-US" sz="1875" dirty="0"/>
+            <a:endParaRPr lang="en-US" sz="1900" dirty="0"/>
           </a:p>
         </p:txBody>
       </p:sp>
@@ -24237,7 +24456,7 @@
               <a:buNone/>
             </a:pPr>
             <a:r>
-              <a:rPr lang="en-US" sz="1875" b="1" dirty="0">
+              <a:rPr lang="en-US" sz="1900" b="1" dirty="0">
                 <a:solidFill>
                   <a:srgbClr val="000000"/>
                 </a:solidFill>
@@ -24247,7 +24466,7 @@
               </a:rPr>
               <a:t>Clone</a:t>
             </a:r>
-            <a:endParaRPr lang="en-US" sz="1875" dirty="0"/>
+            <a:endParaRPr lang="en-US" sz="1900" dirty="0"/>
           </a:p>
         </p:txBody>
       </p:sp>
@@ -24308,7 +24527,7 @@
               <a:buNone/>
             </a:pPr>
             <a:r>
-              <a:rPr lang="en-US" sz="1875" dirty="0">
+              <a:rPr lang="en-US" sz="1900" dirty="0">
                 <a:solidFill>
                   <a:srgbClr val="000000"/>
                 </a:solidFill>
@@ -24318,7 +24537,7 @@
               </a:rPr>
               <a:t>Download a repo from GitHub, with its history</a:t>
             </a:r>
-            <a:endParaRPr lang="en-US" sz="1875" dirty="0"/>
+            <a:endParaRPr lang="en-US" sz="1900" dirty="0"/>
           </a:p>
         </p:txBody>
       </p:sp>
@@ -24379,7 +24598,7 @@
               <a:buNone/>
             </a:pPr>
             <a:r>
-              <a:rPr lang="en-US" sz="1875" dirty="0">
+              <a:rPr lang="en-US" sz="1900" dirty="0">
                 <a:solidFill>
                   <a:srgbClr val="000000"/>
                 </a:solidFill>
@@ -24389,7 +24608,7 @@
               </a:rPr>
               <a:t>File › Clone repository</a:t>
             </a:r>
-            <a:endParaRPr lang="en-US" sz="1875" dirty="0"/>
+            <a:endParaRPr lang="en-US" sz="1900" dirty="0"/>
           </a:p>
         </p:txBody>
       </p:sp>
@@ -24450,7 +24669,7 @@
               <a:buNone/>
             </a:pPr>
             <a:r>
-              <a:rPr lang="en-US" sz="1875" b="1" dirty="0">
+              <a:rPr lang="en-US" sz="1900" b="1" dirty="0">
                 <a:solidFill>
                   <a:srgbClr val="000000"/>
                 </a:solidFill>
@@ -24460,7 +24679,7 @@
               </a:rPr>
               <a:t>Commit</a:t>
             </a:r>
-            <a:endParaRPr lang="en-US" sz="1875" dirty="0"/>
+            <a:endParaRPr lang="en-US" sz="1900" dirty="0"/>
           </a:p>
         </p:txBody>
       </p:sp>
@@ -24521,7 +24740,7 @@
               <a:buNone/>
             </a:pPr>
             <a:r>
-              <a:rPr lang="en-US" sz="1875" dirty="0">
+              <a:rPr lang="en-US" sz="1900" dirty="0">
                 <a:solidFill>
                   <a:srgbClr val="000000"/>
                 </a:solidFill>
@@ -24531,7 +24750,7 @@
               </a:rPr>
               <a:t>A saved snapshot of changes, with a message</a:t>
             </a:r>
-            <a:endParaRPr lang="en-US" sz="1875" dirty="0"/>
+            <a:endParaRPr lang="en-US" sz="1900" dirty="0"/>
           </a:p>
         </p:txBody>
       </p:sp>
@@ -24592,7 +24811,7 @@
               <a:buNone/>
             </a:pPr>
             <a:r>
-              <a:rPr lang="en-US" sz="1875" dirty="0">
+              <a:rPr lang="en-US" sz="1900" dirty="0">
                 <a:solidFill>
                   <a:srgbClr val="000000"/>
                 </a:solidFill>
@@ -24602,7 +24821,7 @@
               </a:rPr>
               <a:t>Commit to &lt;branch&gt;</a:t>
             </a:r>
-            <a:endParaRPr lang="en-US" sz="1875" dirty="0"/>
+            <a:endParaRPr lang="en-US" sz="1900" dirty="0"/>
           </a:p>
         </p:txBody>
       </p:sp>
@@ -24663,7 +24882,7 @@
               <a:buNone/>
             </a:pPr>
             <a:r>
-              <a:rPr lang="en-US" sz="1875" b="1" dirty="0">
+              <a:rPr lang="en-US" sz="1900" b="1" dirty="0">
                 <a:solidFill>
                   <a:srgbClr val="000000"/>
                 </a:solidFill>
@@ -24673,7 +24892,7 @@
               </a:rPr>
               <a:t>Push</a:t>
             </a:r>
-            <a:endParaRPr lang="en-US" sz="1875" dirty="0"/>
+            <a:endParaRPr lang="en-US" sz="1900" dirty="0"/>
           </a:p>
         </p:txBody>
       </p:sp>
@@ -24734,7 +24953,7 @@
               <a:buNone/>
             </a:pPr>
             <a:r>
-              <a:rPr lang="en-US" sz="1875" dirty="0">
+              <a:rPr lang="en-US" sz="1900" dirty="0">
                 <a:solidFill>
                   <a:srgbClr val="000000"/>
                 </a:solidFill>
@@ -24744,7 +24963,7 @@
               </a:rPr>
               <a:t>Send your commits to GitHub</a:t>
             </a:r>
-            <a:endParaRPr lang="en-US" sz="1875" dirty="0"/>
+            <a:endParaRPr lang="en-US" sz="1900" dirty="0"/>
           </a:p>
         </p:txBody>
       </p:sp>
@@ -24805,7 +25024,7 @@
               <a:buNone/>
             </a:pPr>
             <a:r>
-              <a:rPr lang="en-US" sz="1875" dirty="0">
+              <a:rPr lang="en-US" sz="1900" dirty="0">
                 <a:solidFill>
                   <a:srgbClr val="000000"/>
                 </a:solidFill>
@@ -24815,7 +25034,7 @@
               </a:rPr>
               <a:t>Push origin</a:t>
             </a:r>
-            <a:endParaRPr lang="en-US" sz="1875" dirty="0"/>
+            <a:endParaRPr lang="en-US" sz="1900" dirty="0"/>
           </a:p>
         </p:txBody>
       </p:sp>
@@ -24876,7 +25095,7 @@
               <a:buNone/>
             </a:pPr>
             <a:r>
-              <a:rPr lang="en-US" sz="1875" b="1" dirty="0">
+              <a:rPr lang="en-US" sz="1900" b="1" dirty="0">
                 <a:solidFill>
                   <a:srgbClr val="000000"/>
                 </a:solidFill>
@@ -24886,7 +25105,7 @@
               </a:rPr>
               <a:t>Fetch / Pull</a:t>
             </a:r>
-            <a:endParaRPr lang="en-US" sz="1875" dirty="0"/>
+            <a:endParaRPr lang="en-US" sz="1900" dirty="0"/>
           </a:p>
         </p:txBody>
       </p:sp>
@@ -24947,7 +25166,7 @@
               <a:buNone/>
             </a:pPr>
             <a:r>
-              <a:rPr lang="en-US" sz="1875" dirty="0">
+              <a:rPr lang="en-US" sz="1900" dirty="0">
                 <a:solidFill>
                   <a:srgbClr val="000000"/>
                 </a:solidFill>
@@ -24957,7 +25176,7 @@
               </a:rPr>
               <a:t>Check for / download commits from GitHub</a:t>
             </a:r>
-            <a:endParaRPr lang="en-US" sz="1875" dirty="0"/>
+            <a:endParaRPr lang="en-US" sz="1900" dirty="0"/>
           </a:p>
         </p:txBody>
       </p:sp>
@@ -25018,7 +25237,7 @@
               <a:buNone/>
             </a:pPr>
             <a:r>
-              <a:rPr lang="en-US" sz="1875" dirty="0">
+              <a:rPr lang="en-US" sz="1900" dirty="0">
                 <a:solidFill>
                   <a:srgbClr val="000000"/>
                 </a:solidFill>
@@ -25028,7 +25247,7 @@
               </a:rPr>
               <a:t>Fetch origin / Pull origin</a:t>
             </a:r>
-            <a:endParaRPr lang="en-US" sz="1875" dirty="0"/>
+            <a:endParaRPr lang="en-US" sz="1900" dirty="0"/>
           </a:p>
         </p:txBody>
       </p:sp>
@@ -25089,7 +25308,7 @@
               <a:buNone/>
             </a:pPr>
             <a:r>
-              <a:rPr lang="en-US" sz="1875" b="1" dirty="0">
+              <a:rPr lang="en-US" sz="1900" b="1" dirty="0">
                 <a:solidFill>
                   <a:srgbClr val="000000"/>
                 </a:solidFill>
@@ -25099,7 +25318,7 @@
               </a:rPr>
               <a:t>Branch</a:t>
             </a:r>
-            <a:endParaRPr lang="en-US" sz="1875" dirty="0"/>
+            <a:endParaRPr lang="en-US" sz="1900" dirty="0"/>
           </a:p>
         </p:txBody>
       </p:sp>
@@ -25160,7 +25379,7 @@
               <a:buNone/>
             </a:pPr>
             <a:r>
-              <a:rPr lang="en-US" sz="1875" dirty="0">
+              <a:rPr lang="en-US" sz="1900" dirty="0">
                 <a:solidFill>
                   <a:srgbClr val="000000"/>
                 </a:solidFill>
@@ -25170,7 +25389,7 @@
               </a:rPr>
               <a:t>A separate line of commits; main is the default</a:t>
             </a:r>
-            <a:endParaRPr lang="en-US" sz="1875" dirty="0"/>
+            <a:endParaRPr lang="en-US" sz="1900" dirty="0"/>
           </a:p>
         </p:txBody>
       </p:sp>
@@ -25231,7 +25450,7 @@
               <a:buNone/>
             </a:pPr>
             <a:r>
-              <a:rPr lang="en-US" sz="1875" dirty="0">
+              <a:rPr lang="en-US" sz="1900" dirty="0">
                 <a:solidFill>
                   <a:srgbClr val="000000"/>
                 </a:solidFill>
@@ -25241,7 +25460,7 @@
               </a:rPr>
               <a:t>Current branch menu</a:t>
             </a:r>
-            <a:endParaRPr lang="en-US" sz="1875" dirty="0"/>
+            <a:endParaRPr lang="en-US" sz="1900" dirty="0"/>
           </a:p>
         </p:txBody>
       </p:sp>
@@ -25302,7 +25521,7 @@
               <a:buNone/>
             </a:pPr>
             <a:r>
-              <a:rPr lang="en-US" sz="1875" b="1" dirty="0">
+              <a:rPr lang="en-US" sz="1900" b="1" dirty="0">
                 <a:solidFill>
                   <a:srgbClr val="000000"/>
                 </a:solidFill>
@@ -25312,7 +25531,7 @@
               </a:rPr>
               <a:t>Diff</a:t>
             </a:r>
-            <a:endParaRPr lang="en-US" sz="1875" dirty="0"/>
+            <a:endParaRPr lang="en-US" sz="1900" dirty="0"/>
           </a:p>
         </p:txBody>
       </p:sp>
@@ -25373,7 +25592,7 @@
               <a:buNone/>
             </a:pPr>
             <a:r>
-              <a:rPr lang="en-US" sz="1875" dirty="0">
+              <a:rPr lang="en-US" sz="1900" dirty="0">
                 <a:solidFill>
                   <a:srgbClr val="000000"/>
                 </a:solidFill>
@@ -25383,7 +25602,7 @@
               </a:rPr>
               <a:t>Line-by-line changes: + added, − removed</a:t>
             </a:r>
-            <a:endParaRPr lang="en-US" sz="1875" dirty="0"/>
+            <a:endParaRPr lang="en-US" sz="1900" dirty="0"/>
           </a:p>
         </p:txBody>
       </p:sp>
@@ -25444,7 +25663,7 @@
               <a:buNone/>
             </a:pPr>
             <a:r>
-              <a:rPr lang="en-US" sz="1875" dirty="0">
+              <a:rPr lang="en-US" sz="1900" dirty="0">
                 <a:solidFill>
                   <a:srgbClr val="000000"/>
                 </a:solidFill>
@@ -25454,7 +25673,7 @@
               </a:rPr>
               <a:t>Changes tab / History tab</a:t>
             </a:r>
-            <a:endParaRPr lang="en-US" sz="1875" dirty="0"/>
+            <a:endParaRPr lang="en-US" sz="1900" dirty="0"/>
           </a:p>
         </p:txBody>
       </p:sp>
@@ -25515,7 +25734,7 @@
               <a:buNone/>
             </a:pPr>
             <a:r>
-              <a:rPr lang="en-US" sz="1875" b="1" dirty="0">
+              <a:rPr lang="en-US" sz="1900" b="1" dirty="0">
                 <a:solidFill>
                   <a:srgbClr val="000000"/>
                 </a:solidFill>
@@ -25525,7 +25744,7 @@
               </a:rPr>
               <a:t>Pull Request (PR)</a:t>
             </a:r>
-            <a:endParaRPr lang="en-US" sz="1875" dirty="0"/>
+            <a:endParaRPr lang="en-US" sz="1900" dirty="0"/>
           </a:p>
         </p:txBody>
       </p:sp>
@@ -25586,7 +25805,7 @@
               <a:buNone/>
             </a:pPr>
             <a:r>
-              <a:rPr lang="en-US" sz="1875" dirty="0">
+              <a:rPr lang="en-US" sz="1900" dirty="0">
                 <a:solidFill>
                   <a:srgbClr val="000000"/>
                 </a:solidFill>
@@ -25596,7 +25815,7 @@
               </a:rPr>
               <a:t>A request on GitHub to review and merge one branch into another</a:t>
             </a:r>
-            <a:endParaRPr lang="en-US" sz="1875" dirty="0"/>
+            <a:endParaRPr lang="en-US" sz="1900" dirty="0"/>
           </a:p>
         </p:txBody>
       </p:sp>
@@ -25657,7 +25876,7 @@
               <a:buNone/>
             </a:pPr>
             <a:r>
-              <a:rPr lang="en-US" sz="1875" dirty="0">
+              <a:rPr lang="en-US" sz="1900" dirty="0">
                 <a:solidFill>
                   <a:srgbClr val="000000"/>
                 </a:solidFill>
@@ -25667,7 +25886,7 @@
               </a:rPr>
               <a:t>Create Pull Request</a:t>
             </a:r>
-            <a:endParaRPr lang="en-US" sz="1875" dirty="0"/>
+            <a:endParaRPr lang="en-US" sz="1900" dirty="0"/>
           </a:p>
         </p:txBody>
       </p:sp>
@@ -25728,7 +25947,7 @@
               <a:buNone/>
             </a:pPr>
             <a:r>
-              <a:rPr lang="en-US" sz="1875" b="1" dirty="0">
+              <a:rPr lang="en-US" sz="1900" b="1" dirty="0">
                 <a:solidFill>
                   <a:srgbClr val="000000"/>
                 </a:solidFill>
@@ -25738,7 +25957,7 @@
               </a:rPr>
               <a:t>Merge conflict</a:t>
             </a:r>
-            <a:endParaRPr lang="en-US" sz="1875" dirty="0"/>
+            <a:endParaRPr lang="en-US" sz="1900" dirty="0"/>
           </a:p>
         </p:txBody>
       </p:sp>
@@ -25799,7 +26018,7 @@
               <a:buNone/>
             </a:pPr>
             <a:r>
-              <a:rPr lang="en-US" sz="1875" dirty="0">
+              <a:rPr lang="en-US" sz="1900" dirty="0">
                 <a:solidFill>
                   <a:srgbClr val="000000"/>
                 </a:solidFill>
@@ -25809,7 +26028,7 @@
               </a:rPr>
               <a:t>Two commits changed the same lines; you choose the result</a:t>
             </a:r>
-            <a:endParaRPr lang="en-US" sz="1875" dirty="0"/>
+            <a:endParaRPr lang="en-US" sz="1900" dirty="0"/>
           </a:p>
         </p:txBody>
       </p:sp>
@@ -25870,7 +26089,7 @@
               <a:buNone/>
             </a:pPr>
             <a:r>
-              <a:rPr lang="en-US" sz="1875" dirty="0">
+              <a:rPr lang="en-US" sz="1900" dirty="0">
                 <a:solidFill>
                   <a:srgbClr val="000000"/>
                 </a:solidFill>
@@ -25880,7 +26099,7 @@
               </a:rPr>
               <a:t>Resolve conflicts dialog</a:t>
             </a:r>
-            <a:endParaRPr lang="en-US" sz="1875" dirty="0"/>
+            <a:endParaRPr lang="en-US" sz="1900" dirty="0"/>
           </a:p>
         </p:txBody>
       </p:sp>
@@ -25941,7 +26160,7 @@
               <a:buNone/>
             </a:pPr>
             <a:r>
-              <a:rPr lang="en-US" sz="1875" b="1" dirty="0">
+              <a:rPr lang="en-US" sz="1900" b="1" dirty="0">
                 <a:solidFill>
                   <a:srgbClr val="000000"/>
                 </a:solidFill>
@@ -25951,7 +26170,7 @@
               </a:rPr>
               <a:t>Origin</a:t>
             </a:r>
-            <a:endParaRPr lang="en-US" sz="1875" dirty="0"/>
+            <a:endParaRPr lang="en-US" sz="1900" dirty="0"/>
           </a:p>
         </p:txBody>
       </p:sp>
@@ -26012,7 +26231,7 @@
               <a:buNone/>
             </a:pPr>
             <a:r>
-              <a:rPr lang="en-US" sz="1875" dirty="0">
+              <a:rPr lang="en-US" sz="1900" dirty="0">
                 <a:solidFill>
                   <a:srgbClr val="000000"/>
                 </a:solidFill>
@@ -26022,7 +26241,7 @@
               </a:rPr>
               <a:t>The name for the GitHub copy of your repo</a:t>
             </a:r>
-            <a:endParaRPr lang="en-US" sz="1875" dirty="0"/>
+            <a:endParaRPr lang="en-US" sz="1900" dirty="0"/>
           </a:p>
         </p:txBody>
       </p:sp>
@@ -26083,7 +26302,7 @@
               <a:buNone/>
             </a:pPr>
             <a:r>
-              <a:rPr lang="en-US" sz="1875" dirty="0">
+              <a:rPr lang="en-US" sz="1900" dirty="0">
                 <a:solidFill>
                   <a:srgbClr val="000000"/>
                 </a:solidFill>
@@ -26093,7 +26312,7 @@
               </a:rPr>
               <a:t>Shown on the sync button</a:t>
             </a:r>
-            <a:endParaRPr lang="en-US" sz="1875" dirty="0"/>
+            <a:endParaRPr lang="en-US" sz="1900" dirty="0"/>
           </a:p>
         </p:txBody>
       </p:sp>
@@ -26106,7 +26325,7 @@
         <p:spPr>
           <a:xfrm>
             <a:off x="133350" y="2762250"/>
-            <a:ext cx="1442184" cy="381000"/>
+            <a:ext cx="1409700" cy="381000"/>
           </a:xfrm>
           <a:prstGeom prst="rect">
             <a:avLst/>
@@ -26248,7 +26467,7 @@
         <p:spPr>
           <a:xfrm>
             <a:off x="1809750" y="1619250"/>
-            <a:ext cx="12027980" cy="784820"/>
+            <a:ext cx="11769090" cy="784820"/>
           </a:xfrm>
           <a:prstGeom prst="rect">
             <a:avLst/>
@@ -26337,7 +26556,7 @@
               <a:buNone/>
             </a:pPr>
             <a:r>
-              <a:rPr lang="en-US" sz="2550" b="1" dirty="0">
+              <a:rPr lang="en-US" sz="2500" b="1" dirty="0">
                 <a:solidFill>
                   <a:srgbClr val="00B0F0"/>
                 </a:solidFill>
@@ -26347,7 +26566,7 @@
               </a:rPr>
               <a:t>1</a:t>
             </a:r>
-            <a:endParaRPr lang="en-US" sz="2550" dirty="0"/>
+            <a:endParaRPr lang="en-US" sz="2500" dirty="0"/>
           </a:p>
         </p:txBody>
       </p:sp>
@@ -26381,7 +26600,7 @@
               <a:buNone/>
             </a:pPr>
             <a:r>
-              <a:rPr lang="en-US" sz="1875" dirty="0">
+              <a:rPr lang="en-US" sz="1900" dirty="0">
                 <a:solidFill>
                   <a:srgbClr val="FFFFFF"/>
                 </a:solidFill>
@@ -26391,7 +26610,7 @@
               </a:rPr>
               <a:t>You push the repo to GitHub</a:t>
             </a:r>
-            <a:endParaRPr lang="en-US" sz="1875" dirty="0"/>
+            <a:endParaRPr lang="en-US" sz="1900" dirty="0"/>
           </a:p>
         </p:txBody>
       </p:sp>
@@ -26449,7 +26668,7 @@
               <a:buNone/>
             </a:pPr>
             <a:r>
-              <a:rPr lang="en-US" sz="2550" b="1" dirty="0">
+              <a:rPr lang="en-US" sz="2500" b="1" dirty="0">
                 <a:solidFill>
                   <a:srgbClr val="1F6FB2"/>
                 </a:solidFill>
@@ -26459,7 +26678,7 @@
               </a:rPr>
               <a:t>2</a:t>
             </a:r>
-            <a:endParaRPr lang="en-US" sz="2550" dirty="0"/>
+            <a:endParaRPr lang="en-US" sz="2500" dirty="0"/>
           </a:p>
         </p:txBody>
       </p:sp>
@@ -26493,7 +26712,7 @@
               <a:buNone/>
             </a:pPr>
             <a:r>
-              <a:rPr lang="en-US" sz="1875" dirty="0">
+              <a:rPr lang="en-US" sz="1900" dirty="0">
                 <a:solidFill>
                   <a:srgbClr val="000000"/>
                 </a:solidFill>
@@ -26503,7 +26722,7 @@
               </a:rPr>
               <a:t>Agent reads the repo in its sandbox</a:t>
             </a:r>
-            <a:endParaRPr lang="en-US" sz="1875" dirty="0"/>
+            <a:endParaRPr lang="en-US" sz="1900" dirty="0"/>
           </a:p>
         </p:txBody>
       </p:sp>
@@ -26561,7 +26780,7 @@
               <a:buNone/>
             </a:pPr>
             <a:r>
-              <a:rPr lang="en-US" sz="2550" b="1" dirty="0">
+              <a:rPr lang="en-US" sz="2500" b="1" dirty="0">
                 <a:solidFill>
                   <a:srgbClr val="1F6FB2"/>
                 </a:solidFill>
@@ -26571,7 +26790,7 @@
               </a:rPr>
               <a:t>3</a:t>
             </a:r>
-            <a:endParaRPr lang="en-US" sz="2550" dirty="0"/>
+            <a:endParaRPr lang="en-US" sz="2500" dirty="0"/>
           </a:p>
         </p:txBody>
       </p:sp>
@@ -26605,7 +26824,7 @@
               <a:buNone/>
             </a:pPr>
             <a:r>
-              <a:rPr lang="en-US" sz="1875" dirty="0">
+              <a:rPr lang="en-US" sz="1900" dirty="0">
                 <a:solidFill>
                   <a:srgbClr val="000000"/>
                 </a:solidFill>
@@ -26615,7 +26834,7 @@
               </a:rPr>
               <a:t>Agent commits to a branch and opens a Pull Request (PR)</a:t>
             </a:r>
-            <a:endParaRPr lang="en-US" sz="1875" dirty="0"/>
+            <a:endParaRPr lang="en-US" sz="1900" dirty="0"/>
           </a:p>
         </p:txBody>
       </p:sp>
@@ -26673,7 +26892,7 @@
               <a:buNone/>
             </a:pPr>
             <a:r>
-              <a:rPr lang="en-US" sz="2550" b="1" dirty="0">
+              <a:rPr lang="en-US" sz="2500" b="1" dirty="0">
                 <a:solidFill>
                   <a:srgbClr val="00B0F0"/>
                 </a:solidFill>
@@ -26683,7 +26902,7 @@
               </a:rPr>
               <a:t>4</a:t>
             </a:r>
-            <a:endParaRPr lang="en-US" sz="2550" dirty="0"/>
+            <a:endParaRPr lang="en-US" sz="2500" dirty="0"/>
           </a:p>
         </p:txBody>
       </p:sp>
@@ -26717,7 +26936,7 @@
               <a:buNone/>
             </a:pPr>
             <a:r>
-              <a:rPr lang="en-US" sz="1875" dirty="0">
+              <a:rPr lang="en-US" sz="1900" dirty="0">
                 <a:solidFill>
                   <a:srgbClr val="FFFFFF"/>
                 </a:solidFill>
@@ -26727,7 +26946,7 @@
               </a:rPr>
               <a:t>You review the diff, test, and merge</a:t>
             </a:r>
-            <a:endParaRPr lang="en-US" sz="1875" dirty="0"/>
+            <a:endParaRPr lang="en-US" sz="1900" dirty="0"/>
           </a:p>
         </p:txBody>
       </p:sp>
@@ -26785,7 +27004,7 @@
               <a:buNone/>
             </a:pPr>
             <a:r>
-              <a:rPr lang="en-US" sz="2550" b="1" dirty="0">
+              <a:rPr lang="en-US" sz="2500" b="1" dirty="0">
                 <a:solidFill>
                   <a:srgbClr val="00B0F0"/>
                 </a:solidFill>
@@ -26795,7 +27014,7 @@
               </a:rPr>
               <a:t>5</a:t>
             </a:r>
-            <a:endParaRPr lang="en-US" sz="2550" dirty="0"/>
+            <a:endParaRPr lang="en-US" sz="2500" dirty="0"/>
           </a:p>
         </p:txBody>
       </p:sp>
@@ -26829,7 +27048,7 @@
               <a:buNone/>
             </a:pPr>
             <a:r>
-              <a:rPr lang="en-US" sz="1875" dirty="0">
+              <a:rPr lang="en-US" sz="1900" dirty="0">
                 <a:solidFill>
                   <a:srgbClr val="FFFFFF"/>
                 </a:solidFill>
@@ -26839,7 +27058,7 @@
               </a:rPr>
               <a:t>You pull the result to your laptop</a:t>
             </a:r>
-            <a:endParaRPr lang="en-US" sz="1875" dirty="0"/>
+            <a:endParaRPr lang="en-US" sz="1900" dirty="0"/>
           </a:p>
         </p:txBody>
       </p:sp>
@@ -27020,7 +27239,7 @@
         <p:spPr>
           <a:xfrm>
             <a:off x="1809750" y="6404571"/>
-            <a:ext cx="12027980" cy="438150"/>
+            <a:ext cx="11769090" cy="438150"/>
           </a:xfrm>
           <a:prstGeom prst="rect">
             <a:avLst/>
@@ -27041,7 +27260,7 @@
               <a:buNone/>
             </a:pPr>
             <a:r>
-              <a:rPr lang="en-US" sz="2250" b="1" dirty="0">
+              <a:rPr lang="en-US" sz="2200" b="1" dirty="0">
                 <a:solidFill>
                   <a:srgbClr val="000000"/>
                 </a:solidFill>
@@ -27051,7 +27270,7 @@
               </a:rPr>
               <a:t>Every agent change arrives as a commit you can read, test, and revert.</a:t>
             </a:r>
-            <a:endParaRPr lang="en-US" sz="2250" dirty="0"/>
+            <a:endParaRPr lang="en-US" sz="2200" dirty="0"/>
           </a:p>
         </p:txBody>
       </p:sp>
@@ -27064,7 +27283,7 @@
         <p:spPr>
           <a:xfrm>
             <a:off x="133350" y="2762250"/>
-            <a:ext cx="1442184" cy="381000"/>
+            <a:ext cx="1409700" cy="381000"/>
           </a:xfrm>
           <a:prstGeom prst="rect">
             <a:avLst/>
@@ -27297,7 +27516,7 @@
               <a:buNone/>
             </a:pPr>
             <a:r>
-              <a:rPr lang="en-US" sz="2250" b="1" dirty="0">
+              <a:rPr lang="en-US" sz="2200" b="1" dirty="0">
                 <a:solidFill>
                   <a:srgbClr val="1F6FB2"/>
                 </a:solidFill>
@@ -27307,7 +27526,7 @@
               </a:rPr>
               <a:t>1</a:t>
             </a:r>
-            <a:endParaRPr lang="en-US" sz="2250" dirty="0"/>
+            <a:endParaRPr lang="en-US" sz="2200" dirty="0"/>
           </a:p>
         </p:txBody>
       </p:sp>
@@ -27341,7 +27560,7 @@
               <a:buNone/>
             </a:pPr>
             <a:r>
-              <a:rPr lang="en-US" sz="2025" dirty="0">
+              <a:rPr lang="en-US" sz="2000" dirty="0">
                 <a:solidFill>
                   <a:srgbClr val="000000"/>
                 </a:solidFill>
@@ -27351,7 +27570,7 @@
               </a:rPr>
               <a:t>Open GitHub Desktop.</a:t>
             </a:r>
-            <a:endParaRPr lang="en-US" sz="2025" dirty="0"/>
+            <a:endParaRPr lang="en-US" sz="2000" dirty="0"/>
           </a:p>
         </p:txBody>
       </p:sp>
@@ -27385,7 +27604,7 @@
               <a:buNone/>
             </a:pPr>
             <a:r>
-              <a:rPr lang="en-US" sz="2250" b="1" dirty="0">
+              <a:rPr lang="en-US" sz="2200" b="1" dirty="0">
                 <a:solidFill>
                   <a:srgbClr val="1F6FB2"/>
                 </a:solidFill>
@@ -27395,7 +27614,7 @@
               </a:rPr>
               <a:t>2</a:t>
             </a:r>
-            <a:endParaRPr lang="en-US" sz="2250" dirty="0"/>
+            <a:endParaRPr lang="en-US" sz="2200" dirty="0"/>
           </a:p>
         </p:txBody>
       </p:sp>
@@ -27429,7 +27648,7 @@
               <a:buNone/>
             </a:pPr>
             <a:r>
-              <a:rPr lang="en-US" sz="2025" dirty="0">
+              <a:rPr lang="en-US" sz="2000" dirty="0">
                 <a:solidFill>
                   <a:srgbClr val="000000"/>
                 </a:solidFill>
@@ -27440,7 +27659,7 @@
               <a:t>File › Options › Accounts › </a:t>
             </a:r>
             <a:r>
-              <a:rPr lang="en-US" sz="2025" b="1" dirty="0">
+              <a:rPr lang="en-US" sz="2000" b="1" dirty="0">
                 <a:solidFill>
                   <a:srgbClr val="000000"/>
                 </a:solidFill>
@@ -27451,7 +27670,7 @@
               <a:t>Sign in </a:t>
             </a:r>
             <a:r>
-              <a:rPr lang="en-US" sz="2025" dirty="0">
+              <a:rPr lang="en-US" sz="2000" dirty="0">
                 <a:solidFill>
                   <a:srgbClr val="000000"/>
                 </a:solidFill>
@@ -27461,7 +27680,7 @@
               </a:rPr>
               <a:t>to GitHub.com. Finish in the browser.</a:t>
             </a:r>
-            <a:endParaRPr lang="en-US" sz="2025" dirty="0"/>
+            <a:endParaRPr lang="en-US" sz="2000" dirty="0"/>
           </a:p>
         </p:txBody>
       </p:sp>
@@ -27495,7 +27714,7 @@
               <a:buNone/>
             </a:pPr>
             <a:r>
-              <a:rPr lang="en-US" sz="2250" b="1" dirty="0">
+              <a:rPr lang="en-US" sz="2200" b="1" dirty="0">
                 <a:solidFill>
                   <a:srgbClr val="1F6FB2"/>
                 </a:solidFill>
@@ -27505,7 +27724,7 @@
               </a:rPr>
               <a:t>3</a:t>
             </a:r>
-            <a:endParaRPr lang="en-US" sz="2250" dirty="0"/>
+            <a:endParaRPr lang="en-US" sz="2200" dirty="0"/>
           </a:p>
         </p:txBody>
       </p:sp>
@@ -27539,7 +27758,7 @@
               <a:buNone/>
             </a:pPr>
             <a:r>
-              <a:rPr lang="en-US" sz="2025" dirty="0">
+              <a:rPr lang="en-US" sz="2000" dirty="0">
                 <a:solidFill>
                   <a:srgbClr val="000000"/>
                 </a:solidFill>
@@ -27550,7 +27769,7 @@
               <a:t>Options › Git: confirm your </a:t>
             </a:r>
             <a:r>
-              <a:rPr lang="en-US" sz="2025" b="1" dirty="0">
+              <a:rPr lang="en-US" sz="2000" b="1" dirty="0">
                 <a:solidFill>
                   <a:srgbClr val="000000"/>
                 </a:solidFill>
@@ -27561,7 +27780,7 @@
               <a:t>name </a:t>
             </a:r>
             <a:r>
-              <a:rPr lang="en-US" sz="2025" dirty="0">
+              <a:rPr lang="en-US" sz="2000" dirty="0">
                 <a:solidFill>
                   <a:srgbClr val="000000"/>
                 </a:solidFill>
@@ -27572,7 +27791,7 @@
               <a:t>and </a:t>
             </a:r>
             <a:r>
-              <a:rPr lang="en-US" sz="2025" b="1" dirty="0">
+              <a:rPr lang="en-US" sz="2000" b="1" dirty="0">
                 <a:solidFill>
                   <a:srgbClr val="000000"/>
                 </a:solidFill>
@@ -27583,7 +27802,7 @@
               <a:t>email </a:t>
             </a:r>
             <a:r>
-              <a:rPr lang="en-US" sz="2025" dirty="0">
+              <a:rPr lang="en-US" sz="2000" dirty="0">
                 <a:solidFill>
                   <a:srgbClr val="000000"/>
                 </a:solidFill>
@@ -27593,7 +27812,7 @@
               </a:rPr>
               <a:t>. These label every commit you make.</a:t>
             </a:r>
-            <a:endParaRPr lang="en-US" sz="2025" dirty="0"/>
+            <a:endParaRPr lang="en-US" sz="2000" dirty="0"/>
           </a:p>
         </p:txBody>
       </p:sp>
@@ -27627,7 +27846,7 @@
               <a:buNone/>
             </a:pPr>
             <a:r>
-              <a:rPr lang="en-US" sz="2250" b="1" dirty="0">
+              <a:rPr lang="en-US" sz="2200" b="1" dirty="0">
                 <a:solidFill>
                   <a:srgbClr val="1F6FB2"/>
                 </a:solidFill>
@@ -27637,7 +27856,7 @@
               </a:rPr>
               <a:t>4</a:t>
             </a:r>
-            <a:endParaRPr lang="en-US" sz="2250" dirty="0"/>
+            <a:endParaRPr lang="en-US" sz="2200" dirty="0"/>
           </a:p>
         </p:txBody>
       </p:sp>
@@ -27671,7 +27890,7 @@
               <a:buNone/>
             </a:pPr>
             <a:r>
-              <a:rPr lang="en-US" sz="2025" dirty="0">
+              <a:rPr lang="en-US" sz="2000" dirty="0">
                 <a:solidFill>
                   <a:srgbClr val="000000"/>
                 </a:solidFill>
@@ -27682,7 +27901,7 @@
               <a:t>Options › Integrations: set External editor to </a:t>
             </a:r>
             <a:r>
-              <a:rPr lang="en-US" sz="2025" b="1" dirty="0">
+              <a:rPr lang="en-US" sz="2000" b="1" dirty="0">
                 <a:solidFill>
                   <a:srgbClr val="000000"/>
                 </a:solidFill>
@@ -27693,7 +27912,7 @@
               <a:t>Visual Studio Code</a:t>
             </a:r>
             <a:r>
-              <a:rPr lang="en-US" sz="2025" dirty="0">
+              <a:rPr lang="en-US" sz="2000" dirty="0">
                 <a:solidFill>
                   <a:srgbClr val="000000"/>
                 </a:solidFill>
@@ -27703,7 +27922,7 @@
               </a:rPr>
               <a:t>.</a:t>
             </a:r>
-            <a:endParaRPr lang="en-US" sz="2025" dirty="0"/>
+            <a:endParaRPr lang="en-US" sz="2000" dirty="0"/>
           </a:p>
         </p:txBody>
       </p:sp>
@@ -27760,7 +27979,7 @@
         <p:spPr>
           <a:xfrm>
             <a:off x="133350" y="3143250"/>
-            <a:ext cx="1442184" cy="381000"/>
+            <a:ext cx="1409700" cy="381000"/>
           </a:xfrm>
           <a:prstGeom prst="rect">
             <a:avLst/>
@@ -27846,6 +28065,30 @@
           </a:p>
         </p:txBody>
       </p:sp>
+      <p:pic>
+        <p:nvPicPr>
+          <p:cNvPr id="17" name="Screenshot placeholder" descr="Screenshot to add: GitHub Desktop, File › Options › Accounts, signed in to GitHub.com"/>
+          <p:cNvPicPr>
+            <a:picLocks noChangeAspect="1"/>
+          </p:cNvPicPr>
+          <p:nvPr/>
+        </p:nvPicPr>
+        <p:blipFill>
+          <a:blip r:embed="rId3"/>
+          <a:stretch>
+            <a:fillRect/>
+          </a:stretch>
+        </p:blipFill>
+        <p:spPr>
+          <a:xfrm>
+            <a:off x="8138160" y="2103120"/>
+            <a:ext cx="5349240" cy="3291840"/>
+          </a:xfrm>
+          <a:prstGeom prst="rect">
+            <a:avLst/>
+          </a:prstGeom>
+        </p:spPr>
+      </p:pic>
     </p:spTree>
   </p:cSld>
   <p:clrMapOvr>
@@ -27901,7 +28144,7 @@
         </p:nvSpPr>
         <p:spPr>
           <a:xfrm>
-            <a:off x="1809750" y="1619250"/>
+            <a:off x="1809750" y="2122170"/>
             <a:ext cx="4611052" cy="784820"/>
           </a:xfrm>
           <a:prstGeom prst="rect">
@@ -27956,7 +28199,7 @@
         </p:nvSpPr>
         <p:spPr>
           <a:xfrm>
-            <a:off x="1742599" y="2708870"/>
+            <a:off x="1742599" y="3211790"/>
             <a:ext cx="4611052" cy="419100"/>
           </a:xfrm>
           <a:prstGeom prst="rect">
@@ -27975,7 +28218,7 @@
               <a:buNone/>
             </a:pPr>
             <a:r>
-              <a:rPr lang="en-US" sz="2550" i="1" dirty="0">
+              <a:rPr lang="en-US" sz="2500" i="1" dirty="0">
                 <a:solidFill>
                   <a:srgbClr val="000000"/>
                 </a:solidFill>
@@ -27985,7 +28228,7 @@
               </a:rPr>
               <a:t>δ = P L³ / (3 E I)</a:t>
             </a:r>
-            <a:endParaRPr lang="en-US" sz="2550" dirty="0"/>
+            <a:endParaRPr lang="en-US" sz="2500" dirty="0"/>
           </a:p>
         </p:txBody>
       </p:sp>
@@ -27997,7 +28240,7 @@
         </p:nvSpPr>
         <p:spPr>
           <a:xfrm>
-            <a:off x="1809750" y="3432770"/>
+            <a:off x="1809750" y="3935690"/>
             <a:ext cx="4476750" cy="2937371"/>
           </a:xfrm>
           <a:prstGeom prst="roundRect">
@@ -28026,7 +28269,7 @@
         </p:nvSpPr>
         <p:spPr>
           <a:xfrm>
-            <a:off x="2057400" y="3661370"/>
+            <a:off x="2057400" y="4164290"/>
             <a:ext cx="4115752" cy="2518271"/>
           </a:xfrm>
           <a:prstGeom prst="rect">
@@ -28190,8 +28433,8 @@
         </p:nvSpPr>
         <p:spPr>
           <a:xfrm>
-            <a:off x="6572250" y="1619250"/>
-            <a:ext cx="7606665" cy="298450"/>
+            <a:off x="6572250" y="2122170"/>
+            <a:ext cx="7006590" cy="298450"/>
           </a:xfrm>
           <a:prstGeom prst="rect">
             <a:avLst/>
@@ -28231,7 +28474,7 @@
         </p:nvSpPr>
         <p:spPr>
           <a:xfrm>
-            <a:off x="6572250" y="2012950"/>
+            <a:off x="6572250" y="2515870"/>
             <a:ext cx="6915150" cy="3961606"/>
           </a:xfrm>
           <a:prstGeom prst="roundRect">
@@ -28260,7 +28503,7 @@
         </p:nvSpPr>
         <p:spPr>
           <a:xfrm>
-            <a:off x="6819900" y="2241550"/>
+            <a:off x="6819900" y="2744470"/>
             <a:ext cx="6627304" cy="3542506"/>
           </a:xfrm>
           <a:prstGeom prst="rect">
@@ -28282,7 +28525,7 @@
               <a:buNone/>
             </a:pPr>
             <a:r>
-              <a:rPr lang="en-US" sz="1725" dirty="0">
+              <a:rPr lang="en-US" sz="1700" dirty="0">
                 <a:solidFill>
                   <a:srgbClr val="6A9955"/>
                 </a:solidFill>
@@ -28292,7 +28535,7 @@
               </a:rPr>
               <a:t>% Cantilever beam tip deflection</a:t>
             </a:r>
-            <a:endParaRPr lang="en-US" sz="1725" dirty="0"/>
+            <a:endParaRPr lang="en-US" sz="1700" dirty="0"/>
           </a:p>
           <a:p>
             <a:pPr marL="0" indent="0" algn="l">
@@ -28302,7 +28545,7 @@
               <a:buNone/>
             </a:pPr>
             <a:r>
-              <a:rPr lang="en-US" sz="1725" dirty="0">
+              <a:rPr lang="en-US" sz="1700" dirty="0">
                 <a:solidFill>
                   <a:srgbClr val="D4D4D4"/>
                 </a:solidFill>
@@ -28316,7 +28559,7 @@
               <a:t>E = 200e9;           </a:t>
             </a:r>
             <a:r>
-              <a:rPr lang="en-US" sz="1725" dirty="0">
+              <a:rPr lang="en-US" sz="1700" dirty="0">
                 <a:solidFill>
                   <a:srgbClr val="6A9955"/>
                 </a:solidFill>
@@ -28326,7 +28569,7 @@
               </a:rPr>
               <a:t>% Pa, steel</a:t>
             </a:r>
-            <a:endParaRPr lang="en-US" sz="1725" dirty="0"/>
+            <a:endParaRPr lang="en-US" sz="1700" dirty="0"/>
           </a:p>
           <a:p>
             <a:pPr marL="0" indent="0" algn="l">
@@ -28336,7 +28579,7 @@
               <a:buNone/>
             </a:pPr>
             <a:r>
-              <a:rPr lang="en-US" sz="1725" dirty="0">
+              <a:rPr lang="en-US" sz="1700" dirty="0">
                 <a:solidFill>
                   <a:srgbClr val="D4D4D4"/>
                 </a:solidFill>
@@ -28350,7 +28593,7 @@
               <a:t>L = 2.0;             </a:t>
             </a:r>
             <a:r>
-              <a:rPr lang="en-US" sz="1725" dirty="0">
+              <a:rPr lang="en-US" sz="1700" dirty="0">
                 <a:solidFill>
                   <a:srgbClr val="6A9955"/>
                 </a:solidFill>
@@ -28360,7 +28603,7 @@
               </a:rPr>
               <a:t>% m, length</a:t>
             </a:r>
-            <a:endParaRPr lang="en-US" sz="1725" dirty="0"/>
+            <a:endParaRPr lang="en-US" sz="1700" dirty="0"/>
           </a:p>
           <a:p>
             <a:pPr marL="0" indent="0" algn="l">
@@ -28370,7 +28613,7 @@
               <a:buNone/>
             </a:pPr>
             <a:r>
-              <a:rPr lang="en-US" sz="1725" dirty="0">
+              <a:rPr lang="en-US" sz="1700" dirty="0">
                 <a:solidFill>
                   <a:srgbClr val="D4D4D4"/>
                 </a:solidFill>
@@ -28384,7 +28627,7 @@
               <a:t>P = 500.0;           </a:t>
             </a:r>
             <a:r>
-              <a:rPr lang="en-US" sz="1725" dirty="0">
+              <a:rPr lang="en-US" sz="1700" dirty="0">
                 <a:solidFill>
                   <a:srgbClr val="6A9955"/>
                 </a:solidFill>
@@ -28394,7 +28637,7 @@
               </a:rPr>
               <a:t>% N, tip load</a:t>
             </a:r>
-            <a:endParaRPr lang="en-US" sz="1725" dirty="0"/>
+            <a:endParaRPr lang="en-US" sz="1700" dirty="0"/>
           </a:p>
           <a:p>
             <a:pPr marL="0" indent="0" algn="l">
@@ -28404,7 +28647,7 @@
               <a:buNone/>
             </a:pPr>
             <a:r>
-              <a:rPr lang="en-US" sz="1725" dirty="0">
+              <a:rPr lang="en-US" sz="1700" dirty="0">
                 <a:solidFill>
                   <a:srgbClr val="D4D4D4"/>
                 </a:solidFill>
@@ -28418,7 +28661,7 @@
               <a:t>b = 0.05; h = 0.10;  </a:t>
             </a:r>
             <a:r>
-              <a:rPr lang="en-US" sz="1725" dirty="0">
+              <a:rPr lang="en-US" sz="1700" dirty="0">
                 <a:solidFill>
                   <a:srgbClr val="6A9955"/>
                 </a:solidFill>
@@ -28428,7 +28671,7 @@
               </a:rPr>
               <a:t>% m, section</a:t>
             </a:r>
-            <a:endParaRPr lang="en-US" sz="1725" dirty="0"/>
+            <a:endParaRPr lang="en-US" sz="1700" dirty="0"/>
           </a:p>
           <a:p>
             <a:pPr marL="0" indent="0" algn="l">
@@ -28438,7 +28681,7 @@
               <a:buNone/>
             </a:pPr>
             <a:r>
-              <a:rPr lang="en-US" sz="1725" dirty="0">
+              <a:rPr lang="en-US" sz="1700" dirty="0">
                 <a:solidFill>
                   <a:srgbClr val="D4D4D4"/>
                 </a:solidFill>
@@ -28451,7 +28694,7 @@
               </a:rPr>
               <a:t>I = b*h^3/12;</a:t>
             </a:r>
-            <a:endParaRPr lang="en-US" sz="1725" dirty="0"/>
+            <a:endParaRPr lang="en-US" sz="1700" dirty="0"/>
           </a:p>
           <a:p>
             <a:pPr marL="0" indent="0" algn="l">
@@ -28461,7 +28704,7 @@
               <a:buNone/>
             </a:pPr>
             <a:r>
-              <a:rPr lang="en-US" sz="1725" dirty="0">
+              <a:rPr lang="en-US" sz="1700" dirty="0">
                 <a:solidFill>
                   <a:srgbClr val="D4D4D4"/>
                 </a:solidFill>
@@ -28474,7 +28717,7 @@
               </a:rPr>
               <a:t>delta = P*L^3/(3*E*I);</a:t>
             </a:r>
-            <a:endParaRPr lang="en-US" sz="1725" dirty="0"/>
+            <a:endParaRPr lang="en-US" sz="1700" dirty="0"/>
           </a:p>
           <a:p>
             <a:pPr marL="0" indent="0" algn="l">
@@ -28484,7 +28727,7 @@
               <a:buNone/>
             </a:pPr>
             <a:r>
-              <a:rPr lang="en-US" sz="1725" dirty="0">
+              <a:rPr lang="en-US" sz="1700" dirty="0">
                 <a:solidFill>
                   <a:srgbClr val="D4D4D4"/>
                 </a:solidFill>
@@ -28497,7 +28740,7 @@
               </a:rPr>
               <a:t>fprintf('Tip deflection: %.2f mm\n', delta*1e3)</a:t>
             </a:r>
-            <a:endParaRPr lang="en-US" sz="1725" dirty="0"/>
+            <a:endParaRPr lang="en-US" sz="1700" dirty="0"/>
           </a:p>
         </p:txBody>
       </p:sp>
@@ -28509,8 +28752,8 @@
         </p:nvSpPr>
         <p:spPr>
           <a:xfrm>
-            <a:off x="6572250" y="6107906"/>
-            <a:ext cx="7606665" cy="342900"/>
+            <a:off x="6572250" y="6610826"/>
+            <a:ext cx="7006590" cy="342900"/>
           </a:xfrm>
           <a:prstGeom prst="rect">
             <a:avLst/>
@@ -28562,7 +28805,7 @@
         <p:spPr>
           <a:xfrm>
             <a:off x="133350" y="3143250"/>
-            <a:ext cx="1442184" cy="381000"/>
+            <a:ext cx="1409700" cy="381000"/>
           </a:xfrm>
           <a:prstGeom prst="rect">
             <a:avLst/>
@@ -28645,6 +28888,72 @@
               <a:t>9</a:t>
             </a:fld>
             <a:endParaRPr lang="en-US"/>
+          </a:p>
+        </p:txBody>
+      </p:sp>
+      <p:sp>
+        <p:nvSpPr>
+          <p:cNvPr id="14" name="Intro"/>
+          <p:cNvSpPr txBox="1"/>
+          <p:nvPr/>
+        </p:nvSpPr>
+        <p:spPr>
+          <a:xfrm>
+            <a:off x="1810512" y="1481328"/>
+            <a:ext cx="11704320" cy="411480"/>
+          </a:xfrm>
+          <a:prstGeom prst="rect">
+            <a:avLst/>
+          </a:prstGeom>
+          <a:noFill/>
+        </p:spPr>
+        <p:txBody>
+          <a:bodyPr wrap="square" lIns="25400" rIns="25400" tIns="25400" bIns="25400">
+            <a:spAutoFit/>
+          </a:bodyPr>
+          <a:lstStyle/>
+          <a:p>
+            <a:r>
+              <a:rPr sz="2000" b="1"/>
+              <a:t>Today’s practice project. </a:t>
+            </a:r>
+            <a:r>
+              <a:rPr sz="2000" b="0"/>
+              <a:t>In Exercise 2 you copy it to your own GitHub account; Exercises 3–8 change it.</a:t>
+            </a:r>
+          </a:p>
+        </p:txBody>
+      </p:sp>
+      <p:sp>
+        <p:nvSpPr>
+          <p:cNvPr id="15" name="File list caption"/>
+          <p:cNvSpPr txBox="1"/>
+          <p:nvPr/>
+        </p:nvSpPr>
+        <p:spPr>
+          <a:xfrm>
+            <a:off x="1810512" y="6967728"/>
+            <a:ext cx="4480560" cy="1097280"/>
+          </a:xfrm>
+          <a:prstGeom prst="rect">
+            <a:avLst/>
+          </a:prstGeom>
+          <a:noFill/>
+        </p:spPr>
+        <p:txBody>
+          <a:bodyPr wrap="square" lIns="25400" rIns="25400" tIns="25400" bIns="25400">
+            <a:spAutoFit/>
+          </a:bodyPr>
+          <a:lstStyle/>
+          <a:p>
+            <a:r>
+              <a:rPr sz="1600" b="0">
+                <a:solidFill>
+                  <a:srgbClr val="404040"/>
+                </a:solidFill>
+              </a:rPr>
+              <a:t>The files in the repo. You’ll edit beam.m; tests/ checks it. README.md, AGENTS.md, and .gitignore come back at the end of the lesson.</a:t>
+            </a:r>
           </a:p>
         </p:txBody>
       </p:sp>
